--- a/5 - IL NETWORKING DI KUBERNETES E I SERVICE (L'ANIMA DELLA RETE).pptx
+++ b/5 - IL NETWORKING DI KUBERNETES E I SERVICE (L'ANIMA DELLA RETE).pptx
@@ -5,10 +5,10 @@
     <p:sldMasterId id="2147483672" r:id="rId4"/>
   </p:sldMasterIdLst>
   <p:notesMasterIdLst>
-    <p:notesMasterId r:id="rId36"/>
+    <p:notesMasterId r:id="rId52"/>
   </p:notesMasterIdLst>
   <p:handoutMasterIdLst>
-    <p:handoutMasterId r:id="rId37"/>
+    <p:handoutMasterId r:id="rId53"/>
   </p:handoutMasterIdLst>
   <p:sldIdLst>
     <p:sldId id="262" r:id="rId5"/>
@@ -41,7 +41,23 @@
     <p:sldId id="287" r:id="rId32"/>
     <p:sldId id="288" r:id="rId33"/>
     <p:sldId id="289" r:id="rId34"/>
-    <p:sldId id="261" r:id="rId35"/>
+    <p:sldId id="290" r:id="rId35"/>
+    <p:sldId id="291" r:id="rId36"/>
+    <p:sldId id="292" r:id="rId37"/>
+    <p:sldId id="293" r:id="rId38"/>
+    <p:sldId id="294" r:id="rId39"/>
+    <p:sldId id="295" r:id="rId40"/>
+    <p:sldId id="296" r:id="rId41"/>
+    <p:sldId id="297" r:id="rId42"/>
+    <p:sldId id="298" r:id="rId43"/>
+    <p:sldId id="299" r:id="rId44"/>
+    <p:sldId id="300" r:id="rId45"/>
+    <p:sldId id="301" r:id="rId46"/>
+    <p:sldId id="302" r:id="rId47"/>
+    <p:sldId id="303" r:id="rId48"/>
+    <p:sldId id="304" r:id="rId49"/>
+    <p:sldId id="305" r:id="rId50"/>
+    <p:sldId id="261" r:id="rId51"/>
   </p:sldIdLst>
   <p:sldSz cx="12192000" cy="6858000"/>
   <p:notesSz cx="6858000" cy="9144000"/>
@@ -3567,7 +3583,19 @@
             </a:r>
             <a:r>
               <a:rPr lang="it-IT" dirty="0"/>
-              <a:t>: È la porta su cui si mette in ascolto il Service </a:t>
+              <a:t>: </a:t>
+            </a:r>
+            <a:r>
+              <a:rPr lang="it-IT" dirty="0">
+                <a:solidFill>
+                  <a:srgbClr val="171FE2"/>
+                </a:solidFill>
+              </a:rPr>
+              <a:t>È la porta su cui si mette in ascolto il Service</a:t>
+            </a:r>
+            <a:r>
+              <a:rPr lang="it-IT" dirty="0"/>
+              <a:t> </a:t>
             </a:r>
             <a:r>
               <a:rPr lang="it-IT" b="1" dirty="0"/>
@@ -3593,7 +3621,19 @@
             </a:r>
             <a:r>
               <a:rPr lang="it-IT" dirty="0"/>
-              <a:t>: È la porta fisica reale su cui sta ascoltando il container dentro il </a:t>
+              <a:t>: </a:t>
+            </a:r>
+            <a:r>
+              <a:rPr lang="it-IT" dirty="0">
+                <a:solidFill>
+                  <a:srgbClr val="171FE2"/>
+                </a:solidFill>
+              </a:rPr>
+              <a:t>È la porta fisica reale su cui sta ascoltando il container </a:t>
+            </a:r>
+            <a:r>
+              <a:rPr lang="it-IT" dirty="0"/>
+              <a:t>dentro il </a:t>
             </a:r>
             <a:r>
               <a:rPr lang="it-IT" dirty="0" err="1"/>
@@ -5522,7 +5562,7 @@
         </p:nvSpPr>
         <p:spPr>
           <a:xfrm>
-            <a:off x="1317319" y="1735543"/>
+            <a:off x="1317319" y="1525993"/>
             <a:ext cx="4580561" cy="4803369"/>
           </a:xfrm>
         </p:spPr>
@@ -5707,8 +5747,8 @@
         </p:nvSpPr>
         <p:spPr>
           <a:xfrm>
-            <a:off x="7443216" y="1735543"/>
-            <a:ext cx="3214341" cy="4162165"/>
+            <a:off x="6516116" y="1760943"/>
+            <a:ext cx="5485384" cy="4162165"/>
           </a:xfrm>
           <a:prstGeom prst="rect">
             <a:avLst/>
@@ -5716,7 +5756,7 @@
           <a:noFill/>
         </p:spPr>
         <p:txBody>
-          <a:bodyPr wrap="none" rtlCol="0">
+          <a:bodyPr wrap="square" rtlCol="0">
             <a:spAutoFit/>
           </a:bodyPr>
           <a:lstStyle/>
@@ -6037,7 +6077,25 @@
                 </a:solidFill>
                 <a:latin typeface="Consolas" panose="020B0609020204030204" pitchFamily="49" charset="0"/>
               </a:rPr>
-              <a:t>: 80</a:t>
+              <a:t>: 80  #porta del container </a:t>
+            </a:r>
+            <a:r>
+              <a:rPr lang="it-IT" sz="1600" dirty="0" err="1">
+                <a:solidFill>
+                  <a:srgbClr val="171FE2"/>
+                </a:solidFill>
+                <a:latin typeface="Consolas" panose="020B0609020204030204" pitchFamily="49" charset="0"/>
+              </a:rPr>
+              <a:t>nginx</a:t>
+            </a:r>
+            <a:r>
+              <a:rPr lang="it-IT" sz="1600" dirty="0">
+                <a:solidFill>
+                  <a:srgbClr val="171FE2"/>
+                </a:solidFill>
+                <a:latin typeface="Consolas" panose="020B0609020204030204" pitchFamily="49" charset="0"/>
+              </a:rPr>
+              <a:t> </a:t>
             </a:r>
           </a:p>
           <a:p>
@@ -10817,7 +10875,13 @@
   <p:cSld>
     <p:spTree>
       <p:nvGrpSpPr>
-        <p:cNvPr id="1" name=""/>
+        <p:cNvPr id="1" name="">
+          <a:extLst>
+            <a:ext uri="{FF2B5EF4-FFF2-40B4-BE49-F238E27FC236}">
+              <a16:creationId xmlns:a16="http://schemas.microsoft.com/office/drawing/2014/main" id="{049C2FD1-5E27-EAFC-C08A-3201B0C05F8A}"/>
+            </a:ext>
+          </a:extLst>
+        </p:cNvPr>
         <p:cNvGrpSpPr/>
         <p:nvPr/>
       </p:nvGrpSpPr>
@@ -10831,10 +10895,10 @@
       </p:grpSpPr>
       <p:sp>
         <p:nvSpPr>
-          <p:cNvPr id="2" name="Titolo 1">
+          <p:cNvPr id="2" name="Titolo della lezione">
             <a:extLst>
               <a:ext uri="{FF2B5EF4-FFF2-40B4-BE49-F238E27FC236}">
-                <a16:creationId xmlns:a16="http://schemas.microsoft.com/office/drawing/2014/main" id="{B5E02355-4941-9C10-CA1D-649F04DB5143}"/>
+                <a16:creationId xmlns:a16="http://schemas.microsoft.com/office/drawing/2014/main" id="{941C4834-4C13-C58F-412D-0842D0E906F5}"/>
               </a:ext>
             </a:extLst>
           </p:cNvPr>
@@ -10845,24 +10909,2882 @@
             <p:ph type="title"/>
           </p:nvPr>
         </p:nvSpPr>
-        <p:spPr/>
+        <p:spPr>
+          <a:xfrm>
+            <a:off x="838200" y="831206"/>
+            <a:ext cx="10515600" cy="314198"/>
+          </a:xfrm>
+        </p:spPr>
         <p:txBody>
           <a:bodyPr/>
           <a:lstStyle/>
           <a:p>
             <a:r>
-              <a:rPr lang="it-IT" spc="0" dirty="0">
-                <a:latin typeface="Neue Haas Grotesk Text Pro" panose="020B0504020202020204" pitchFamily="34" charset="0"/>
-              </a:rPr>
-              <a:t>GRAZIE PER L’ATTENZIONE</a:t>
-            </a:r>
+              <a:rPr lang="it-IT" dirty="0"/>
+              <a:t>SLIDE 29: IL PROBLEMA DELLA PERSISTENZA – POD STATELESS VS STATEFUL</a:t>
+            </a:r>
+            <a:br>
+              <a:rPr lang="it-IT" dirty="0"/>
+            </a:br>
+            <a:endParaRPr lang="it-IT" dirty="0"/>
+          </a:p>
+        </p:txBody>
+      </p:sp>
+      <p:sp>
+        <p:nvSpPr>
+          <p:cNvPr id="3" name="Contenuto della lezione">
+            <a:extLst>
+              <a:ext uri="{FF2B5EF4-FFF2-40B4-BE49-F238E27FC236}">
+                <a16:creationId xmlns:a16="http://schemas.microsoft.com/office/drawing/2014/main" id="{155DC880-7D45-35B0-A192-9580F013BE10}"/>
+              </a:ext>
+            </a:extLst>
+          </p:cNvPr>
+          <p:cNvSpPr>
+            <a:spLocks noGrp="1"/>
+          </p:cNvSpPr>
+          <p:nvPr>
+            <p:ph idx="1"/>
+          </p:nvPr>
+        </p:nvSpPr>
+        <p:spPr>
+          <a:xfrm>
+            <a:off x="838200" y="1589185"/>
+            <a:ext cx="10783824" cy="5460839"/>
+          </a:xfrm>
+        </p:spPr>
+        <p:txBody>
+          <a:bodyPr/>
+          <a:lstStyle/>
+          <a:p>
+            <a:r>
+              <a:rPr lang="it-IT" dirty="0"/>
+              <a:t>Fino a questo momento abbiamo visto che i </a:t>
+            </a:r>
+            <a:r>
+              <a:rPr lang="it-IT" dirty="0" err="1"/>
+              <a:t>Pod</a:t>
+            </a:r>
+            <a:r>
+              <a:rPr lang="it-IT" dirty="0"/>
+              <a:t> sono per loro natura effimeri, volatili e mortali.</a:t>
+            </a:r>
+          </a:p>
+          <a:p>
+            <a:r>
+              <a:rPr lang="it-IT" dirty="0"/>
+              <a:t>Quando un </a:t>
+            </a:r>
+            <a:r>
+              <a:rPr lang="it-IT" dirty="0" err="1"/>
+              <a:t>Pod</a:t>
+            </a:r>
+            <a:r>
+              <a:rPr lang="it-IT" dirty="0"/>
+              <a:t> viene distrutto dal Deployment per un qualsiasi motivo, tutto ciò che si trovava al suo interno — file creati, file di log, sessioni utente o modifiche al sistema operativo — sparisce per sempre nel nulla senza alcuna possibilità di recupero. </a:t>
+            </a:r>
+          </a:p>
+          <a:p>
+            <a:r>
+              <a:rPr lang="it-IT" dirty="0">
+                <a:solidFill>
+                  <a:srgbClr val="171FE2"/>
+                </a:solidFill>
+              </a:rPr>
+              <a:t>Questo comportamento distruttivo in realtà è perfetto per componenti come il nostro </a:t>
+            </a:r>
+            <a:r>
+              <a:rPr lang="it-IT" dirty="0" err="1">
+                <a:solidFill>
+                  <a:srgbClr val="171FE2"/>
+                </a:solidFill>
+              </a:rPr>
+              <a:t>frontend</a:t>
+            </a:r>
+            <a:r>
+              <a:rPr lang="it-IT" dirty="0">
+                <a:solidFill>
+                  <a:srgbClr val="171FE2"/>
+                </a:solidFill>
+              </a:rPr>
+              <a:t> in React o il nostro </a:t>
+            </a:r>
+            <a:r>
+              <a:rPr lang="it-IT" dirty="0" err="1">
+                <a:solidFill>
+                  <a:srgbClr val="171FE2"/>
+                </a:solidFill>
+              </a:rPr>
+              <a:t>backend</a:t>
+            </a:r>
+            <a:r>
+              <a:rPr lang="it-IT" dirty="0">
+                <a:solidFill>
+                  <a:srgbClr val="171FE2"/>
+                </a:solidFill>
+              </a:rPr>
+              <a:t> Spring Boot. </a:t>
+            </a:r>
+          </a:p>
+          <a:p>
+            <a:r>
+              <a:rPr lang="it-IT" dirty="0"/>
+              <a:t>Queste applicazioni vengono definite </a:t>
+            </a:r>
+            <a:r>
+              <a:rPr lang="it-IT" b="1" dirty="0" err="1"/>
+              <a:t>Stateless</a:t>
+            </a:r>
+            <a:r>
+              <a:rPr lang="it-IT" dirty="0"/>
+              <a:t> (senza stato): il loro unico compito è ricevere una richiesta HTTP, elaborarla, fare dei calcoli e sputare un risultato. </a:t>
+            </a:r>
+          </a:p>
+          <a:p>
+            <a:r>
+              <a:rPr lang="it-IT" dirty="0"/>
+              <a:t>Se un </a:t>
+            </a:r>
+            <a:r>
+              <a:rPr lang="it-IT" dirty="0" err="1"/>
+              <a:t>Pod</a:t>
+            </a:r>
+            <a:r>
+              <a:rPr lang="it-IT" dirty="0"/>
+              <a:t> del </a:t>
+            </a:r>
+            <a:r>
+              <a:rPr lang="it-IT" dirty="0" err="1"/>
+              <a:t>backend</a:t>
+            </a:r>
+            <a:r>
+              <a:rPr lang="it-IT" dirty="0"/>
+              <a:t> muore, non ci interessa: </a:t>
+            </a:r>
+            <a:r>
+              <a:rPr lang="it-IT" dirty="0" err="1"/>
+              <a:t>Kubernetes</a:t>
+            </a:r>
+            <a:r>
+              <a:rPr lang="it-IT" dirty="0"/>
+              <a:t> ne accende un altro identico che ricomincia a fare calcoli esattamente come il precedente, senza aver perso nessuna informazione vitale.</a:t>
+            </a:r>
+            <a:endParaRPr lang="it-IT" dirty="0">
+              <a:solidFill>
+                <a:srgbClr val="171FE2"/>
+              </a:solidFill>
+              <a:latin typeface="Consolas" panose="020B0609020204030204" pitchFamily="49" charset="0"/>
+            </a:endParaRPr>
           </a:p>
         </p:txBody>
       </p:sp>
     </p:spTree>
     <p:extLst>
       <p:ext uri="{BB962C8B-B14F-4D97-AF65-F5344CB8AC3E}">
-        <p14:creationId xmlns:p14="http://schemas.microsoft.com/office/powerpoint/2010/main" val="3003246572"/>
+        <p14:creationId xmlns:p14="http://schemas.microsoft.com/office/powerpoint/2010/main" val="3164027633"/>
+      </p:ext>
+    </p:extLst>
+  </p:cSld>
+  <p:clrMapOvr>
+    <a:masterClrMapping/>
+  </p:clrMapOvr>
+</p:sld>
+</file>
+
+<file path=ppt/slides/slide32.xml><?xml version="1.0" encoding="utf-8"?>
+<p:sld xmlns:a="http://schemas.openxmlformats.org/drawingml/2006/main" xmlns:r="http://schemas.openxmlformats.org/officeDocument/2006/relationships" xmlns:p="http://schemas.openxmlformats.org/presentationml/2006/main">
+  <p:cSld>
+    <p:spTree>
+      <p:nvGrpSpPr>
+        <p:cNvPr id="1" name="">
+          <a:extLst>
+            <a:ext uri="{FF2B5EF4-FFF2-40B4-BE49-F238E27FC236}">
+              <a16:creationId xmlns:a16="http://schemas.microsoft.com/office/drawing/2014/main" id="{6635C326-85DC-2C5C-46A5-20C104A594D9}"/>
+            </a:ext>
+          </a:extLst>
+        </p:cNvPr>
+        <p:cNvGrpSpPr/>
+        <p:nvPr/>
+      </p:nvGrpSpPr>
+      <p:grpSpPr>
+        <a:xfrm>
+          <a:off x="0" y="0"/>
+          <a:ext cx="0" cy="0"/>
+          <a:chOff x="0" y="0"/>
+          <a:chExt cx="0" cy="0"/>
+        </a:xfrm>
+      </p:grpSpPr>
+      <p:sp>
+        <p:nvSpPr>
+          <p:cNvPr id="2" name="Titolo della lezione">
+            <a:extLst>
+              <a:ext uri="{FF2B5EF4-FFF2-40B4-BE49-F238E27FC236}">
+                <a16:creationId xmlns:a16="http://schemas.microsoft.com/office/drawing/2014/main" id="{F6FFD215-F4C7-6CAD-2EA0-4673FF82744A}"/>
+              </a:ext>
+            </a:extLst>
+          </p:cNvPr>
+          <p:cNvSpPr>
+            <a:spLocks noGrp="1"/>
+          </p:cNvSpPr>
+          <p:nvPr>
+            <p:ph type="title"/>
+          </p:nvPr>
+        </p:nvSpPr>
+        <p:spPr>
+          <a:xfrm>
+            <a:off x="838200" y="831206"/>
+            <a:ext cx="10515600" cy="314198"/>
+          </a:xfrm>
+        </p:spPr>
+        <p:txBody>
+          <a:bodyPr/>
+          <a:lstStyle/>
+          <a:p>
+            <a:r>
+              <a:rPr lang="it-IT" dirty="0"/>
+              <a:t>SLIDE 30: IL PROBLEMA DELLA PERSISTENZA – POD STATELESS VS STATEFUL</a:t>
+            </a:r>
+            <a:br>
+              <a:rPr lang="it-IT" dirty="0"/>
+            </a:br>
+            <a:endParaRPr lang="it-IT" dirty="0"/>
+          </a:p>
+        </p:txBody>
+      </p:sp>
+      <p:sp>
+        <p:nvSpPr>
+          <p:cNvPr id="3" name="Contenuto della lezione">
+            <a:extLst>
+              <a:ext uri="{FF2B5EF4-FFF2-40B4-BE49-F238E27FC236}">
+                <a16:creationId xmlns:a16="http://schemas.microsoft.com/office/drawing/2014/main" id="{BAD071B4-494F-4606-7FF6-5D6CF7B7E76C}"/>
+              </a:ext>
+            </a:extLst>
+          </p:cNvPr>
+          <p:cNvSpPr>
+            <a:spLocks noGrp="1"/>
+          </p:cNvSpPr>
+          <p:nvPr>
+            <p:ph idx="1"/>
+          </p:nvPr>
+        </p:nvSpPr>
+        <p:spPr>
+          <a:xfrm>
+            <a:off x="838200" y="1589185"/>
+            <a:ext cx="10783824" cy="5460839"/>
+          </a:xfrm>
+        </p:spPr>
+        <p:txBody>
+          <a:bodyPr/>
+          <a:lstStyle/>
+          <a:p>
+            <a:r>
+              <a:rPr lang="it-IT" dirty="0"/>
+              <a:t>Tuttavia, c'è un componente della nostra architettura </a:t>
+            </a:r>
+            <a:r>
+              <a:rPr lang="it-IT" dirty="0" err="1"/>
+              <a:t>enterprise</a:t>
+            </a:r>
+            <a:r>
+              <a:rPr lang="it-IT" dirty="0"/>
+              <a:t> che non può assolutamente permettersi questo lusso: il database </a:t>
+            </a:r>
+            <a:r>
+              <a:rPr lang="it-IT" dirty="0" err="1"/>
+              <a:t>MariaDB</a:t>
+            </a:r>
+            <a:r>
+              <a:rPr lang="it-IT" dirty="0"/>
+              <a:t>. </a:t>
+            </a:r>
+          </a:p>
+          <a:p>
+            <a:r>
+              <a:rPr lang="it-IT" dirty="0"/>
+              <a:t>Il database è un'applicazione </a:t>
+            </a:r>
+            <a:r>
+              <a:rPr lang="it-IT" b="1" dirty="0" err="1"/>
+              <a:t>Stateful</a:t>
+            </a:r>
+            <a:r>
+              <a:rPr lang="it-IT" dirty="0"/>
+              <a:t> (con stato), ovvero un software la cui intera utilità aziendale risiede nella sua memoria storica, nei dati strutturati che conserva. </a:t>
+            </a:r>
+          </a:p>
+          <a:p>
+            <a:r>
+              <a:rPr lang="it-IT" dirty="0"/>
+              <a:t>Se il </a:t>
+            </a:r>
+            <a:r>
+              <a:rPr lang="it-IT" dirty="0" err="1"/>
+              <a:t>Pod</a:t>
+            </a:r>
+            <a:r>
+              <a:rPr lang="it-IT" dirty="0"/>
+              <a:t> che ospita </a:t>
+            </a:r>
+            <a:r>
+              <a:rPr lang="it-IT" dirty="0" err="1"/>
+              <a:t>MariaDB</a:t>
+            </a:r>
+            <a:r>
+              <a:rPr lang="it-IT" dirty="0"/>
+              <a:t> dovesse subire un crash o venire riavviato per un aggiornamento, e i dati risiedessero all'interno del container, l'azienda perderebbe istantaneamente l'anagrafica dei clienti, le tabelle degli utenti e lo storico degli ordini, affrontando un disastro economico. </a:t>
+            </a:r>
+          </a:p>
+          <a:p>
+            <a:r>
+              <a:rPr lang="it-IT" dirty="0"/>
+              <a:t>Di fabbrica, i container scrivono i dati in uno strato di memoria temporaneo legato alla vita del container stesso. </a:t>
+            </a:r>
+          </a:p>
+          <a:p>
+            <a:r>
+              <a:rPr lang="it-IT" dirty="0">
+                <a:solidFill>
+                  <a:srgbClr val="171FE2"/>
+                </a:solidFill>
+              </a:rPr>
+              <a:t>Per evitare la tragedia della perdita dei dati, </a:t>
+            </a:r>
+            <a:r>
+              <a:rPr lang="it-IT" dirty="0" err="1">
+                <a:solidFill>
+                  <a:srgbClr val="171FE2"/>
+                </a:solidFill>
+              </a:rPr>
+              <a:t>Kubernetes</a:t>
+            </a:r>
+            <a:r>
+              <a:rPr lang="it-IT" dirty="0">
+                <a:solidFill>
+                  <a:srgbClr val="171FE2"/>
+                </a:solidFill>
+              </a:rPr>
+              <a:t> separa: fisicamente il ciclo di vita del </a:t>
+            </a:r>
+            <a:r>
+              <a:rPr lang="it-IT" b="1" dirty="0">
+                <a:solidFill>
+                  <a:srgbClr val="171FE2"/>
+                </a:solidFill>
+              </a:rPr>
+              <a:t>calcolo</a:t>
+            </a:r>
+            <a:r>
+              <a:rPr lang="it-IT" dirty="0">
+                <a:solidFill>
+                  <a:srgbClr val="171FE2"/>
+                </a:solidFill>
+              </a:rPr>
+              <a:t> (il container, che può morire in ogni momento) dal ciclo di vita del </a:t>
+            </a:r>
+            <a:r>
+              <a:rPr lang="it-IT" b="1" dirty="0">
+                <a:solidFill>
+                  <a:srgbClr val="171FE2"/>
+                </a:solidFill>
+              </a:rPr>
+              <a:t>dato reale</a:t>
+            </a:r>
+            <a:r>
+              <a:rPr lang="it-IT" dirty="0">
+                <a:solidFill>
+                  <a:srgbClr val="171FE2"/>
+                </a:solidFill>
+              </a:rPr>
+              <a:t> (il disco fisso, che deve rimanere eterno).</a:t>
+            </a:r>
+            <a:endParaRPr lang="it-IT" dirty="0">
+              <a:solidFill>
+                <a:srgbClr val="171FE2"/>
+              </a:solidFill>
+              <a:latin typeface="Consolas" panose="020B0609020204030204" pitchFamily="49" charset="0"/>
+            </a:endParaRPr>
+          </a:p>
+        </p:txBody>
+      </p:sp>
+    </p:spTree>
+    <p:extLst>
+      <p:ext uri="{BB962C8B-B14F-4D97-AF65-F5344CB8AC3E}">
+        <p14:creationId xmlns:p14="http://schemas.microsoft.com/office/powerpoint/2010/main" val="2374501930"/>
+      </p:ext>
+    </p:extLst>
+  </p:cSld>
+  <p:clrMapOvr>
+    <a:masterClrMapping/>
+  </p:clrMapOvr>
+</p:sld>
+</file>
+
+<file path=ppt/slides/slide33.xml><?xml version="1.0" encoding="utf-8"?>
+<p:sld xmlns:a="http://schemas.openxmlformats.org/drawingml/2006/main" xmlns:r="http://schemas.openxmlformats.org/officeDocument/2006/relationships" xmlns:p="http://schemas.openxmlformats.org/presentationml/2006/main">
+  <p:cSld>
+    <p:spTree>
+      <p:nvGrpSpPr>
+        <p:cNvPr id="1" name="">
+          <a:extLst>
+            <a:ext uri="{FF2B5EF4-FFF2-40B4-BE49-F238E27FC236}">
+              <a16:creationId xmlns:a16="http://schemas.microsoft.com/office/drawing/2014/main" id="{10DBBDEB-7A85-7377-BCA9-2B111C4AD499}"/>
+            </a:ext>
+          </a:extLst>
+        </p:cNvPr>
+        <p:cNvGrpSpPr/>
+        <p:nvPr/>
+      </p:nvGrpSpPr>
+      <p:grpSpPr>
+        <a:xfrm>
+          <a:off x="0" y="0"/>
+          <a:ext cx="0" cy="0"/>
+          <a:chOff x="0" y="0"/>
+          <a:chExt cx="0" cy="0"/>
+        </a:xfrm>
+      </p:grpSpPr>
+      <p:sp>
+        <p:nvSpPr>
+          <p:cNvPr id="2" name="Titolo della lezione">
+            <a:extLst>
+              <a:ext uri="{FF2B5EF4-FFF2-40B4-BE49-F238E27FC236}">
+                <a16:creationId xmlns:a16="http://schemas.microsoft.com/office/drawing/2014/main" id="{98C36532-F388-DE28-459F-0CE6FB76C5F6}"/>
+              </a:ext>
+            </a:extLst>
+          </p:cNvPr>
+          <p:cNvSpPr>
+            <a:spLocks noGrp="1"/>
+          </p:cNvSpPr>
+          <p:nvPr>
+            <p:ph type="title"/>
+          </p:nvPr>
+        </p:nvSpPr>
+        <p:spPr>
+          <a:xfrm>
+            <a:off x="838200" y="831206"/>
+            <a:ext cx="10515600" cy="314198"/>
+          </a:xfrm>
+        </p:spPr>
+        <p:txBody>
+          <a:bodyPr/>
+          <a:lstStyle/>
+          <a:p>
+            <a:r>
+              <a:rPr lang="it-IT" dirty="0"/>
+              <a:t>SLIDE 31: IL MECCANISMO DEGLI STORAGE – PERSISTENTVOLUME (PV) E CLAIM (PVC)</a:t>
+            </a:r>
+            <a:br>
+              <a:rPr lang="it-IT" dirty="0"/>
+            </a:br>
+            <a:endParaRPr lang="it-IT" dirty="0"/>
+          </a:p>
+        </p:txBody>
+      </p:sp>
+      <p:sp>
+        <p:nvSpPr>
+          <p:cNvPr id="3" name="Contenuto della lezione">
+            <a:extLst>
+              <a:ext uri="{FF2B5EF4-FFF2-40B4-BE49-F238E27FC236}">
+                <a16:creationId xmlns:a16="http://schemas.microsoft.com/office/drawing/2014/main" id="{1D2D507D-0634-A5F5-4B84-CF0BC496238A}"/>
+              </a:ext>
+            </a:extLst>
+          </p:cNvPr>
+          <p:cNvSpPr>
+            <a:spLocks noGrp="1"/>
+          </p:cNvSpPr>
+          <p:nvPr>
+            <p:ph idx="1"/>
+          </p:nvPr>
+        </p:nvSpPr>
+        <p:spPr>
+          <a:xfrm>
+            <a:off x="838200" y="1589185"/>
+            <a:ext cx="10783824" cy="5460839"/>
+          </a:xfrm>
+        </p:spPr>
+        <p:txBody>
+          <a:bodyPr/>
+          <a:lstStyle/>
+          <a:p>
+            <a:r>
+              <a:rPr lang="it-IT" dirty="0"/>
+              <a:t>Per gestire la persistenza dei dati </a:t>
+            </a:r>
+            <a:r>
+              <a:rPr lang="it-IT" dirty="0" err="1"/>
+              <a:t>Kubernetes</a:t>
+            </a:r>
+            <a:r>
+              <a:rPr lang="it-IT" dirty="0"/>
+              <a:t> introduce due oggetti YAML ben distinti: </a:t>
+            </a:r>
+          </a:p>
+          <a:p>
+            <a:r>
+              <a:rPr lang="it-IT" dirty="0"/>
+              <a:t>Il </a:t>
+            </a:r>
+            <a:r>
+              <a:rPr lang="it-IT" b="1" dirty="0" err="1"/>
+              <a:t>PersistentVolume</a:t>
+            </a:r>
+            <a:r>
+              <a:rPr lang="it-IT" b="1" dirty="0"/>
+              <a:t> (PV)</a:t>
+            </a:r>
+            <a:r>
+              <a:rPr lang="it-IT" dirty="0"/>
+              <a:t> rappresenta la risorsa fisica reale, il disco fisso o la cartella del server dotata di spazio di archiviazione. </a:t>
+            </a:r>
+          </a:p>
+          <a:p>
+            <a:r>
+              <a:rPr lang="it-IT" dirty="0"/>
+              <a:t>Viene creato e configurato dall'amministratore di sistema (il sistemista senior), il quale dichiara a </a:t>
+            </a:r>
+            <a:r>
+              <a:rPr lang="it-IT" dirty="0" err="1"/>
+              <a:t>Kubernetes</a:t>
+            </a:r>
+            <a:r>
+              <a:rPr lang="it-IT" dirty="0"/>
+              <a:t>: </a:t>
+            </a:r>
+            <a:r>
+              <a:rPr lang="it-IT" i="1" dirty="0">
+                <a:solidFill>
+                  <a:srgbClr val="171FE2"/>
+                </a:solidFill>
+              </a:rPr>
+              <a:t>"Metto a disposizione del cluster un hard disk reale da 50 Gigabyte situato in questo specifico server"</a:t>
+            </a:r>
+            <a:r>
+              <a:rPr lang="it-IT" i="1" dirty="0"/>
+              <a:t>.</a:t>
+            </a:r>
+          </a:p>
+          <a:p>
+            <a:r>
+              <a:rPr lang="it-IT" dirty="0"/>
+              <a:t>Il </a:t>
+            </a:r>
+            <a:r>
+              <a:rPr lang="it-IT" b="1" dirty="0" err="1"/>
+              <a:t>PersistentVolumeClaim</a:t>
+            </a:r>
+            <a:r>
+              <a:rPr lang="it-IT" b="1" dirty="0"/>
+              <a:t> (PVC)</a:t>
+            </a:r>
+            <a:r>
+              <a:rPr lang="it-IT" dirty="0"/>
+              <a:t> rappresenta </a:t>
+            </a:r>
+            <a:r>
+              <a:rPr lang="it-IT" b="1" dirty="0"/>
+              <a:t>la prenotazione dello spazio</a:t>
+            </a:r>
+            <a:r>
+              <a:rPr lang="it-IT" dirty="0"/>
+              <a:t> effettuata dallo sviluppatore del software per conto della sua applicazione. </a:t>
+            </a:r>
+          </a:p>
+          <a:p>
+            <a:r>
+              <a:rPr lang="it-IT" dirty="0"/>
+              <a:t>Nel PVC, il programmatore scrive semplicemente: </a:t>
+            </a:r>
+            <a:r>
+              <a:rPr lang="it-IT" i="1" dirty="0">
+                <a:solidFill>
+                  <a:srgbClr val="171FE2"/>
+                </a:solidFill>
+              </a:rPr>
+              <a:t>"Ho bisogno di 2 Gigabyte di spazio disco, con permessi di lettura e scrittura rapida"</a:t>
+            </a:r>
+            <a:r>
+              <a:rPr lang="it-IT" dirty="0"/>
+              <a:t>. </a:t>
+            </a:r>
+          </a:p>
+          <a:p>
+            <a:r>
+              <a:rPr lang="it-IT" dirty="0" err="1"/>
+              <a:t>Kubernetes</a:t>
+            </a:r>
+            <a:r>
+              <a:rPr lang="it-IT" dirty="0"/>
+              <a:t> prende questo foglio di richiesta (PVC), va a controllare gli spazi disponibili (PV), trova il pezzo di disco compatibile e attiva un legame indissolubile chiamato </a:t>
+            </a:r>
+            <a:r>
+              <a:rPr lang="it-IT" b="1" dirty="0"/>
+              <a:t>Binding</a:t>
+            </a:r>
+            <a:r>
+              <a:rPr lang="it-IT" dirty="0"/>
+              <a:t> (Collegamento).</a:t>
+            </a:r>
+          </a:p>
+          <a:p>
+            <a:r>
+              <a:rPr lang="it-IT" dirty="0"/>
+              <a:t>Quando il </a:t>
+            </a:r>
+            <a:r>
+              <a:rPr lang="it-IT" dirty="0" err="1"/>
+              <a:t>Pod</a:t>
+            </a:r>
+            <a:r>
+              <a:rPr lang="it-IT" dirty="0"/>
+              <a:t> del database si accende, non parlerà con l'hard disk fisico, ma si aggancerà al PVC. </a:t>
+            </a:r>
+            <a:r>
+              <a:rPr lang="it-IT" dirty="0">
+                <a:solidFill>
+                  <a:srgbClr val="171FE2"/>
+                </a:solidFill>
+              </a:rPr>
+              <a:t>Se il </a:t>
+            </a:r>
+            <a:r>
+              <a:rPr lang="it-IT" dirty="0" err="1">
+                <a:solidFill>
+                  <a:srgbClr val="171FE2"/>
+                </a:solidFill>
+              </a:rPr>
+              <a:t>Pod</a:t>
+            </a:r>
+            <a:r>
+              <a:rPr lang="it-IT" dirty="0">
+                <a:solidFill>
+                  <a:srgbClr val="171FE2"/>
+                </a:solidFill>
+              </a:rPr>
+              <a:t> del database muore, il PVC rimane vivo sul cluster, mantenendo i dati congelati e pronti a essere iniettati nel </a:t>
+            </a:r>
+            <a:r>
+              <a:rPr lang="it-IT" dirty="0" err="1">
+                <a:solidFill>
+                  <a:srgbClr val="171FE2"/>
+                </a:solidFill>
+              </a:rPr>
+              <a:t>Pod</a:t>
+            </a:r>
+            <a:r>
+              <a:rPr lang="it-IT" dirty="0">
+                <a:solidFill>
+                  <a:srgbClr val="171FE2"/>
+                </a:solidFill>
+              </a:rPr>
+              <a:t> sostituto.</a:t>
+            </a:r>
+          </a:p>
+        </p:txBody>
+      </p:sp>
+    </p:spTree>
+    <p:extLst>
+      <p:ext uri="{BB962C8B-B14F-4D97-AF65-F5344CB8AC3E}">
+        <p14:creationId xmlns:p14="http://schemas.microsoft.com/office/powerpoint/2010/main" val="1046831842"/>
+      </p:ext>
+    </p:extLst>
+  </p:cSld>
+  <p:clrMapOvr>
+    <a:masterClrMapping/>
+  </p:clrMapOvr>
+</p:sld>
+</file>
+
+<file path=ppt/slides/slide34.xml><?xml version="1.0" encoding="utf-8"?>
+<p:sld xmlns:a="http://schemas.openxmlformats.org/drawingml/2006/main" xmlns:r="http://schemas.openxmlformats.org/officeDocument/2006/relationships" xmlns:p="http://schemas.openxmlformats.org/presentationml/2006/main">
+  <p:cSld>
+    <p:spTree>
+      <p:nvGrpSpPr>
+        <p:cNvPr id="1" name="">
+          <a:extLst>
+            <a:ext uri="{FF2B5EF4-FFF2-40B4-BE49-F238E27FC236}">
+              <a16:creationId xmlns:a16="http://schemas.microsoft.com/office/drawing/2014/main" id="{F0AA6F83-8576-1895-6094-8DB0458A10F2}"/>
+            </a:ext>
+          </a:extLst>
+        </p:cNvPr>
+        <p:cNvGrpSpPr/>
+        <p:nvPr/>
+      </p:nvGrpSpPr>
+      <p:grpSpPr>
+        <a:xfrm>
+          <a:off x="0" y="0"/>
+          <a:ext cx="0" cy="0"/>
+          <a:chOff x="0" y="0"/>
+          <a:chExt cx="0" cy="0"/>
+        </a:xfrm>
+      </p:grpSpPr>
+      <p:sp>
+        <p:nvSpPr>
+          <p:cNvPr id="2" name="Titolo della lezione">
+            <a:extLst>
+              <a:ext uri="{FF2B5EF4-FFF2-40B4-BE49-F238E27FC236}">
+                <a16:creationId xmlns:a16="http://schemas.microsoft.com/office/drawing/2014/main" id="{7C24A541-D8B4-F7F8-0958-85E986988848}"/>
+              </a:ext>
+            </a:extLst>
+          </p:cNvPr>
+          <p:cNvSpPr>
+            <a:spLocks noGrp="1"/>
+          </p:cNvSpPr>
+          <p:nvPr>
+            <p:ph type="title"/>
+          </p:nvPr>
+        </p:nvSpPr>
+        <p:spPr>
+          <a:xfrm>
+            <a:off x="838200" y="831206"/>
+            <a:ext cx="10515600" cy="314198"/>
+          </a:xfrm>
+        </p:spPr>
+        <p:txBody>
+          <a:bodyPr/>
+          <a:lstStyle/>
+          <a:p>
+            <a:r>
+              <a:rPr lang="it-IT" dirty="0"/>
+              <a:t>SLIDE 32: LAB PRACTICAL – CREARE LA PRENOTAZIONE DI MEMORIA (PVC) PER IL DATABASE</a:t>
+            </a:r>
+            <a:br>
+              <a:rPr lang="it-IT" dirty="0"/>
+            </a:br>
+            <a:endParaRPr lang="it-IT" dirty="0"/>
+          </a:p>
+        </p:txBody>
+      </p:sp>
+      <p:sp>
+        <p:nvSpPr>
+          <p:cNvPr id="3" name="Contenuto della lezione">
+            <a:extLst>
+              <a:ext uri="{FF2B5EF4-FFF2-40B4-BE49-F238E27FC236}">
+                <a16:creationId xmlns:a16="http://schemas.microsoft.com/office/drawing/2014/main" id="{C93A2A08-09A5-4401-A358-F6801EBA79D0}"/>
+              </a:ext>
+            </a:extLst>
+          </p:cNvPr>
+          <p:cNvSpPr>
+            <a:spLocks noGrp="1"/>
+          </p:cNvSpPr>
+          <p:nvPr>
+            <p:ph idx="1"/>
+          </p:nvPr>
+        </p:nvSpPr>
+        <p:spPr>
+          <a:xfrm>
+            <a:off x="838200" y="1589185"/>
+            <a:ext cx="4521200" cy="5460839"/>
+          </a:xfrm>
+        </p:spPr>
+        <p:txBody>
+          <a:bodyPr/>
+          <a:lstStyle/>
+          <a:p>
+            <a:r>
+              <a:rPr lang="it-IT" dirty="0"/>
+              <a:t>Creiamo una prenotazione di memoria persistente per il database </a:t>
+            </a:r>
+            <a:r>
+              <a:rPr lang="it-IT" dirty="0" err="1"/>
+              <a:t>MariaDB</a:t>
+            </a:r>
+            <a:r>
+              <a:rPr lang="it-IT" dirty="0"/>
+              <a:t> della nostra infrastruttura </a:t>
+            </a:r>
+            <a:r>
+              <a:rPr lang="it-IT" dirty="0" err="1"/>
+              <a:t>enterprise</a:t>
+            </a:r>
+            <a:r>
+              <a:rPr lang="it-IT" dirty="0"/>
+              <a:t>. </a:t>
+            </a:r>
+          </a:p>
+          <a:p>
+            <a:r>
+              <a:rPr lang="it-IT" dirty="0"/>
+              <a:t>Creeremo un file YAML che ordinerà a </a:t>
+            </a:r>
+            <a:r>
+              <a:rPr lang="it-IT" dirty="0" err="1"/>
+              <a:t>Kubernetes</a:t>
+            </a:r>
+            <a:r>
+              <a:rPr lang="it-IT" dirty="0"/>
+              <a:t> di riservare uno spazio protetto sul disco fisso del nostro computer, spazio che rimarrà intatto anche se dovessimo spegnere Docker Desktop o formattare i container.</a:t>
+            </a:r>
+          </a:p>
+          <a:p>
+            <a:r>
+              <a:rPr lang="it-IT" dirty="0"/>
+              <a:t>Su VS Code creiamo </a:t>
+            </a:r>
+            <a:r>
+              <a:rPr lang="it-IT" b="1" dirty="0"/>
+              <a:t>database-</a:t>
+            </a:r>
+            <a:r>
+              <a:rPr lang="it-IT" b="1" dirty="0" err="1"/>
+              <a:t>pvc.yaml</a:t>
+            </a:r>
+            <a:r>
+              <a:rPr lang="it-IT" dirty="0"/>
+              <a:t>. </a:t>
+            </a:r>
+          </a:p>
+          <a:p>
+            <a:r>
+              <a:rPr lang="it-IT" dirty="0"/>
+              <a:t>Copiamo al suo interno il codice sorgente sulla destra ed eseguiamo il comando:</a:t>
+            </a:r>
+          </a:p>
+          <a:p>
+            <a:r>
+              <a:rPr lang="it-IT" dirty="0" err="1">
+                <a:solidFill>
+                  <a:srgbClr val="171FE2"/>
+                </a:solidFill>
+                <a:latin typeface="Consolas" panose="020B0609020204030204" pitchFamily="49" charset="0"/>
+              </a:rPr>
+              <a:t>kubectl</a:t>
+            </a:r>
+            <a:r>
+              <a:rPr lang="it-IT" dirty="0">
+                <a:solidFill>
+                  <a:srgbClr val="171FE2"/>
+                </a:solidFill>
+                <a:latin typeface="Consolas" panose="020B0609020204030204" pitchFamily="49" charset="0"/>
+              </a:rPr>
+              <a:t> </a:t>
+            </a:r>
+            <a:r>
+              <a:rPr lang="it-IT" dirty="0" err="1">
+                <a:solidFill>
+                  <a:srgbClr val="171FE2"/>
+                </a:solidFill>
+                <a:latin typeface="Consolas" panose="020B0609020204030204" pitchFamily="49" charset="0"/>
+              </a:rPr>
+              <a:t>apply</a:t>
+            </a:r>
+            <a:r>
+              <a:rPr lang="it-IT" dirty="0">
+                <a:solidFill>
+                  <a:srgbClr val="171FE2"/>
+                </a:solidFill>
+                <a:latin typeface="Consolas" panose="020B0609020204030204" pitchFamily="49" charset="0"/>
+              </a:rPr>
+              <a:t> -f database-</a:t>
+            </a:r>
+            <a:r>
+              <a:rPr lang="it-IT" dirty="0" err="1">
+                <a:solidFill>
+                  <a:srgbClr val="171FE2"/>
+                </a:solidFill>
+                <a:latin typeface="Consolas" panose="020B0609020204030204" pitchFamily="49" charset="0"/>
+              </a:rPr>
+              <a:t>pvc.yaml</a:t>
+            </a:r>
+            <a:endParaRPr lang="it-IT" dirty="0">
+              <a:solidFill>
+                <a:srgbClr val="171FE2"/>
+              </a:solidFill>
+              <a:latin typeface="Consolas" panose="020B0609020204030204" pitchFamily="49" charset="0"/>
+            </a:endParaRPr>
+          </a:p>
+        </p:txBody>
+      </p:sp>
+      <p:sp>
+        <p:nvSpPr>
+          <p:cNvPr id="4" name="CasellaDiTesto 3">
+            <a:extLst>
+              <a:ext uri="{FF2B5EF4-FFF2-40B4-BE49-F238E27FC236}">
+                <a16:creationId xmlns:a16="http://schemas.microsoft.com/office/drawing/2014/main" id="{888C8FDC-B9B4-0B1D-0FB9-EABDD276A505}"/>
+              </a:ext>
+            </a:extLst>
+          </p:cNvPr>
+          <p:cNvSpPr txBox="1"/>
+          <p:nvPr/>
+        </p:nvSpPr>
+        <p:spPr>
+          <a:xfrm>
+            <a:off x="6553200" y="1589185"/>
+            <a:ext cx="3857146" cy="2862322"/>
+          </a:xfrm>
+          <a:prstGeom prst="rect">
+            <a:avLst/>
+          </a:prstGeom>
+          <a:noFill/>
+        </p:spPr>
+        <p:txBody>
+          <a:bodyPr wrap="none" rtlCol="0">
+            <a:spAutoFit/>
+          </a:bodyPr>
+          <a:lstStyle/>
+          <a:p>
+            <a:r>
+              <a:rPr lang="it-IT" dirty="0" err="1">
+                <a:solidFill>
+                  <a:srgbClr val="171FE2"/>
+                </a:solidFill>
+                <a:latin typeface="Consolas" panose="020B0609020204030204" pitchFamily="49" charset="0"/>
+              </a:rPr>
+              <a:t>apiVersion</a:t>
+            </a:r>
+            <a:r>
+              <a:rPr lang="it-IT" dirty="0">
+                <a:solidFill>
+                  <a:srgbClr val="171FE2"/>
+                </a:solidFill>
+                <a:latin typeface="Consolas" panose="020B0609020204030204" pitchFamily="49" charset="0"/>
+              </a:rPr>
+              <a:t>: v1</a:t>
+            </a:r>
+          </a:p>
+          <a:p>
+            <a:r>
+              <a:rPr lang="it-IT" dirty="0" err="1">
+                <a:solidFill>
+                  <a:srgbClr val="171FE2"/>
+                </a:solidFill>
+                <a:latin typeface="Consolas" panose="020B0609020204030204" pitchFamily="49" charset="0"/>
+              </a:rPr>
+              <a:t>kind</a:t>
+            </a:r>
+            <a:r>
+              <a:rPr lang="it-IT" dirty="0">
+                <a:solidFill>
+                  <a:srgbClr val="171FE2"/>
+                </a:solidFill>
+                <a:latin typeface="Consolas" panose="020B0609020204030204" pitchFamily="49" charset="0"/>
+              </a:rPr>
+              <a:t>: </a:t>
+            </a:r>
+            <a:r>
+              <a:rPr lang="it-IT" dirty="0" err="1">
+                <a:solidFill>
+                  <a:srgbClr val="171FE2"/>
+                </a:solidFill>
+                <a:latin typeface="Consolas" panose="020B0609020204030204" pitchFamily="49" charset="0"/>
+              </a:rPr>
+              <a:t>PersistentVolumeClaim</a:t>
+            </a:r>
+            <a:endParaRPr lang="it-IT" dirty="0">
+              <a:solidFill>
+                <a:srgbClr val="171FE2"/>
+              </a:solidFill>
+              <a:latin typeface="Consolas" panose="020B0609020204030204" pitchFamily="49" charset="0"/>
+            </a:endParaRPr>
+          </a:p>
+          <a:p>
+            <a:r>
+              <a:rPr lang="it-IT" dirty="0">
+                <a:solidFill>
+                  <a:srgbClr val="171FE2"/>
+                </a:solidFill>
+                <a:latin typeface="Consolas" panose="020B0609020204030204" pitchFamily="49" charset="0"/>
+              </a:rPr>
+              <a:t>metadata:</a:t>
+            </a:r>
+          </a:p>
+          <a:p>
+            <a:r>
+              <a:rPr lang="it-IT" dirty="0">
+                <a:solidFill>
+                  <a:srgbClr val="171FE2"/>
+                </a:solidFill>
+                <a:latin typeface="Consolas" panose="020B0609020204030204" pitchFamily="49" charset="0"/>
+              </a:rPr>
+              <a:t>  name: </a:t>
+            </a:r>
+            <a:r>
+              <a:rPr lang="it-IT" dirty="0" err="1">
+                <a:solidFill>
+                  <a:srgbClr val="171FE2"/>
+                </a:solidFill>
+                <a:latin typeface="Consolas" panose="020B0609020204030204" pitchFamily="49" charset="0"/>
+              </a:rPr>
+              <a:t>mariadb</a:t>
+            </a:r>
+            <a:r>
+              <a:rPr lang="it-IT" dirty="0">
+                <a:solidFill>
+                  <a:srgbClr val="171FE2"/>
+                </a:solidFill>
+                <a:latin typeface="Consolas" panose="020B0609020204030204" pitchFamily="49" charset="0"/>
+              </a:rPr>
+              <a:t>-storage-</a:t>
+            </a:r>
+            <a:r>
+              <a:rPr lang="it-IT" dirty="0" err="1">
+                <a:solidFill>
+                  <a:srgbClr val="171FE2"/>
+                </a:solidFill>
+                <a:latin typeface="Consolas" panose="020B0609020204030204" pitchFamily="49" charset="0"/>
+              </a:rPr>
+              <a:t>claim</a:t>
+            </a:r>
+            <a:endParaRPr lang="it-IT" dirty="0">
+              <a:solidFill>
+                <a:srgbClr val="171FE2"/>
+              </a:solidFill>
+              <a:latin typeface="Consolas" panose="020B0609020204030204" pitchFamily="49" charset="0"/>
+            </a:endParaRPr>
+          </a:p>
+          <a:p>
+            <a:r>
+              <a:rPr lang="it-IT" dirty="0" err="1">
+                <a:solidFill>
+                  <a:srgbClr val="171FE2"/>
+                </a:solidFill>
+                <a:latin typeface="Consolas" panose="020B0609020204030204" pitchFamily="49" charset="0"/>
+              </a:rPr>
+              <a:t>spec</a:t>
+            </a:r>
+            <a:r>
+              <a:rPr lang="it-IT" dirty="0">
+                <a:solidFill>
+                  <a:srgbClr val="171FE2"/>
+                </a:solidFill>
+                <a:latin typeface="Consolas" panose="020B0609020204030204" pitchFamily="49" charset="0"/>
+              </a:rPr>
+              <a:t>:</a:t>
+            </a:r>
+          </a:p>
+          <a:p>
+            <a:r>
+              <a:rPr lang="it-IT" dirty="0">
+                <a:solidFill>
+                  <a:srgbClr val="171FE2"/>
+                </a:solidFill>
+                <a:latin typeface="Consolas" panose="020B0609020204030204" pitchFamily="49" charset="0"/>
+              </a:rPr>
+              <a:t>  </a:t>
+            </a:r>
+            <a:r>
+              <a:rPr lang="it-IT" dirty="0" err="1">
+                <a:solidFill>
+                  <a:srgbClr val="171FE2"/>
+                </a:solidFill>
+                <a:latin typeface="Consolas" panose="020B0609020204030204" pitchFamily="49" charset="0"/>
+              </a:rPr>
+              <a:t>accessModes</a:t>
+            </a:r>
+            <a:r>
+              <a:rPr lang="it-IT" dirty="0">
+                <a:solidFill>
+                  <a:srgbClr val="171FE2"/>
+                </a:solidFill>
+                <a:latin typeface="Consolas" panose="020B0609020204030204" pitchFamily="49" charset="0"/>
+              </a:rPr>
+              <a:t>:</a:t>
+            </a:r>
+          </a:p>
+          <a:p>
+            <a:r>
+              <a:rPr lang="it-IT" dirty="0">
+                <a:solidFill>
+                  <a:srgbClr val="171FE2"/>
+                </a:solidFill>
+                <a:latin typeface="Consolas" panose="020B0609020204030204" pitchFamily="49" charset="0"/>
+              </a:rPr>
+              <a:t>    - </a:t>
+            </a:r>
+            <a:r>
+              <a:rPr lang="it-IT" dirty="0" err="1">
+                <a:solidFill>
+                  <a:srgbClr val="171FE2"/>
+                </a:solidFill>
+                <a:latin typeface="Consolas" panose="020B0609020204030204" pitchFamily="49" charset="0"/>
+              </a:rPr>
+              <a:t>ReadWriteOnce</a:t>
+            </a:r>
+            <a:endParaRPr lang="it-IT" dirty="0">
+              <a:solidFill>
+                <a:srgbClr val="171FE2"/>
+              </a:solidFill>
+              <a:latin typeface="Consolas" panose="020B0609020204030204" pitchFamily="49" charset="0"/>
+            </a:endParaRPr>
+          </a:p>
+          <a:p>
+            <a:r>
+              <a:rPr lang="it-IT" dirty="0">
+                <a:solidFill>
+                  <a:srgbClr val="171FE2"/>
+                </a:solidFill>
+                <a:latin typeface="Consolas" panose="020B0609020204030204" pitchFamily="49" charset="0"/>
+              </a:rPr>
+              <a:t>  </a:t>
+            </a:r>
+            <a:r>
+              <a:rPr lang="it-IT" dirty="0" err="1">
+                <a:solidFill>
+                  <a:srgbClr val="171FE2"/>
+                </a:solidFill>
+                <a:latin typeface="Consolas" panose="020B0609020204030204" pitchFamily="49" charset="0"/>
+              </a:rPr>
+              <a:t>resources</a:t>
+            </a:r>
+            <a:r>
+              <a:rPr lang="it-IT" dirty="0">
+                <a:solidFill>
+                  <a:srgbClr val="171FE2"/>
+                </a:solidFill>
+                <a:latin typeface="Consolas" panose="020B0609020204030204" pitchFamily="49" charset="0"/>
+              </a:rPr>
+              <a:t>:</a:t>
+            </a:r>
+          </a:p>
+          <a:p>
+            <a:r>
+              <a:rPr lang="it-IT" dirty="0">
+                <a:solidFill>
+                  <a:srgbClr val="171FE2"/>
+                </a:solidFill>
+                <a:latin typeface="Consolas" panose="020B0609020204030204" pitchFamily="49" charset="0"/>
+              </a:rPr>
+              <a:t>    </a:t>
+            </a:r>
+            <a:r>
+              <a:rPr lang="it-IT" dirty="0" err="1">
+                <a:solidFill>
+                  <a:srgbClr val="171FE2"/>
+                </a:solidFill>
+                <a:latin typeface="Consolas" panose="020B0609020204030204" pitchFamily="49" charset="0"/>
+              </a:rPr>
+              <a:t>requests</a:t>
+            </a:r>
+            <a:r>
+              <a:rPr lang="it-IT" dirty="0">
+                <a:solidFill>
+                  <a:srgbClr val="171FE2"/>
+                </a:solidFill>
+                <a:latin typeface="Consolas" panose="020B0609020204030204" pitchFamily="49" charset="0"/>
+              </a:rPr>
+              <a:t>:</a:t>
+            </a:r>
+          </a:p>
+          <a:p>
+            <a:r>
+              <a:rPr lang="it-IT" dirty="0">
+                <a:solidFill>
+                  <a:srgbClr val="171FE2"/>
+                </a:solidFill>
+                <a:latin typeface="Consolas" panose="020B0609020204030204" pitchFamily="49" charset="0"/>
+              </a:rPr>
+              <a:t>      storage: 1Gi</a:t>
+            </a:r>
+          </a:p>
+        </p:txBody>
+      </p:sp>
+    </p:spTree>
+    <p:extLst>
+      <p:ext uri="{BB962C8B-B14F-4D97-AF65-F5344CB8AC3E}">
+        <p14:creationId xmlns:p14="http://schemas.microsoft.com/office/powerpoint/2010/main" val="975969347"/>
+      </p:ext>
+    </p:extLst>
+  </p:cSld>
+  <p:clrMapOvr>
+    <a:masterClrMapping/>
+  </p:clrMapOvr>
+</p:sld>
+</file>
+
+<file path=ppt/slides/slide35.xml><?xml version="1.0" encoding="utf-8"?>
+<p:sld xmlns:a="http://schemas.openxmlformats.org/drawingml/2006/main" xmlns:r="http://schemas.openxmlformats.org/officeDocument/2006/relationships" xmlns:p="http://schemas.openxmlformats.org/presentationml/2006/main">
+  <p:cSld>
+    <p:spTree>
+      <p:nvGrpSpPr>
+        <p:cNvPr id="1" name="">
+          <a:extLst>
+            <a:ext uri="{FF2B5EF4-FFF2-40B4-BE49-F238E27FC236}">
+              <a16:creationId xmlns:a16="http://schemas.microsoft.com/office/drawing/2014/main" id="{64F435B9-7BE0-8170-6973-17EB6D52793B}"/>
+            </a:ext>
+          </a:extLst>
+        </p:cNvPr>
+        <p:cNvGrpSpPr/>
+        <p:nvPr/>
+      </p:nvGrpSpPr>
+      <p:grpSpPr>
+        <a:xfrm>
+          <a:off x="0" y="0"/>
+          <a:ext cx="0" cy="0"/>
+          <a:chOff x="0" y="0"/>
+          <a:chExt cx="0" cy="0"/>
+        </a:xfrm>
+      </p:grpSpPr>
+      <p:sp>
+        <p:nvSpPr>
+          <p:cNvPr id="2" name="Titolo della lezione">
+            <a:extLst>
+              <a:ext uri="{FF2B5EF4-FFF2-40B4-BE49-F238E27FC236}">
+                <a16:creationId xmlns:a16="http://schemas.microsoft.com/office/drawing/2014/main" id="{4769531F-E144-98BC-A64D-B9EA7DB64A8C}"/>
+              </a:ext>
+            </a:extLst>
+          </p:cNvPr>
+          <p:cNvSpPr>
+            <a:spLocks noGrp="1"/>
+          </p:cNvSpPr>
+          <p:nvPr>
+            <p:ph type="title"/>
+          </p:nvPr>
+        </p:nvSpPr>
+        <p:spPr>
+          <a:xfrm>
+            <a:off x="838200" y="831206"/>
+            <a:ext cx="10515600" cy="314198"/>
+          </a:xfrm>
+        </p:spPr>
+        <p:txBody>
+          <a:bodyPr/>
+          <a:lstStyle/>
+          <a:p>
+            <a:r>
+              <a:rPr lang="it-IT" dirty="0"/>
+              <a:t>SLIDE 33: LAB PRACTICAL – CREARE LA PRENOTAZIONE DI MEMORIA (PVC) PER IL DATABASE</a:t>
+            </a:r>
+            <a:br>
+              <a:rPr lang="it-IT" dirty="0"/>
+            </a:br>
+            <a:endParaRPr lang="it-IT" dirty="0"/>
+          </a:p>
+        </p:txBody>
+      </p:sp>
+      <p:sp>
+        <p:nvSpPr>
+          <p:cNvPr id="3" name="Contenuto della lezione">
+            <a:extLst>
+              <a:ext uri="{FF2B5EF4-FFF2-40B4-BE49-F238E27FC236}">
+                <a16:creationId xmlns:a16="http://schemas.microsoft.com/office/drawing/2014/main" id="{0EBF2A1E-2742-DF5F-5EE0-D2BDE5BADA37}"/>
+              </a:ext>
+            </a:extLst>
+          </p:cNvPr>
+          <p:cNvSpPr>
+            <a:spLocks noGrp="1"/>
+          </p:cNvSpPr>
+          <p:nvPr>
+            <p:ph idx="1"/>
+          </p:nvPr>
+        </p:nvSpPr>
+        <p:spPr>
+          <a:xfrm>
+            <a:off x="838200" y="1589185"/>
+            <a:ext cx="4933950" cy="5460839"/>
+          </a:xfrm>
+        </p:spPr>
+        <p:txBody>
+          <a:bodyPr/>
+          <a:lstStyle/>
+          <a:p>
+            <a:r>
+              <a:rPr lang="it-IT" dirty="0"/>
+              <a:t>Nella sezione delle specifiche (</a:t>
+            </a:r>
+            <a:r>
+              <a:rPr lang="it-IT" dirty="0" err="1"/>
+              <a:t>spec</a:t>
+            </a:r>
+            <a:r>
+              <a:rPr lang="it-IT" dirty="0"/>
+              <a:t>), troviamo la voce </a:t>
+            </a:r>
+            <a:r>
+              <a:rPr lang="it-IT" b="1" dirty="0" err="1"/>
+              <a:t>accessModes</a:t>
+            </a:r>
+            <a:r>
+              <a:rPr lang="it-IT" dirty="0"/>
+              <a:t> impostata su </a:t>
+            </a:r>
+            <a:r>
+              <a:rPr lang="it-IT" b="1" dirty="0" err="1"/>
+              <a:t>ReadWriteOnce</a:t>
+            </a:r>
+            <a:r>
+              <a:rPr lang="it-IT" dirty="0"/>
+              <a:t> (spesso abbreviata in RWO). </a:t>
+            </a:r>
+          </a:p>
+          <a:p>
+            <a:r>
+              <a:rPr lang="it-IT" dirty="0"/>
+              <a:t>Questa dicitura indica a </a:t>
+            </a:r>
+            <a:r>
+              <a:rPr lang="it-IT" dirty="0" err="1"/>
+              <a:t>Kubernetes</a:t>
+            </a:r>
+            <a:r>
+              <a:rPr lang="it-IT" dirty="0"/>
+              <a:t> che il disco può essere montato e utilizzato in lettura e scrittura da un solo </a:t>
+            </a:r>
+            <a:r>
+              <a:rPr lang="it-IT" dirty="0" err="1"/>
+              <a:t>Pod</a:t>
+            </a:r>
+            <a:r>
+              <a:rPr lang="it-IT" dirty="0"/>
+              <a:t> alla volta, che è il comportamento corretto e sicuro per un database (</a:t>
+            </a:r>
+            <a:r>
+              <a:rPr lang="it-IT" b="1" dirty="0">
+                <a:solidFill>
+                  <a:srgbClr val="171FE2"/>
+                </a:solidFill>
+              </a:rPr>
+              <a:t>evita che due istanze diverse scrivano contemporaneamente sullo stesso file corrompendo i dati</a:t>
+            </a:r>
+            <a:r>
+              <a:rPr lang="it-IT" dirty="0"/>
+              <a:t>). </a:t>
+            </a:r>
+          </a:p>
+          <a:p>
+            <a:r>
+              <a:rPr lang="it-IT" dirty="0"/>
+              <a:t>Infine, con storage: 1Gi stiamo chiedendo il rilascio di </a:t>
+            </a:r>
+            <a:r>
+              <a:rPr lang="it-IT" dirty="0">
+                <a:solidFill>
+                  <a:srgbClr val="171FE2"/>
+                </a:solidFill>
+              </a:rPr>
+              <a:t>un Gigabyte di spazio</a:t>
+            </a:r>
+            <a:r>
+              <a:rPr lang="it-IT" dirty="0"/>
+              <a:t>. </a:t>
+            </a:r>
+          </a:p>
+          <a:p>
+            <a:r>
+              <a:rPr lang="it-IT" dirty="0"/>
+              <a:t>Lanciando il comando: </a:t>
+            </a:r>
+          </a:p>
+          <a:p>
+            <a:r>
+              <a:rPr lang="it-IT" dirty="0" err="1">
+                <a:solidFill>
+                  <a:srgbClr val="171FE2"/>
+                </a:solidFill>
+                <a:latin typeface="Consolas" panose="020B0609020204030204" pitchFamily="49" charset="0"/>
+              </a:rPr>
+              <a:t>kubectl</a:t>
+            </a:r>
+            <a:r>
+              <a:rPr lang="it-IT" dirty="0">
+                <a:solidFill>
+                  <a:srgbClr val="171FE2"/>
+                </a:solidFill>
+                <a:latin typeface="Consolas" panose="020B0609020204030204" pitchFamily="49" charset="0"/>
+              </a:rPr>
+              <a:t> </a:t>
+            </a:r>
+            <a:r>
+              <a:rPr lang="it-IT" dirty="0" err="1">
+                <a:solidFill>
+                  <a:srgbClr val="171FE2"/>
+                </a:solidFill>
+                <a:latin typeface="Consolas" panose="020B0609020204030204" pitchFamily="49" charset="0"/>
+              </a:rPr>
+              <a:t>get</a:t>
+            </a:r>
+            <a:r>
+              <a:rPr lang="it-IT" dirty="0">
+                <a:solidFill>
+                  <a:srgbClr val="171FE2"/>
+                </a:solidFill>
+                <a:latin typeface="Consolas" panose="020B0609020204030204" pitchFamily="49" charset="0"/>
+              </a:rPr>
+              <a:t> pvc </a:t>
+            </a:r>
+          </a:p>
+          <a:p>
+            <a:r>
+              <a:rPr lang="it-IT" dirty="0"/>
+              <a:t>Vedremo la riga del nostro </a:t>
+            </a:r>
+            <a:r>
+              <a:rPr lang="it-IT" dirty="0" err="1"/>
+              <a:t>claim</a:t>
+            </a:r>
+            <a:r>
+              <a:rPr lang="it-IT" dirty="0"/>
+              <a:t> con lo status </a:t>
+            </a:r>
+            <a:r>
+              <a:rPr lang="it-IT" b="1" dirty="0" err="1"/>
+              <a:t>Bound</a:t>
+            </a:r>
+            <a:r>
+              <a:rPr lang="it-IT" dirty="0"/>
+              <a:t> (Collegato con successo alla memoria fisica) o </a:t>
+            </a:r>
+            <a:r>
+              <a:rPr lang="it-IT" b="1" dirty="0" err="1"/>
+              <a:t>Pending</a:t>
+            </a:r>
+            <a:r>
+              <a:rPr lang="it-IT" dirty="0"/>
+              <a:t>.</a:t>
+            </a:r>
+            <a:endParaRPr lang="it-IT" dirty="0">
+              <a:solidFill>
+                <a:srgbClr val="171FE2"/>
+              </a:solidFill>
+            </a:endParaRPr>
+          </a:p>
+        </p:txBody>
+      </p:sp>
+      <p:sp>
+        <p:nvSpPr>
+          <p:cNvPr id="4" name="CasellaDiTesto 3">
+            <a:extLst>
+              <a:ext uri="{FF2B5EF4-FFF2-40B4-BE49-F238E27FC236}">
+                <a16:creationId xmlns:a16="http://schemas.microsoft.com/office/drawing/2014/main" id="{AC077749-DBF7-5ACF-9281-B08B32E17E8B}"/>
+              </a:ext>
+            </a:extLst>
+          </p:cNvPr>
+          <p:cNvSpPr txBox="1"/>
+          <p:nvPr/>
+        </p:nvSpPr>
+        <p:spPr>
+          <a:xfrm>
+            <a:off x="6553200" y="1589185"/>
+            <a:ext cx="3857146" cy="2862322"/>
+          </a:xfrm>
+          <a:prstGeom prst="rect">
+            <a:avLst/>
+          </a:prstGeom>
+          <a:noFill/>
+        </p:spPr>
+        <p:txBody>
+          <a:bodyPr wrap="none" rtlCol="0">
+            <a:spAutoFit/>
+          </a:bodyPr>
+          <a:lstStyle/>
+          <a:p>
+            <a:r>
+              <a:rPr lang="it-IT" dirty="0" err="1">
+                <a:solidFill>
+                  <a:srgbClr val="171FE2"/>
+                </a:solidFill>
+                <a:latin typeface="Consolas" panose="020B0609020204030204" pitchFamily="49" charset="0"/>
+              </a:rPr>
+              <a:t>apiVersion</a:t>
+            </a:r>
+            <a:r>
+              <a:rPr lang="it-IT" dirty="0">
+                <a:solidFill>
+                  <a:srgbClr val="171FE2"/>
+                </a:solidFill>
+                <a:latin typeface="Consolas" panose="020B0609020204030204" pitchFamily="49" charset="0"/>
+              </a:rPr>
+              <a:t>: v1</a:t>
+            </a:r>
+          </a:p>
+          <a:p>
+            <a:r>
+              <a:rPr lang="it-IT" dirty="0" err="1">
+                <a:solidFill>
+                  <a:srgbClr val="171FE2"/>
+                </a:solidFill>
+                <a:latin typeface="Consolas" panose="020B0609020204030204" pitchFamily="49" charset="0"/>
+              </a:rPr>
+              <a:t>kind</a:t>
+            </a:r>
+            <a:r>
+              <a:rPr lang="it-IT" dirty="0">
+                <a:solidFill>
+                  <a:srgbClr val="171FE2"/>
+                </a:solidFill>
+                <a:latin typeface="Consolas" panose="020B0609020204030204" pitchFamily="49" charset="0"/>
+              </a:rPr>
+              <a:t>: </a:t>
+            </a:r>
+            <a:r>
+              <a:rPr lang="it-IT" dirty="0" err="1">
+                <a:solidFill>
+                  <a:srgbClr val="171FE2"/>
+                </a:solidFill>
+                <a:latin typeface="Consolas" panose="020B0609020204030204" pitchFamily="49" charset="0"/>
+              </a:rPr>
+              <a:t>PersistentVolumeClaim</a:t>
+            </a:r>
+            <a:endParaRPr lang="it-IT" dirty="0">
+              <a:solidFill>
+                <a:srgbClr val="171FE2"/>
+              </a:solidFill>
+              <a:latin typeface="Consolas" panose="020B0609020204030204" pitchFamily="49" charset="0"/>
+            </a:endParaRPr>
+          </a:p>
+          <a:p>
+            <a:r>
+              <a:rPr lang="it-IT" dirty="0">
+                <a:solidFill>
+                  <a:srgbClr val="171FE2"/>
+                </a:solidFill>
+                <a:latin typeface="Consolas" panose="020B0609020204030204" pitchFamily="49" charset="0"/>
+              </a:rPr>
+              <a:t>metadata:</a:t>
+            </a:r>
+          </a:p>
+          <a:p>
+            <a:r>
+              <a:rPr lang="it-IT" dirty="0">
+                <a:solidFill>
+                  <a:srgbClr val="171FE2"/>
+                </a:solidFill>
+                <a:latin typeface="Consolas" panose="020B0609020204030204" pitchFamily="49" charset="0"/>
+              </a:rPr>
+              <a:t>  name: </a:t>
+            </a:r>
+            <a:r>
+              <a:rPr lang="it-IT" dirty="0" err="1">
+                <a:solidFill>
+                  <a:srgbClr val="171FE2"/>
+                </a:solidFill>
+                <a:latin typeface="Consolas" panose="020B0609020204030204" pitchFamily="49" charset="0"/>
+              </a:rPr>
+              <a:t>mariadb</a:t>
+            </a:r>
+            <a:r>
+              <a:rPr lang="it-IT" dirty="0">
+                <a:solidFill>
+                  <a:srgbClr val="171FE2"/>
+                </a:solidFill>
+                <a:latin typeface="Consolas" panose="020B0609020204030204" pitchFamily="49" charset="0"/>
+              </a:rPr>
+              <a:t>-storage-</a:t>
+            </a:r>
+            <a:r>
+              <a:rPr lang="it-IT" dirty="0" err="1">
+                <a:solidFill>
+                  <a:srgbClr val="171FE2"/>
+                </a:solidFill>
+                <a:latin typeface="Consolas" panose="020B0609020204030204" pitchFamily="49" charset="0"/>
+              </a:rPr>
+              <a:t>claim</a:t>
+            </a:r>
+            <a:endParaRPr lang="it-IT" dirty="0">
+              <a:solidFill>
+                <a:srgbClr val="171FE2"/>
+              </a:solidFill>
+              <a:latin typeface="Consolas" panose="020B0609020204030204" pitchFamily="49" charset="0"/>
+            </a:endParaRPr>
+          </a:p>
+          <a:p>
+            <a:r>
+              <a:rPr lang="it-IT" dirty="0" err="1">
+                <a:solidFill>
+                  <a:srgbClr val="171FE2"/>
+                </a:solidFill>
+                <a:latin typeface="Consolas" panose="020B0609020204030204" pitchFamily="49" charset="0"/>
+              </a:rPr>
+              <a:t>spec</a:t>
+            </a:r>
+            <a:r>
+              <a:rPr lang="it-IT" dirty="0">
+                <a:solidFill>
+                  <a:srgbClr val="171FE2"/>
+                </a:solidFill>
+                <a:latin typeface="Consolas" panose="020B0609020204030204" pitchFamily="49" charset="0"/>
+              </a:rPr>
+              <a:t>:</a:t>
+            </a:r>
+          </a:p>
+          <a:p>
+            <a:r>
+              <a:rPr lang="it-IT" dirty="0">
+                <a:solidFill>
+                  <a:srgbClr val="171FE2"/>
+                </a:solidFill>
+                <a:latin typeface="Consolas" panose="020B0609020204030204" pitchFamily="49" charset="0"/>
+              </a:rPr>
+              <a:t>  </a:t>
+            </a:r>
+            <a:r>
+              <a:rPr lang="it-IT" dirty="0" err="1">
+                <a:solidFill>
+                  <a:srgbClr val="171FE2"/>
+                </a:solidFill>
+                <a:latin typeface="Consolas" panose="020B0609020204030204" pitchFamily="49" charset="0"/>
+              </a:rPr>
+              <a:t>accessModes</a:t>
+            </a:r>
+            <a:r>
+              <a:rPr lang="it-IT" dirty="0">
+                <a:solidFill>
+                  <a:srgbClr val="171FE2"/>
+                </a:solidFill>
+                <a:latin typeface="Consolas" panose="020B0609020204030204" pitchFamily="49" charset="0"/>
+              </a:rPr>
+              <a:t>:</a:t>
+            </a:r>
+          </a:p>
+          <a:p>
+            <a:r>
+              <a:rPr lang="it-IT" dirty="0">
+                <a:solidFill>
+                  <a:srgbClr val="171FE2"/>
+                </a:solidFill>
+                <a:latin typeface="Consolas" panose="020B0609020204030204" pitchFamily="49" charset="0"/>
+              </a:rPr>
+              <a:t>    - </a:t>
+            </a:r>
+            <a:r>
+              <a:rPr lang="it-IT" dirty="0" err="1">
+                <a:solidFill>
+                  <a:srgbClr val="171FE2"/>
+                </a:solidFill>
+                <a:latin typeface="Consolas" panose="020B0609020204030204" pitchFamily="49" charset="0"/>
+              </a:rPr>
+              <a:t>ReadWriteOnce</a:t>
+            </a:r>
+            <a:endParaRPr lang="it-IT" dirty="0">
+              <a:solidFill>
+                <a:srgbClr val="171FE2"/>
+              </a:solidFill>
+              <a:latin typeface="Consolas" panose="020B0609020204030204" pitchFamily="49" charset="0"/>
+            </a:endParaRPr>
+          </a:p>
+          <a:p>
+            <a:r>
+              <a:rPr lang="it-IT" dirty="0">
+                <a:solidFill>
+                  <a:srgbClr val="171FE2"/>
+                </a:solidFill>
+                <a:latin typeface="Consolas" panose="020B0609020204030204" pitchFamily="49" charset="0"/>
+              </a:rPr>
+              <a:t>  </a:t>
+            </a:r>
+            <a:r>
+              <a:rPr lang="it-IT" dirty="0" err="1">
+                <a:solidFill>
+                  <a:srgbClr val="171FE2"/>
+                </a:solidFill>
+                <a:latin typeface="Consolas" panose="020B0609020204030204" pitchFamily="49" charset="0"/>
+              </a:rPr>
+              <a:t>resources</a:t>
+            </a:r>
+            <a:r>
+              <a:rPr lang="it-IT" dirty="0">
+                <a:solidFill>
+                  <a:srgbClr val="171FE2"/>
+                </a:solidFill>
+                <a:latin typeface="Consolas" panose="020B0609020204030204" pitchFamily="49" charset="0"/>
+              </a:rPr>
+              <a:t>:</a:t>
+            </a:r>
+          </a:p>
+          <a:p>
+            <a:r>
+              <a:rPr lang="it-IT" dirty="0">
+                <a:solidFill>
+                  <a:srgbClr val="171FE2"/>
+                </a:solidFill>
+                <a:latin typeface="Consolas" panose="020B0609020204030204" pitchFamily="49" charset="0"/>
+              </a:rPr>
+              <a:t>    </a:t>
+            </a:r>
+            <a:r>
+              <a:rPr lang="it-IT" dirty="0" err="1">
+                <a:solidFill>
+                  <a:srgbClr val="171FE2"/>
+                </a:solidFill>
+                <a:latin typeface="Consolas" panose="020B0609020204030204" pitchFamily="49" charset="0"/>
+              </a:rPr>
+              <a:t>requests</a:t>
+            </a:r>
+            <a:r>
+              <a:rPr lang="it-IT" dirty="0">
+                <a:solidFill>
+                  <a:srgbClr val="171FE2"/>
+                </a:solidFill>
+                <a:latin typeface="Consolas" panose="020B0609020204030204" pitchFamily="49" charset="0"/>
+              </a:rPr>
+              <a:t>:</a:t>
+            </a:r>
+          </a:p>
+          <a:p>
+            <a:r>
+              <a:rPr lang="it-IT" dirty="0">
+                <a:solidFill>
+                  <a:srgbClr val="171FE2"/>
+                </a:solidFill>
+                <a:latin typeface="Consolas" panose="020B0609020204030204" pitchFamily="49" charset="0"/>
+              </a:rPr>
+              <a:t>      storage: 1Gi</a:t>
+            </a:r>
+          </a:p>
+        </p:txBody>
+      </p:sp>
+      <p:sp>
+        <p:nvSpPr>
+          <p:cNvPr id="5" name="CasellaDiTesto 4">
+            <a:extLst>
+              <a:ext uri="{FF2B5EF4-FFF2-40B4-BE49-F238E27FC236}">
+                <a16:creationId xmlns:a16="http://schemas.microsoft.com/office/drawing/2014/main" id="{3BB0B426-A1FB-0C3C-03A1-BE05A5B6754D}"/>
+              </a:ext>
+            </a:extLst>
+          </p:cNvPr>
+          <p:cNvSpPr txBox="1"/>
+          <p:nvPr/>
+        </p:nvSpPr>
+        <p:spPr>
+          <a:xfrm>
+            <a:off x="6318251" y="4693584"/>
+            <a:ext cx="5327650" cy="1477328"/>
+          </a:xfrm>
+          <a:prstGeom prst="rect">
+            <a:avLst/>
+          </a:prstGeom>
+          <a:noFill/>
+        </p:spPr>
+        <p:txBody>
+          <a:bodyPr wrap="square" rtlCol="0">
+            <a:spAutoFit/>
+          </a:bodyPr>
+          <a:lstStyle/>
+          <a:p>
+            <a:r>
+              <a:rPr lang="it-IT" dirty="0">
+                <a:solidFill>
+                  <a:srgbClr val="171FE2"/>
+                </a:solidFill>
+              </a:rPr>
+              <a:t>In </a:t>
+            </a:r>
+            <a:r>
+              <a:rPr lang="it-IT" dirty="0" err="1">
+                <a:solidFill>
+                  <a:srgbClr val="171FE2"/>
+                </a:solidFill>
+              </a:rPr>
+              <a:t>Kubernetes</a:t>
+            </a:r>
+            <a:r>
+              <a:rPr lang="it-IT" dirty="0">
+                <a:solidFill>
+                  <a:srgbClr val="171FE2"/>
+                </a:solidFill>
+              </a:rPr>
+              <a:t> non si usa GB (Gigabyte) perché segue la base decimale, ma si usa </a:t>
+            </a:r>
+            <a:r>
+              <a:rPr lang="it-IT" b="1" dirty="0">
+                <a:solidFill>
+                  <a:srgbClr val="171FE2"/>
+                </a:solidFill>
+              </a:rPr>
+              <a:t>Gi</a:t>
+            </a:r>
+            <a:r>
+              <a:rPr lang="it-IT" dirty="0">
+                <a:solidFill>
+                  <a:srgbClr val="171FE2"/>
+                </a:solidFill>
+              </a:rPr>
+              <a:t> che sta per </a:t>
+            </a:r>
+            <a:r>
+              <a:rPr lang="it-IT" b="1" dirty="0" err="1">
+                <a:solidFill>
+                  <a:srgbClr val="171FE2"/>
+                </a:solidFill>
+              </a:rPr>
+              <a:t>Gibibyte</a:t>
+            </a:r>
+            <a:r>
+              <a:rPr lang="it-IT" dirty="0">
+                <a:solidFill>
+                  <a:srgbClr val="171FE2"/>
+                </a:solidFill>
+              </a:rPr>
+              <a:t>, basato sul sistema binario (1024 Megabyte). </a:t>
+            </a:r>
+          </a:p>
+          <a:p>
+            <a:r>
+              <a:rPr lang="it-IT" dirty="0">
+                <a:solidFill>
+                  <a:srgbClr val="171FE2"/>
+                </a:solidFill>
+              </a:rPr>
+              <a:t>È lo standard internazionale preciso per il calcolo delle memorie nei sistemi operativi Linux e Cloud«.</a:t>
+            </a:r>
+          </a:p>
+        </p:txBody>
+      </p:sp>
+    </p:spTree>
+    <p:extLst>
+      <p:ext uri="{BB962C8B-B14F-4D97-AF65-F5344CB8AC3E}">
+        <p14:creationId xmlns:p14="http://schemas.microsoft.com/office/powerpoint/2010/main" val="3528770606"/>
+      </p:ext>
+    </p:extLst>
+  </p:cSld>
+  <p:clrMapOvr>
+    <a:masterClrMapping/>
+  </p:clrMapOvr>
+</p:sld>
+</file>
+
+<file path=ppt/slides/slide36.xml><?xml version="1.0" encoding="utf-8"?>
+<p:sld xmlns:a="http://schemas.openxmlformats.org/drawingml/2006/main" xmlns:r="http://schemas.openxmlformats.org/officeDocument/2006/relationships" xmlns:p="http://schemas.openxmlformats.org/presentationml/2006/main">
+  <p:cSld>
+    <p:spTree>
+      <p:nvGrpSpPr>
+        <p:cNvPr id="1" name="">
+          <a:extLst>
+            <a:ext uri="{FF2B5EF4-FFF2-40B4-BE49-F238E27FC236}">
+              <a16:creationId xmlns:a16="http://schemas.microsoft.com/office/drawing/2014/main" id="{789A370E-1170-E3BE-41CB-7248E7FBAF4C}"/>
+            </a:ext>
+          </a:extLst>
+        </p:cNvPr>
+        <p:cNvGrpSpPr/>
+        <p:nvPr/>
+      </p:nvGrpSpPr>
+      <p:grpSpPr>
+        <a:xfrm>
+          <a:off x="0" y="0"/>
+          <a:ext cx="0" cy="0"/>
+          <a:chOff x="0" y="0"/>
+          <a:chExt cx="0" cy="0"/>
+        </a:xfrm>
+      </p:grpSpPr>
+      <p:sp>
+        <p:nvSpPr>
+          <p:cNvPr id="2" name="Titolo della lezione">
+            <a:extLst>
+              <a:ext uri="{FF2B5EF4-FFF2-40B4-BE49-F238E27FC236}">
+                <a16:creationId xmlns:a16="http://schemas.microsoft.com/office/drawing/2014/main" id="{AC724C95-9933-C5DF-5B45-A42DBC3A5E20}"/>
+              </a:ext>
+            </a:extLst>
+          </p:cNvPr>
+          <p:cNvSpPr>
+            <a:spLocks noGrp="1"/>
+          </p:cNvSpPr>
+          <p:nvPr>
+            <p:ph type="title"/>
+          </p:nvPr>
+        </p:nvSpPr>
+        <p:spPr>
+          <a:xfrm>
+            <a:off x="838200" y="831206"/>
+            <a:ext cx="10515600" cy="314198"/>
+          </a:xfrm>
+        </p:spPr>
+        <p:txBody>
+          <a:bodyPr/>
+          <a:lstStyle/>
+          <a:p>
+            <a:r>
+              <a:rPr lang="it-IT" dirty="0"/>
+              <a:t>SLIDE 34: LAB PRACTICAL – CREARE LA PRENOTAZIONE DI MEMORIA (PVC) PER IL DATABASE</a:t>
+            </a:r>
+            <a:br>
+              <a:rPr lang="it-IT" dirty="0"/>
+            </a:br>
+            <a:br>
+              <a:rPr lang="it-IT" dirty="0"/>
+            </a:br>
+            <a:endParaRPr lang="it-IT" dirty="0"/>
+          </a:p>
+        </p:txBody>
+      </p:sp>
+      <p:sp>
+        <p:nvSpPr>
+          <p:cNvPr id="3" name="Contenuto della lezione">
+            <a:extLst>
+              <a:ext uri="{FF2B5EF4-FFF2-40B4-BE49-F238E27FC236}">
+                <a16:creationId xmlns:a16="http://schemas.microsoft.com/office/drawing/2014/main" id="{DE4EA5A7-4AD5-22FA-4BEC-73B5A116A9F0}"/>
+              </a:ext>
+            </a:extLst>
+          </p:cNvPr>
+          <p:cNvSpPr>
+            <a:spLocks noGrp="1"/>
+          </p:cNvSpPr>
+          <p:nvPr>
+            <p:ph idx="1"/>
+          </p:nvPr>
+        </p:nvSpPr>
+        <p:spPr>
+          <a:xfrm>
+            <a:off x="838200" y="1589185"/>
+            <a:ext cx="10783824" cy="5460839"/>
+          </a:xfrm>
+        </p:spPr>
+        <p:txBody>
+          <a:bodyPr/>
+          <a:lstStyle/>
+          <a:p>
+            <a:r>
+              <a:rPr lang="it-IT" dirty="0"/>
+              <a:t>Il PVC è </a:t>
+            </a:r>
+            <a:r>
+              <a:rPr lang="it-IT" b="1" dirty="0" err="1"/>
+              <a:t>Pending</a:t>
+            </a:r>
+            <a:r>
+              <a:rPr lang="it-IT" dirty="0"/>
+              <a:t> se </a:t>
+            </a:r>
+            <a:r>
+              <a:rPr lang="it-IT" dirty="0" err="1"/>
+              <a:t>Kubernates</a:t>
+            </a:r>
+            <a:r>
+              <a:rPr lang="it-IT" dirty="0"/>
+              <a:t> non trova un </a:t>
+            </a:r>
+            <a:r>
+              <a:rPr lang="it-IT" dirty="0" err="1"/>
+              <a:t>Pod</a:t>
+            </a:r>
+            <a:r>
+              <a:rPr lang="it-IT" dirty="0"/>
+              <a:t> che usa quella memoria.</a:t>
+            </a:r>
+          </a:p>
+          <a:p>
+            <a:r>
+              <a:rPr lang="it-IT" dirty="0"/>
+              <a:t>Qualora lo status del PVC fosse </a:t>
+            </a:r>
+            <a:r>
+              <a:rPr lang="it-IT" dirty="0" err="1"/>
+              <a:t>Pending</a:t>
+            </a:r>
+            <a:r>
+              <a:rPr lang="it-IT" dirty="0"/>
+              <a:t>, possiamo verificare il problema col comando:</a:t>
+            </a:r>
+          </a:p>
+          <a:p>
+            <a:r>
+              <a:rPr lang="it-IT" dirty="0" err="1">
+                <a:solidFill>
+                  <a:srgbClr val="171FE2"/>
+                </a:solidFill>
+                <a:latin typeface="Consolas" panose="020B0609020204030204" pitchFamily="49" charset="0"/>
+              </a:rPr>
+              <a:t>kubectl</a:t>
+            </a:r>
+            <a:r>
+              <a:rPr lang="it-IT" dirty="0">
+                <a:solidFill>
+                  <a:srgbClr val="171FE2"/>
+                </a:solidFill>
+                <a:latin typeface="Consolas" panose="020B0609020204030204" pitchFamily="49" charset="0"/>
+              </a:rPr>
+              <a:t> </a:t>
+            </a:r>
+            <a:r>
+              <a:rPr lang="it-IT" dirty="0" err="1">
+                <a:solidFill>
+                  <a:srgbClr val="171FE2"/>
+                </a:solidFill>
+                <a:latin typeface="Consolas" panose="020B0609020204030204" pitchFamily="49" charset="0"/>
+              </a:rPr>
+              <a:t>describe</a:t>
+            </a:r>
+            <a:r>
+              <a:rPr lang="it-IT" dirty="0">
+                <a:solidFill>
+                  <a:srgbClr val="171FE2"/>
+                </a:solidFill>
+                <a:latin typeface="Consolas" panose="020B0609020204030204" pitchFamily="49" charset="0"/>
+              </a:rPr>
+              <a:t> pvc </a:t>
+            </a:r>
+            <a:r>
+              <a:rPr lang="it-IT" dirty="0" err="1">
+                <a:solidFill>
+                  <a:srgbClr val="171FE2"/>
+                </a:solidFill>
+                <a:latin typeface="Consolas" panose="020B0609020204030204" pitchFamily="49" charset="0"/>
+              </a:rPr>
+              <a:t>mariadb</a:t>
+            </a:r>
+            <a:r>
+              <a:rPr lang="it-IT" dirty="0">
+                <a:solidFill>
+                  <a:srgbClr val="171FE2"/>
+                </a:solidFill>
+                <a:latin typeface="Consolas" panose="020B0609020204030204" pitchFamily="49" charset="0"/>
+              </a:rPr>
+              <a:t>-storage-</a:t>
+            </a:r>
+            <a:r>
+              <a:rPr lang="it-IT" dirty="0" err="1">
+                <a:solidFill>
+                  <a:srgbClr val="171FE2"/>
+                </a:solidFill>
+                <a:latin typeface="Consolas" panose="020B0609020204030204" pitchFamily="49" charset="0"/>
+              </a:rPr>
+              <a:t>claim</a:t>
+            </a:r>
+            <a:endParaRPr lang="it-IT" dirty="0">
+              <a:solidFill>
+                <a:srgbClr val="171FE2"/>
+              </a:solidFill>
+              <a:latin typeface="Consolas" panose="020B0609020204030204" pitchFamily="49" charset="0"/>
+            </a:endParaRPr>
+          </a:p>
+          <a:p>
+            <a:r>
+              <a:rPr lang="it-IT" dirty="0"/>
+              <a:t>In output ci verrà dato un esisto in Events:</a:t>
+            </a:r>
+          </a:p>
+          <a:p>
+            <a:endParaRPr lang="it-IT" dirty="0"/>
+          </a:p>
+          <a:p>
+            <a:endParaRPr lang="it-IT" dirty="0"/>
+          </a:p>
+          <a:p>
+            <a:r>
+              <a:rPr lang="it-IT" dirty="0"/>
+              <a:t>l PVC è </a:t>
+            </a:r>
+            <a:r>
+              <a:rPr lang="it-IT" dirty="0" err="1"/>
+              <a:t>Pending</a:t>
+            </a:r>
+            <a:r>
+              <a:rPr lang="it-IT" dirty="0"/>
+              <a:t> perché la tua </a:t>
+            </a:r>
+            <a:r>
+              <a:rPr lang="it-IT" dirty="0" err="1"/>
+              <a:t>StorageClass</a:t>
+            </a:r>
+            <a:r>
+              <a:rPr lang="it-IT" dirty="0"/>
+              <a:t> usa la modalità </a:t>
+            </a:r>
+            <a:r>
+              <a:rPr lang="it-IT" b="1" dirty="0" err="1"/>
+              <a:t>WaitForFirstConsumer</a:t>
+            </a:r>
+            <a:r>
+              <a:rPr lang="it-IT" dirty="0"/>
+              <a:t>.</a:t>
+            </a:r>
+          </a:p>
+          <a:p>
+            <a:r>
+              <a:rPr lang="it-IT" dirty="0"/>
+              <a:t>In pratica </a:t>
+            </a:r>
+            <a:r>
+              <a:rPr lang="it-IT" dirty="0" err="1"/>
+              <a:t>Kubernetes</a:t>
+            </a:r>
+            <a:r>
+              <a:rPr lang="it-IT" dirty="0"/>
+              <a:t> aspetta che venga creato un </a:t>
+            </a:r>
+            <a:r>
+              <a:rPr lang="it-IT" dirty="0" err="1"/>
+              <a:t>Pod</a:t>
+            </a:r>
+            <a:r>
+              <a:rPr lang="it-IT" dirty="0"/>
+              <a:t> che utilizzi quel PVC prima di assegnare o creare il volume.</a:t>
+            </a:r>
+          </a:p>
+          <a:p>
+            <a:endParaRPr lang="it-IT" dirty="0"/>
+          </a:p>
+          <a:p>
+            <a:endParaRPr lang="it-IT" dirty="0">
+              <a:solidFill>
+                <a:srgbClr val="171FE2"/>
+              </a:solidFill>
+              <a:latin typeface="Consolas" panose="020B0609020204030204" pitchFamily="49" charset="0"/>
+            </a:endParaRPr>
+          </a:p>
+        </p:txBody>
+      </p:sp>
+      <p:pic>
+        <p:nvPicPr>
+          <p:cNvPr id="5" name="Immagine 4">
+            <a:extLst>
+              <a:ext uri="{FF2B5EF4-FFF2-40B4-BE49-F238E27FC236}">
+                <a16:creationId xmlns:a16="http://schemas.microsoft.com/office/drawing/2014/main" id="{AE16EB0C-D174-31D2-1FF9-DD066C0EB6CF}"/>
+              </a:ext>
+            </a:extLst>
+          </p:cNvPr>
+          <p:cNvPicPr>
+            <a:picLocks noChangeAspect="1"/>
+          </p:cNvPicPr>
+          <p:nvPr/>
+        </p:nvPicPr>
+        <p:blipFill>
+          <a:blip r:embed="rId2"/>
+          <a:stretch>
+            <a:fillRect/>
+          </a:stretch>
+        </p:blipFill>
+        <p:spPr>
+          <a:xfrm>
+            <a:off x="838200" y="3085122"/>
+            <a:ext cx="10323150" cy="687756"/>
+          </a:xfrm>
+          <a:prstGeom prst="rect">
+            <a:avLst/>
+          </a:prstGeom>
+        </p:spPr>
+      </p:pic>
+    </p:spTree>
+    <p:extLst>
+      <p:ext uri="{BB962C8B-B14F-4D97-AF65-F5344CB8AC3E}">
+        <p14:creationId xmlns:p14="http://schemas.microsoft.com/office/powerpoint/2010/main" val="1905552576"/>
+      </p:ext>
+    </p:extLst>
+  </p:cSld>
+  <p:clrMapOvr>
+    <a:masterClrMapping/>
+  </p:clrMapOvr>
+</p:sld>
+</file>
+
+<file path=ppt/slides/slide37.xml><?xml version="1.0" encoding="utf-8"?>
+<p:sld xmlns:a="http://schemas.openxmlformats.org/drawingml/2006/main" xmlns:r="http://schemas.openxmlformats.org/officeDocument/2006/relationships" xmlns:p="http://schemas.openxmlformats.org/presentationml/2006/main">
+  <p:cSld>
+    <p:spTree>
+      <p:nvGrpSpPr>
+        <p:cNvPr id="1" name="">
+          <a:extLst>
+            <a:ext uri="{FF2B5EF4-FFF2-40B4-BE49-F238E27FC236}">
+              <a16:creationId xmlns:a16="http://schemas.microsoft.com/office/drawing/2014/main" id="{2C9ED7ED-0A65-BDB6-BE70-A0C95440F9E2}"/>
+            </a:ext>
+          </a:extLst>
+        </p:cNvPr>
+        <p:cNvGrpSpPr/>
+        <p:nvPr/>
+      </p:nvGrpSpPr>
+      <p:grpSpPr>
+        <a:xfrm>
+          <a:off x="0" y="0"/>
+          <a:ext cx="0" cy="0"/>
+          <a:chOff x="0" y="0"/>
+          <a:chExt cx="0" cy="0"/>
+        </a:xfrm>
+      </p:grpSpPr>
+      <p:sp>
+        <p:nvSpPr>
+          <p:cNvPr id="2" name="Titolo della lezione">
+            <a:extLst>
+              <a:ext uri="{FF2B5EF4-FFF2-40B4-BE49-F238E27FC236}">
+                <a16:creationId xmlns:a16="http://schemas.microsoft.com/office/drawing/2014/main" id="{FBAB778E-ACDB-685A-5572-6AE7CD1E0A9C}"/>
+              </a:ext>
+            </a:extLst>
+          </p:cNvPr>
+          <p:cNvSpPr>
+            <a:spLocks noGrp="1"/>
+          </p:cNvSpPr>
+          <p:nvPr>
+            <p:ph type="title"/>
+          </p:nvPr>
+        </p:nvSpPr>
+        <p:spPr>
+          <a:xfrm>
+            <a:off x="838200" y="831206"/>
+            <a:ext cx="10515600" cy="314198"/>
+          </a:xfrm>
+        </p:spPr>
+        <p:txBody>
+          <a:bodyPr/>
+          <a:lstStyle/>
+          <a:p>
+            <a:r>
+              <a:rPr lang="it-IT" dirty="0"/>
+              <a:t>SLIDE 35: LAB PRACTICAL – CREARE LA PRENOTAZIONE DI MEMORIA (PVC) PER IL DATABASE</a:t>
+            </a:r>
+            <a:br>
+              <a:rPr lang="it-IT" dirty="0"/>
+            </a:br>
+            <a:br>
+              <a:rPr lang="it-IT" dirty="0"/>
+            </a:br>
+            <a:endParaRPr lang="it-IT" dirty="0"/>
+          </a:p>
+        </p:txBody>
+      </p:sp>
+      <p:sp>
+        <p:nvSpPr>
+          <p:cNvPr id="3" name="Contenuto della lezione">
+            <a:extLst>
+              <a:ext uri="{FF2B5EF4-FFF2-40B4-BE49-F238E27FC236}">
+                <a16:creationId xmlns:a16="http://schemas.microsoft.com/office/drawing/2014/main" id="{86E9711D-E4F0-778D-767F-0596CD3CF8DB}"/>
+              </a:ext>
+            </a:extLst>
+          </p:cNvPr>
+          <p:cNvSpPr>
+            <a:spLocks noGrp="1"/>
+          </p:cNvSpPr>
+          <p:nvPr>
+            <p:ph idx="1"/>
+          </p:nvPr>
+        </p:nvSpPr>
+        <p:spPr>
+          <a:xfrm>
+            <a:off x="838200" y="1589185"/>
+            <a:ext cx="10783824" cy="5460839"/>
+          </a:xfrm>
+        </p:spPr>
+        <p:txBody>
+          <a:bodyPr/>
+          <a:lstStyle/>
+          <a:p>
+            <a:r>
+              <a:rPr lang="it-IT" dirty="0"/>
+              <a:t>Una </a:t>
+            </a:r>
+            <a:r>
+              <a:rPr lang="it-IT" b="1" dirty="0" err="1"/>
+              <a:t>StorageClass</a:t>
+            </a:r>
+            <a:r>
+              <a:rPr lang="it-IT" dirty="0"/>
+              <a:t> non è la memoria o il disco stesso. È piuttosto una </a:t>
+            </a:r>
+            <a:r>
+              <a:rPr lang="it-IT" b="1" dirty="0"/>
+              <a:t>"classe" o "profilo" di storage</a:t>
+            </a:r>
+            <a:r>
+              <a:rPr lang="it-IT" dirty="0"/>
+              <a:t> che dice a </a:t>
+            </a:r>
+            <a:r>
+              <a:rPr lang="it-IT" dirty="0" err="1"/>
+              <a:t>Kubernetes</a:t>
+            </a:r>
+            <a:r>
+              <a:rPr lang="it-IT" dirty="0"/>
+              <a:t> </a:t>
+            </a:r>
+            <a:r>
+              <a:rPr lang="it-IT" i="1" dirty="0"/>
+              <a:t>come</a:t>
+            </a:r>
+            <a:r>
+              <a:rPr lang="it-IT" dirty="0"/>
+              <a:t> deve creare o assegnare i volumi.</a:t>
+            </a:r>
+          </a:p>
+          <a:p>
+            <a:r>
+              <a:rPr lang="it-IT" dirty="0"/>
+              <a:t>Un'analogia semplice:</a:t>
+            </a:r>
+          </a:p>
+          <a:p>
+            <a:r>
+              <a:rPr lang="it-IT" b="1" dirty="0"/>
+              <a:t>PVC (</a:t>
+            </a:r>
+            <a:r>
+              <a:rPr lang="it-IT" b="1" dirty="0" err="1"/>
+              <a:t>PersistentVolumeClaim</a:t>
+            </a:r>
+            <a:r>
+              <a:rPr lang="it-IT" b="1" dirty="0"/>
+              <a:t>)</a:t>
+            </a:r>
+            <a:r>
+              <a:rPr lang="it-IT" dirty="0"/>
+              <a:t> = "Vorrei un disco da 10 GB" </a:t>
+            </a:r>
+          </a:p>
+          <a:p>
+            <a:r>
+              <a:rPr lang="it-IT" b="1" dirty="0" err="1"/>
+              <a:t>StorageClass</a:t>
+            </a:r>
+            <a:r>
+              <a:rPr lang="it-IT" dirty="0"/>
+              <a:t> = "Che tipo di disco vuoi? SSD? HDD? Disco locale? Disco cloud?" </a:t>
+            </a:r>
+          </a:p>
+          <a:p>
+            <a:r>
+              <a:rPr lang="it-IT" b="1" dirty="0"/>
+              <a:t>PV (</a:t>
+            </a:r>
+            <a:r>
+              <a:rPr lang="it-IT" b="1" dirty="0" err="1"/>
+              <a:t>PersistentVolume</a:t>
+            </a:r>
+            <a:r>
+              <a:rPr lang="it-IT" b="1" dirty="0"/>
+              <a:t>)</a:t>
+            </a:r>
+            <a:r>
+              <a:rPr lang="it-IT" dirty="0"/>
+              <a:t> = il disco effettivo che viene assegnato</a:t>
+            </a:r>
+          </a:p>
+          <a:p>
+            <a:r>
+              <a:rPr lang="it-IT" dirty="0" err="1">
+                <a:solidFill>
+                  <a:srgbClr val="171FE2"/>
+                </a:solidFill>
+                <a:latin typeface="Consolas" panose="020B0609020204030204" pitchFamily="49" charset="0"/>
+              </a:rPr>
+              <a:t>Pod</a:t>
+            </a:r>
+            <a:endParaRPr lang="it-IT" dirty="0">
+              <a:solidFill>
+                <a:srgbClr val="171FE2"/>
+              </a:solidFill>
+              <a:latin typeface="Consolas" panose="020B0609020204030204" pitchFamily="49" charset="0"/>
+            </a:endParaRPr>
+          </a:p>
+          <a:p>
+            <a:r>
+              <a:rPr lang="it-IT" dirty="0">
+                <a:solidFill>
+                  <a:srgbClr val="171FE2"/>
+                </a:solidFill>
+                <a:latin typeface="Consolas" panose="020B0609020204030204" pitchFamily="49" charset="0"/>
+              </a:rPr>
+              <a:t> ↓</a:t>
+            </a:r>
+          </a:p>
+          <a:p>
+            <a:r>
+              <a:rPr lang="it-IT" dirty="0">
+                <a:solidFill>
+                  <a:srgbClr val="171FE2"/>
+                </a:solidFill>
+                <a:latin typeface="Consolas" panose="020B0609020204030204" pitchFamily="49" charset="0"/>
+              </a:rPr>
+              <a:t>PVC (richiesta di storage)</a:t>
+            </a:r>
+          </a:p>
+          <a:p>
+            <a:r>
+              <a:rPr lang="it-IT" dirty="0">
+                <a:solidFill>
+                  <a:srgbClr val="171FE2"/>
+                </a:solidFill>
+                <a:latin typeface="Consolas" panose="020B0609020204030204" pitchFamily="49" charset="0"/>
+              </a:rPr>
+              <a:t> ↓</a:t>
+            </a:r>
+          </a:p>
+          <a:p>
+            <a:r>
+              <a:rPr lang="it-IT" dirty="0" err="1">
+                <a:solidFill>
+                  <a:srgbClr val="171FE2"/>
+                </a:solidFill>
+                <a:latin typeface="Consolas" panose="020B0609020204030204" pitchFamily="49" charset="0"/>
+              </a:rPr>
+              <a:t>StorageClass</a:t>
+            </a:r>
+            <a:r>
+              <a:rPr lang="it-IT" dirty="0">
+                <a:solidFill>
+                  <a:srgbClr val="171FE2"/>
+                </a:solidFill>
+                <a:latin typeface="Consolas" panose="020B0609020204030204" pitchFamily="49" charset="0"/>
+              </a:rPr>
+              <a:t> (regole di provisioning)</a:t>
+            </a:r>
+          </a:p>
+          <a:p>
+            <a:r>
+              <a:rPr lang="it-IT" dirty="0">
+                <a:solidFill>
+                  <a:srgbClr val="171FE2"/>
+                </a:solidFill>
+                <a:latin typeface="Consolas" panose="020B0609020204030204" pitchFamily="49" charset="0"/>
+              </a:rPr>
+              <a:t> ↓</a:t>
+            </a:r>
+          </a:p>
+          <a:p>
+            <a:r>
+              <a:rPr lang="it-IT" dirty="0">
+                <a:solidFill>
+                  <a:srgbClr val="171FE2"/>
+                </a:solidFill>
+                <a:latin typeface="Consolas" panose="020B0609020204030204" pitchFamily="49" charset="0"/>
+              </a:rPr>
+              <a:t>PV (volume reale)</a:t>
+            </a:r>
+          </a:p>
+        </p:txBody>
+      </p:sp>
+    </p:spTree>
+    <p:extLst>
+      <p:ext uri="{BB962C8B-B14F-4D97-AF65-F5344CB8AC3E}">
+        <p14:creationId xmlns:p14="http://schemas.microsoft.com/office/powerpoint/2010/main" val="168584921"/>
+      </p:ext>
+    </p:extLst>
+  </p:cSld>
+  <p:clrMapOvr>
+    <a:masterClrMapping/>
+  </p:clrMapOvr>
+</p:sld>
+</file>
+
+<file path=ppt/slides/slide38.xml><?xml version="1.0" encoding="utf-8"?>
+<p:sld xmlns:a="http://schemas.openxmlformats.org/drawingml/2006/main" xmlns:r="http://schemas.openxmlformats.org/officeDocument/2006/relationships" xmlns:p="http://schemas.openxmlformats.org/presentationml/2006/main">
+  <p:cSld>
+    <p:spTree>
+      <p:nvGrpSpPr>
+        <p:cNvPr id="1" name="">
+          <a:extLst>
+            <a:ext uri="{FF2B5EF4-FFF2-40B4-BE49-F238E27FC236}">
+              <a16:creationId xmlns:a16="http://schemas.microsoft.com/office/drawing/2014/main" id="{A27E6990-DE54-36B9-5C63-A108E5469CFB}"/>
+            </a:ext>
+          </a:extLst>
+        </p:cNvPr>
+        <p:cNvGrpSpPr/>
+        <p:nvPr/>
+      </p:nvGrpSpPr>
+      <p:grpSpPr>
+        <a:xfrm>
+          <a:off x="0" y="0"/>
+          <a:ext cx="0" cy="0"/>
+          <a:chOff x="0" y="0"/>
+          <a:chExt cx="0" cy="0"/>
+        </a:xfrm>
+      </p:grpSpPr>
+      <p:sp>
+        <p:nvSpPr>
+          <p:cNvPr id="2" name="Titolo della lezione">
+            <a:extLst>
+              <a:ext uri="{FF2B5EF4-FFF2-40B4-BE49-F238E27FC236}">
+                <a16:creationId xmlns:a16="http://schemas.microsoft.com/office/drawing/2014/main" id="{ACD61A84-0519-E34F-8BDE-C5347000BBC1}"/>
+              </a:ext>
+            </a:extLst>
+          </p:cNvPr>
+          <p:cNvSpPr>
+            <a:spLocks noGrp="1"/>
+          </p:cNvSpPr>
+          <p:nvPr>
+            <p:ph type="title"/>
+          </p:nvPr>
+        </p:nvSpPr>
+        <p:spPr>
+          <a:xfrm>
+            <a:off x="838200" y="831206"/>
+            <a:ext cx="10515600" cy="314198"/>
+          </a:xfrm>
+        </p:spPr>
+        <p:txBody>
+          <a:bodyPr/>
+          <a:lstStyle/>
+          <a:p>
+            <a:r>
+              <a:rPr lang="it-IT" dirty="0"/>
+              <a:t>SLIDE 36: LAB PRACTICAL – CREARE LA PRENOTAZIONE DI MEMORIA (PVC) PER IL DATABASE</a:t>
+            </a:r>
+            <a:br>
+              <a:rPr lang="it-IT" dirty="0"/>
+            </a:br>
+            <a:br>
+              <a:rPr lang="it-IT" dirty="0"/>
+            </a:br>
+            <a:endParaRPr lang="it-IT" dirty="0"/>
+          </a:p>
+        </p:txBody>
+      </p:sp>
+      <p:sp>
+        <p:nvSpPr>
+          <p:cNvPr id="3" name="Contenuto della lezione">
+            <a:extLst>
+              <a:ext uri="{FF2B5EF4-FFF2-40B4-BE49-F238E27FC236}">
+                <a16:creationId xmlns:a16="http://schemas.microsoft.com/office/drawing/2014/main" id="{1750564B-A397-E6D9-607A-01662D8F1EBE}"/>
+              </a:ext>
+            </a:extLst>
+          </p:cNvPr>
+          <p:cNvSpPr>
+            <a:spLocks noGrp="1"/>
+          </p:cNvSpPr>
+          <p:nvPr>
+            <p:ph idx="1"/>
+          </p:nvPr>
+        </p:nvSpPr>
+        <p:spPr>
+          <a:xfrm>
+            <a:off x="838200" y="1589185"/>
+            <a:ext cx="10783824" cy="5460839"/>
+          </a:xfrm>
+        </p:spPr>
+        <p:txBody>
+          <a:bodyPr/>
+          <a:lstStyle/>
+          <a:p>
+            <a:r>
+              <a:rPr lang="it-IT" dirty="0"/>
+              <a:t>Per verificare lo </a:t>
+            </a:r>
+            <a:r>
+              <a:rPr lang="it-IT" dirty="0" err="1"/>
+              <a:t>StorageClass</a:t>
+            </a:r>
+            <a:r>
+              <a:rPr lang="it-IT" dirty="0"/>
+              <a:t>:</a:t>
+            </a:r>
+          </a:p>
+          <a:p>
+            <a:r>
+              <a:rPr lang="it-IT" dirty="0" err="1">
+                <a:solidFill>
+                  <a:srgbClr val="171FE2"/>
+                </a:solidFill>
+                <a:latin typeface="Consolas" panose="020B0609020204030204" pitchFamily="49" charset="0"/>
+              </a:rPr>
+              <a:t>kubectl</a:t>
+            </a:r>
+            <a:r>
+              <a:rPr lang="it-IT" dirty="0">
+                <a:solidFill>
+                  <a:srgbClr val="171FE2"/>
+                </a:solidFill>
+                <a:latin typeface="Consolas" panose="020B0609020204030204" pitchFamily="49" charset="0"/>
+              </a:rPr>
+              <a:t> </a:t>
+            </a:r>
+            <a:r>
+              <a:rPr lang="it-IT" dirty="0" err="1">
+                <a:solidFill>
+                  <a:srgbClr val="171FE2"/>
+                </a:solidFill>
+                <a:latin typeface="Consolas" panose="020B0609020204030204" pitchFamily="49" charset="0"/>
+              </a:rPr>
+              <a:t>get</a:t>
+            </a:r>
+            <a:r>
+              <a:rPr lang="it-IT" dirty="0">
+                <a:solidFill>
+                  <a:srgbClr val="171FE2"/>
+                </a:solidFill>
+                <a:latin typeface="Consolas" panose="020B0609020204030204" pitchFamily="49" charset="0"/>
+              </a:rPr>
+              <a:t> </a:t>
+            </a:r>
+            <a:r>
+              <a:rPr lang="it-IT" dirty="0" err="1">
+                <a:solidFill>
+                  <a:srgbClr val="171FE2"/>
+                </a:solidFill>
+                <a:latin typeface="Consolas" panose="020B0609020204030204" pitchFamily="49" charset="0"/>
+              </a:rPr>
+              <a:t>storageclass</a:t>
+            </a:r>
+            <a:endParaRPr lang="it-IT" dirty="0">
+              <a:solidFill>
+                <a:srgbClr val="171FE2"/>
+              </a:solidFill>
+              <a:latin typeface="Consolas" panose="020B0609020204030204" pitchFamily="49" charset="0"/>
+            </a:endParaRPr>
+          </a:p>
+          <a:p>
+            <a:r>
+              <a:rPr lang="it-IT" dirty="0" err="1">
+                <a:solidFill>
+                  <a:srgbClr val="171FE2"/>
+                </a:solidFill>
+                <a:latin typeface="Consolas" panose="020B0609020204030204" pitchFamily="49" charset="0"/>
+              </a:rPr>
+              <a:t>kubectl</a:t>
+            </a:r>
+            <a:r>
+              <a:rPr lang="it-IT" dirty="0">
+                <a:solidFill>
+                  <a:srgbClr val="171FE2"/>
+                </a:solidFill>
+                <a:latin typeface="Consolas" panose="020B0609020204030204" pitchFamily="49" charset="0"/>
+              </a:rPr>
+              <a:t> </a:t>
+            </a:r>
+            <a:r>
+              <a:rPr lang="it-IT" dirty="0" err="1">
+                <a:solidFill>
+                  <a:srgbClr val="171FE2"/>
+                </a:solidFill>
+                <a:latin typeface="Consolas" panose="020B0609020204030204" pitchFamily="49" charset="0"/>
+              </a:rPr>
+              <a:t>describe</a:t>
+            </a:r>
+            <a:r>
+              <a:rPr lang="it-IT" dirty="0">
+                <a:solidFill>
+                  <a:srgbClr val="171FE2"/>
+                </a:solidFill>
+                <a:latin typeface="Consolas" panose="020B0609020204030204" pitchFamily="49" charset="0"/>
+              </a:rPr>
+              <a:t> </a:t>
+            </a:r>
+            <a:r>
+              <a:rPr lang="it-IT" dirty="0" err="1">
+                <a:solidFill>
+                  <a:srgbClr val="171FE2"/>
+                </a:solidFill>
+                <a:latin typeface="Consolas" panose="020B0609020204030204" pitchFamily="49" charset="0"/>
+              </a:rPr>
+              <a:t>storageclass</a:t>
+            </a:r>
+            <a:r>
+              <a:rPr lang="it-IT" dirty="0">
+                <a:solidFill>
+                  <a:srgbClr val="171FE2"/>
+                </a:solidFill>
+                <a:latin typeface="Consolas" panose="020B0609020204030204" pitchFamily="49" charset="0"/>
+              </a:rPr>
+              <a:t> standard</a:t>
+            </a:r>
+          </a:p>
+          <a:p>
+            <a:endParaRPr lang="it-IT" dirty="0">
+              <a:solidFill>
+                <a:srgbClr val="171FE2"/>
+              </a:solidFill>
+              <a:latin typeface="Consolas" panose="020B0609020204030204" pitchFamily="49" charset="0"/>
+            </a:endParaRPr>
+          </a:p>
+          <a:p>
+            <a:endParaRPr lang="it-IT" dirty="0">
+              <a:solidFill>
+                <a:srgbClr val="171FE2"/>
+              </a:solidFill>
+              <a:latin typeface="Consolas" panose="020B0609020204030204" pitchFamily="49" charset="0"/>
+            </a:endParaRPr>
+          </a:p>
+        </p:txBody>
+      </p:sp>
+      <p:pic>
+        <p:nvPicPr>
+          <p:cNvPr id="5" name="Immagine 4">
+            <a:extLst>
+              <a:ext uri="{FF2B5EF4-FFF2-40B4-BE49-F238E27FC236}">
+                <a16:creationId xmlns:a16="http://schemas.microsoft.com/office/drawing/2014/main" id="{497A8455-6643-1851-248B-AB9B42B41B49}"/>
+              </a:ext>
+            </a:extLst>
+          </p:cNvPr>
+          <p:cNvPicPr>
+            <a:picLocks noChangeAspect="1"/>
+          </p:cNvPicPr>
+          <p:nvPr/>
+        </p:nvPicPr>
+        <p:blipFill>
+          <a:blip r:embed="rId2"/>
+          <a:stretch>
+            <a:fillRect/>
+          </a:stretch>
+        </p:blipFill>
+        <p:spPr>
+          <a:xfrm>
+            <a:off x="838200" y="2974140"/>
+            <a:ext cx="11074400" cy="2914316"/>
+          </a:xfrm>
+          <a:prstGeom prst="rect">
+            <a:avLst/>
+          </a:prstGeom>
+        </p:spPr>
+      </p:pic>
+    </p:spTree>
+    <p:extLst>
+      <p:ext uri="{BB962C8B-B14F-4D97-AF65-F5344CB8AC3E}">
+        <p14:creationId xmlns:p14="http://schemas.microsoft.com/office/powerpoint/2010/main" val="1209095237"/>
+      </p:ext>
+    </p:extLst>
+  </p:cSld>
+  <p:clrMapOvr>
+    <a:masterClrMapping/>
+  </p:clrMapOvr>
+</p:sld>
+</file>
+
+<file path=ppt/slides/slide39.xml><?xml version="1.0" encoding="utf-8"?>
+<p:sld xmlns:a="http://schemas.openxmlformats.org/drawingml/2006/main" xmlns:r="http://schemas.openxmlformats.org/officeDocument/2006/relationships" xmlns:p="http://schemas.openxmlformats.org/presentationml/2006/main">
+  <p:cSld>
+    <p:spTree>
+      <p:nvGrpSpPr>
+        <p:cNvPr id="1" name="">
+          <a:extLst>
+            <a:ext uri="{FF2B5EF4-FFF2-40B4-BE49-F238E27FC236}">
+              <a16:creationId xmlns:a16="http://schemas.microsoft.com/office/drawing/2014/main" id="{BA70EFBA-8D6F-08F1-CF79-EC2FA918E3D0}"/>
+            </a:ext>
+          </a:extLst>
+        </p:cNvPr>
+        <p:cNvGrpSpPr/>
+        <p:nvPr/>
+      </p:nvGrpSpPr>
+      <p:grpSpPr>
+        <a:xfrm>
+          <a:off x="0" y="0"/>
+          <a:ext cx="0" cy="0"/>
+          <a:chOff x="0" y="0"/>
+          <a:chExt cx="0" cy="0"/>
+        </a:xfrm>
+      </p:grpSpPr>
+      <p:sp>
+        <p:nvSpPr>
+          <p:cNvPr id="2" name="Titolo della lezione">
+            <a:extLst>
+              <a:ext uri="{FF2B5EF4-FFF2-40B4-BE49-F238E27FC236}">
+                <a16:creationId xmlns:a16="http://schemas.microsoft.com/office/drawing/2014/main" id="{64F93D8C-5F68-50C9-56B7-07DC1327D069}"/>
+              </a:ext>
+            </a:extLst>
+          </p:cNvPr>
+          <p:cNvSpPr>
+            <a:spLocks noGrp="1"/>
+          </p:cNvSpPr>
+          <p:nvPr>
+            <p:ph type="title"/>
+          </p:nvPr>
+        </p:nvSpPr>
+        <p:spPr>
+          <a:xfrm>
+            <a:off x="838200" y="831206"/>
+            <a:ext cx="10515600" cy="314198"/>
+          </a:xfrm>
+        </p:spPr>
+        <p:txBody>
+          <a:bodyPr/>
+          <a:lstStyle/>
+          <a:p>
+            <a:r>
+              <a:rPr lang="it-IT" dirty="0"/>
+              <a:t>SLIDE 37: LA SICUREZZA DEI DATI SENSIBILI – GLI OGGETTI SECRET IN KUBERNETES</a:t>
+            </a:r>
+            <a:br>
+              <a:rPr lang="it-IT" dirty="0"/>
+            </a:br>
+            <a:br>
+              <a:rPr lang="it-IT" dirty="0"/>
+            </a:br>
+            <a:endParaRPr lang="it-IT" dirty="0"/>
+          </a:p>
+        </p:txBody>
+      </p:sp>
+      <p:sp>
+        <p:nvSpPr>
+          <p:cNvPr id="3" name="Contenuto della lezione">
+            <a:extLst>
+              <a:ext uri="{FF2B5EF4-FFF2-40B4-BE49-F238E27FC236}">
+                <a16:creationId xmlns:a16="http://schemas.microsoft.com/office/drawing/2014/main" id="{E8A996EB-5F7B-2349-8323-5B9A6BAF420D}"/>
+              </a:ext>
+            </a:extLst>
+          </p:cNvPr>
+          <p:cNvSpPr>
+            <a:spLocks noGrp="1"/>
+          </p:cNvSpPr>
+          <p:nvPr>
+            <p:ph idx="1"/>
+          </p:nvPr>
+        </p:nvSpPr>
+        <p:spPr>
+          <a:xfrm>
+            <a:off x="838200" y="1589185"/>
+            <a:ext cx="10783824" cy="5460839"/>
+          </a:xfrm>
+        </p:spPr>
+        <p:txBody>
+          <a:bodyPr/>
+          <a:lstStyle/>
+          <a:p>
+            <a:r>
+              <a:rPr lang="it-IT" dirty="0"/>
+              <a:t>Nello sviluppo di software a livello </a:t>
+            </a:r>
+            <a:r>
+              <a:rPr lang="it-IT" dirty="0" err="1"/>
+              <a:t>enterprise</a:t>
+            </a:r>
+            <a:r>
+              <a:rPr lang="it-IT" dirty="0"/>
+              <a:t>, la sicurezza delle informazioni e la protezione delle credenziali sono argomenti su cui non è ammesso nessun tipo di errore o leggerezza. </a:t>
+            </a:r>
+          </a:p>
+          <a:p>
+            <a:r>
+              <a:rPr lang="it-IT" dirty="0"/>
+              <a:t>Fino ad ora, nei laboratori con Docker Compose, eravamo abituati a scrivere le password del database in chiaro all'interno dei file di configurazione o delle variabili d'ambiente. </a:t>
+            </a:r>
+          </a:p>
+          <a:p>
+            <a:r>
+              <a:rPr lang="it-IT" dirty="0"/>
+              <a:t>Questo approccio è estremamente pericoloso in produzione: se inserissimo la password di root del nostro database all'interno del file YAML e poi caricassimo quel file su un repository GitHub pubblico, chiunque nel mondo potrebbe leggere le nostre credenziali e violare i server aziendali. </a:t>
+            </a:r>
+          </a:p>
+          <a:p>
+            <a:r>
+              <a:rPr lang="it-IT" dirty="0">
+                <a:solidFill>
+                  <a:srgbClr val="171FE2"/>
+                </a:solidFill>
+              </a:rPr>
+              <a:t>Per risolvere questa vulnerabilità, </a:t>
+            </a:r>
+            <a:r>
+              <a:rPr lang="it-IT" dirty="0" err="1">
+                <a:solidFill>
+                  <a:srgbClr val="171FE2"/>
+                </a:solidFill>
+              </a:rPr>
+              <a:t>Kubernetes</a:t>
+            </a:r>
+            <a:r>
+              <a:rPr lang="it-IT" dirty="0">
+                <a:solidFill>
+                  <a:srgbClr val="171FE2"/>
+                </a:solidFill>
+              </a:rPr>
+              <a:t> introduce un oggetto specializzato chiamato </a:t>
+            </a:r>
+            <a:r>
+              <a:rPr lang="it-IT" b="1" dirty="0">
+                <a:solidFill>
+                  <a:srgbClr val="171FE2"/>
+                </a:solidFill>
+              </a:rPr>
+              <a:t>Secret</a:t>
+            </a:r>
+            <a:r>
+              <a:rPr lang="it-IT" dirty="0">
+                <a:solidFill>
+                  <a:srgbClr val="171FE2"/>
+                </a:solidFill>
+              </a:rPr>
+              <a:t> (Segreto).</a:t>
+            </a:r>
+            <a:endParaRPr lang="it-IT" dirty="0">
+              <a:solidFill>
+                <a:srgbClr val="171FE2"/>
+              </a:solidFill>
+              <a:latin typeface="Consolas" panose="020B0609020204030204" pitchFamily="49" charset="0"/>
+            </a:endParaRPr>
+          </a:p>
+          <a:p>
+            <a:endParaRPr lang="it-IT" dirty="0">
+              <a:solidFill>
+                <a:srgbClr val="171FE2"/>
+              </a:solidFill>
+              <a:latin typeface="Consolas" panose="020B0609020204030204" pitchFamily="49" charset="0"/>
+            </a:endParaRPr>
+          </a:p>
+        </p:txBody>
+      </p:sp>
+    </p:spTree>
+    <p:extLst>
+      <p:ext uri="{BB962C8B-B14F-4D97-AF65-F5344CB8AC3E}">
+        <p14:creationId xmlns:p14="http://schemas.microsoft.com/office/powerpoint/2010/main" val="1905592674"/>
       </p:ext>
     </p:extLst>
   </p:cSld>
@@ -11041,6 +13963,3293 @@
     <p:extLst>
       <p:ext uri="{BB962C8B-B14F-4D97-AF65-F5344CB8AC3E}">
         <p14:creationId xmlns:p14="http://schemas.microsoft.com/office/powerpoint/2010/main" val="2238444206"/>
+      </p:ext>
+    </p:extLst>
+  </p:cSld>
+  <p:clrMapOvr>
+    <a:masterClrMapping/>
+  </p:clrMapOvr>
+</p:sld>
+</file>
+
+<file path=ppt/slides/slide40.xml><?xml version="1.0" encoding="utf-8"?>
+<p:sld xmlns:a="http://schemas.openxmlformats.org/drawingml/2006/main" xmlns:r="http://schemas.openxmlformats.org/officeDocument/2006/relationships" xmlns:p="http://schemas.openxmlformats.org/presentationml/2006/main">
+  <p:cSld>
+    <p:spTree>
+      <p:nvGrpSpPr>
+        <p:cNvPr id="1" name="">
+          <a:extLst>
+            <a:ext uri="{FF2B5EF4-FFF2-40B4-BE49-F238E27FC236}">
+              <a16:creationId xmlns:a16="http://schemas.microsoft.com/office/drawing/2014/main" id="{5D3163F4-B7DE-8286-FEC5-2482860D7A8E}"/>
+            </a:ext>
+          </a:extLst>
+        </p:cNvPr>
+        <p:cNvGrpSpPr/>
+        <p:nvPr/>
+      </p:nvGrpSpPr>
+      <p:grpSpPr>
+        <a:xfrm>
+          <a:off x="0" y="0"/>
+          <a:ext cx="0" cy="0"/>
+          <a:chOff x="0" y="0"/>
+          <a:chExt cx="0" cy="0"/>
+        </a:xfrm>
+      </p:grpSpPr>
+      <p:sp>
+        <p:nvSpPr>
+          <p:cNvPr id="2" name="Titolo della lezione">
+            <a:extLst>
+              <a:ext uri="{FF2B5EF4-FFF2-40B4-BE49-F238E27FC236}">
+                <a16:creationId xmlns:a16="http://schemas.microsoft.com/office/drawing/2014/main" id="{BA9C232E-31C1-5F39-F2C8-C2C7DEAA907D}"/>
+              </a:ext>
+            </a:extLst>
+          </p:cNvPr>
+          <p:cNvSpPr>
+            <a:spLocks noGrp="1"/>
+          </p:cNvSpPr>
+          <p:nvPr>
+            <p:ph type="title"/>
+          </p:nvPr>
+        </p:nvSpPr>
+        <p:spPr>
+          <a:xfrm>
+            <a:off x="838200" y="831206"/>
+            <a:ext cx="10515600" cy="314198"/>
+          </a:xfrm>
+        </p:spPr>
+        <p:txBody>
+          <a:bodyPr/>
+          <a:lstStyle/>
+          <a:p>
+            <a:r>
+              <a:rPr lang="it-IT" dirty="0"/>
+              <a:t>SLIDE 38: LA SICUREZZA DEI DATI SENSIBILI – GLI OGGETTI SECRET IN KUBERNETES</a:t>
+            </a:r>
+            <a:br>
+              <a:rPr lang="it-IT" dirty="0"/>
+            </a:br>
+            <a:br>
+              <a:rPr lang="it-IT" dirty="0"/>
+            </a:br>
+            <a:endParaRPr lang="it-IT" dirty="0"/>
+          </a:p>
+        </p:txBody>
+      </p:sp>
+      <p:sp>
+        <p:nvSpPr>
+          <p:cNvPr id="3" name="Contenuto della lezione">
+            <a:extLst>
+              <a:ext uri="{FF2B5EF4-FFF2-40B4-BE49-F238E27FC236}">
+                <a16:creationId xmlns:a16="http://schemas.microsoft.com/office/drawing/2014/main" id="{9C5218AD-7546-8AF0-4DAF-264E42D19196}"/>
+              </a:ext>
+            </a:extLst>
+          </p:cNvPr>
+          <p:cNvSpPr>
+            <a:spLocks noGrp="1"/>
+          </p:cNvSpPr>
+          <p:nvPr>
+            <p:ph idx="1"/>
+          </p:nvPr>
+        </p:nvSpPr>
+        <p:spPr>
+          <a:xfrm>
+            <a:off x="838200" y="1589185"/>
+            <a:ext cx="10783824" cy="5460839"/>
+          </a:xfrm>
+        </p:spPr>
+        <p:txBody>
+          <a:bodyPr/>
+          <a:lstStyle/>
+          <a:p>
+            <a:r>
+              <a:rPr lang="it-IT" dirty="0"/>
+              <a:t>Un Secret è un oggetto del cluster concepito esclusivamente per memorizzare e proteggere piccole quantità di dati sensibili, come password, chiavi di cifratura, token di autenticazione o stringhe di connessione. </a:t>
+            </a:r>
+          </a:p>
+          <a:p>
+            <a:r>
+              <a:rPr lang="it-IT" dirty="0"/>
+              <a:t>Invece di viaggiare nel codice, i dati sensibili vengono caricati direttamente all'interno della cassaforte interna di </a:t>
+            </a:r>
+            <a:r>
+              <a:rPr lang="it-IT" dirty="0" err="1"/>
+              <a:t>Kubernetes</a:t>
+            </a:r>
+            <a:r>
+              <a:rPr lang="it-IT" dirty="0"/>
+              <a:t> (criptati in formato Base64 o cifrati a riposo nell'</a:t>
+            </a:r>
+            <a:r>
+              <a:rPr lang="it-IT" dirty="0" err="1"/>
+              <a:t>etcd</a:t>
+            </a:r>
+            <a:r>
+              <a:rPr lang="it-IT" dirty="0"/>
+              <a:t>). </a:t>
+            </a:r>
+          </a:p>
+          <a:p>
+            <a:r>
+              <a:rPr lang="it-IT" dirty="0">
+                <a:solidFill>
+                  <a:srgbClr val="171FE2"/>
+                </a:solidFill>
+              </a:rPr>
+              <a:t>Quando un </a:t>
+            </a:r>
+            <a:r>
+              <a:rPr lang="it-IT" dirty="0" err="1">
+                <a:solidFill>
+                  <a:srgbClr val="171FE2"/>
+                </a:solidFill>
+              </a:rPr>
+              <a:t>Pod</a:t>
+            </a:r>
+            <a:r>
+              <a:rPr lang="it-IT" dirty="0">
+                <a:solidFill>
+                  <a:srgbClr val="171FE2"/>
+                </a:solidFill>
+              </a:rPr>
+              <a:t> (come il nostro </a:t>
+            </a:r>
+            <a:r>
+              <a:rPr lang="it-IT" dirty="0" err="1">
+                <a:solidFill>
+                  <a:srgbClr val="171FE2"/>
+                </a:solidFill>
+              </a:rPr>
+              <a:t>backend</a:t>
+            </a:r>
+            <a:r>
+              <a:rPr lang="it-IT" dirty="0">
+                <a:solidFill>
+                  <a:srgbClr val="171FE2"/>
+                </a:solidFill>
+              </a:rPr>
+              <a:t> Spring Boot o il database </a:t>
+            </a:r>
+            <a:r>
+              <a:rPr lang="it-IT" dirty="0" err="1">
+                <a:solidFill>
+                  <a:srgbClr val="171FE2"/>
+                </a:solidFill>
+              </a:rPr>
+              <a:t>MariaDB</a:t>
+            </a:r>
+            <a:r>
+              <a:rPr lang="it-IT" dirty="0">
+                <a:solidFill>
+                  <a:srgbClr val="171FE2"/>
+                </a:solidFill>
+              </a:rPr>
+              <a:t>) ha bisogno di conoscere la password per avviarsi, non la legge dal suo file YAML, ma la chiede al Control </a:t>
+            </a:r>
+            <a:r>
+              <a:rPr lang="it-IT" dirty="0" err="1">
+                <a:solidFill>
+                  <a:srgbClr val="171FE2"/>
+                </a:solidFill>
+              </a:rPr>
+              <a:t>Plane</a:t>
+            </a:r>
+            <a:r>
+              <a:rPr lang="it-IT" dirty="0">
+                <a:solidFill>
+                  <a:srgbClr val="171FE2"/>
+                </a:solidFill>
+              </a:rPr>
+              <a:t>, </a:t>
+            </a:r>
+            <a:r>
+              <a:rPr lang="it-IT" i="1" dirty="0">
+                <a:solidFill>
+                  <a:srgbClr val="171FE2"/>
+                </a:solidFill>
+              </a:rPr>
+              <a:t>iniettata direttamente nella RAM come variabile d'ambiente temporanea</a:t>
+            </a:r>
+            <a:r>
+              <a:rPr lang="it-IT" dirty="0">
+                <a:solidFill>
+                  <a:srgbClr val="171FE2"/>
+                </a:solidFill>
+              </a:rPr>
+              <a:t>. </a:t>
+            </a:r>
+          </a:p>
+          <a:p>
+            <a:r>
+              <a:rPr lang="it-IT" dirty="0"/>
+              <a:t>In questo modo, i file di configurazione YAML che salviamo su </a:t>
+            </a:r>
+            <a:r>
+              <a:rPr lang="it-IT" dirty="0" err="1"/>
+              <a:t>Git</a:t>
+            </a:r>
+            <a:r>
+              <a:rPr lang="it-IT" dirty="0"/>
+              <a:t> rimangono completamente privi di dati sensibili (puliti e anonimi), garantendo i massimi standard di sicurezza aziendali.</a:t>
+            </a:r>
+            <a:endParaRPr lang="it-IT" dirty="0">
+              <a:solidFill>
+                <a:srgbClr val="171FE2"/>
+              </a:solidFill>
+              <a:latin typeface="Consolas" panose="020B0609020204030204" pitchFamily="49" charset="0"/>
+            </a:endParaRPr>
+          </a:p>
+        </p:txBody>
+      </p:sp>
+    </p:spTree>
+    <p:extLst>
+      <p:ext uri="{BB962C8B-B14F-4D97-AF65-F5344CB8AC3E}">
+        <p14:creationId xmlns:p14="http://schemas.microsoft.com/office/powerpoint/2010/main" val="372761636"/>
+      </p:ext>
+    </p:extLst>
+  </p:cSld>
+  <p:clrMapOvr>
+    <a:masterClrMapping/>
+  </p:clrMapOvr>
+</p:sld>
+</file>
+
+<file path=ppt/slides/slide41.xml><?xml version="1.0" encoding="utf-8"?>
+<p:sld xmlns:a="http://schemas.openxmlformats.org/drawingml/2006/main" xmlns:r="http://schemas.openxmlformats.org/officeDocument/2006/relationships" xmlns:p="http://schemas.openxmlformats.org/presentationml/2006/main">
+  <p:cSld>
+    <p:spTree>
+      <p:nvGrpSpPr>
+        <p:cNvPr id="1" name="">
+          <a:extLst>
+            <a:ext uri="{FF2B5EF4-FFF2-40B4-BE49-F238E27FC236}">
+              <a16:creationId xmlns:a16="http://schemas.microsoft.com/office/drawing/2014/main" id="{75D7C39E-1A7F-DC54-69B4-27EE586244A9}"/>
+            </a:ext>
+          </a:extLst>
+        </p:cNvPr>
+        <p:cNvGrpSpPr/>
+        <p:nvPr/>
+      </p:nvGrpSpPr>
+      <p:grpSpPr>
+        <a:xfrm>
+          <a:off x="0" y="0"/>
+          <a:ext cx="0" cy="0"/>
+          <a:chOff x="0" y="0"/>
+          <a:chExt cx="0" cy="0"/>
+        </a:xfrm>
+      </p:grpSpPr>
+      <p:sp>
+        <p:nvSpPr>
+          <p:cNvPr id="2" name="Titolo della lezione">
+            <a:extLst>
+              <a:ext uri="{FF2B5EF4-FFF2-40B4-BE49-F238E27FC236}">
+                <a16:creationId xmlns:a16="http://schemas.microsoft.com/office/drawing/2014/main" id="{0E65256B-21D5-8DD4-2098-527EE014D332}"/>
+              </a:ext>
+            </a:extLst>
+          </p:cNvPr>
+          <p:cNvSpPr>
+            <a:spLocks noGrp="1"/>
+          </p:cNvSpPr>
+          <p:nvPr>
+            <p:ph type="title"/>
+          </p:nvPr>
+        </p:nvSpPr>
+        <p:spPr>
+          <a:xfrm>
+            <a:off x="838200" y="831206"/>
+            <a:ext cx="10515600" cy="314198"/>
+          </a:xfrm>
+        </p:spPr>
+        <p:txBody>
+          <a:bodyPr/>
+          <a:lstStyle/>
+          <a:p>
+            <a:r>
+              <a:rPr lang="it-IT" dirty="0"/>
+              <a:t>SLIDE 39: LAB PRACTICAL – CREARE LA CASSAFORTE DELLE PASSWORD CON KUBECTL</a:t>
+            </a:r>
+            <a:br>
+              <a:rPr lang="it-IT" dirty="0"/>
+            </a:br>
+            <a:br>
+              <a:rPr lang="it-IT" dirty="0"/>
+            </a:br>
+            <a:endParaRPr lang="it-IT" dirty="0"/>
+          </a:p>
+        </p:txBody>
+      </p:sp>
+      <p:sp>
+        <p:nvSpPr>
+          <p:cNvPr id="3" name="Contenuto della lezione">
+            <a:extLst>
+              <a:ext uri="{FF2B5EF4-FFF2-40B4-BE49-F238E27FC236}">
+                <a16:creationId xmlns:a16="http://schemas.microsoft.com/office/drawing/2014/main" id="{B0578574-0E28-336A-8F8A-E003FDA06C49}"/>
+              </a:ext>
+            </a:extLst>
+          </p:cNvPr>
+          <p:cNvSpPr>
+            <a:spLocks noGrp="1"/>
+          </p:cNvSpPr>
+          <p:nvPr>
+            <p:ph idx="1"/>
+          </p:nvPr>
+        </p:nvSpPr>
+        <p:spPr>
+          <a:xfrm>
+            <a:off x="838200" y="1589185"/>
+            <a:ext cx="10783824" cy="5460839"/>
+          </a:xfrm>
+        </p:spPr>
+        <p:txBody>
+          <a:bodyPr/>
+          <a:lstStyle/>
+          <a:p>
+            <a:r>
+              <a:rPr lang="it-IT" dirty="0"/>
+              <a:t>Passiamo alla pratica e andiamo a creare la cassaforte di sicurezza (Secret) che conterrà la password di amministrazione del nostro database </a:t>
+            </a:r>
+            <a:r>
+              <a:rPr lang="it-IT" dirty="0" err="1"/>
+              <a:t>MariaDB</a:t>
+            </a:r>
+            <a:r>
+              <a:rPr lang="it-IT" dirty="0"/>
+              <a:t>. </a:t>
+            </a:r>
+          </a:p>
+          <a:p>
+            <a:r>
+              <a:rPr lang="it-IT" dirty="0"/>
+              <a:t>Utilizzeremo un comando imperativo ad alto livello per istruire </a:t>
+            </a:r>
+            <a:r>
+              <a:rPr lang="it-IT" dirty="0" err="1"/>
+              <a:t>Kubernetes</a:t>
+            </a:r>
+            <a:r>
+              <a:rPr lang="it-IT" dirty="0"/>
+              <a:t> a generare un oggetto Secret generico protetto all'interno del nostro cluster locale.</a:t>
+            </a:r>
+          </a:p>
+          <a:p>
+            <a:r>
+              <a:rPr lang="it-IT" dirty="0" err="1"/>
+              <a:t>Eseguiamoil</a:t>
+            </a:r>
+            <a:r>
+              <a:rPr lang="it-IT" dirty="0"/>
+              <a:t> seguente comando, inserendo la chiave e la password scelte per il corso:</a:t>
+            </a:r>
+          </a:p>
+          <a:p>
+            <a:r>
+              <a:rPr lang="it-IT" dirty="0" err="1">
+                <a:solidFill>
+                  <a:srgbClr val="171FE2"/>
+                </a:solidFill>
+                <a:latin typeface="Consolas" panose="020B0609020204030204" pitchFamily="49" charset="0"/>
+              </a:rPr>
+              <a:t>kubectl</a:t>
+            </a:r>
+            <a:r>
+              <a:rPr lang="it-IT" dirty="0">
+                <a:solidFill>
+                  <a:srgbClr val="171FE2"/>
+                </a:solidFill>
+                <a:latin typeface="Consolas" panose="020B0609020204030204" pitchFamily="49" charset="0"/>
+              </a:rPr>
+              <a:t> create secret </a:t>
+            </a:r>
+            <a:r>
+              <a:rPr lang="it-IT" dirty="0" err="1">
+                <a:solidFill>
+                  <a:srgbClr val="171FE2"/>
+                </a:solidFill>
+                <a:latin typeface="Consolas" panose="020B0609020204030204" pitchFamily="49" charset="0"/>
+              </a:rPr>
+              <a:t>generic</a:t>
+            </a:r>
+            <a:r>
+              <a:rPr lang="it-IT" dirty="0">
+                <a:solidFill>
+                  <a:srgbClr val="171FE2"/>
+                </a:solidFill>
+                <a:latin typeface="Consolas" panose="020B0609020204030204" pitchFamily="49" charset="0"/>
+              </a:rPr>
+              <a:t> database-segreto --from-</a:t>
+            </a:r>
+            <a:r>
+              <a:rPr lang="it-IT" dirty="0" err="1">
+                <a:solidFill>
+                  <a:srgbClr val="171FE2"/>
+                </a:solidFill>
+                <a:latin typeface="Consolas" panose="020B0609020204030204" pitchFamily="49" charset="0"/>
+              </a:rPr>
+              <a:t>literal</a:t>
+            </a:r>
+            <a:r>
+              <a:rPr lang="it-IT" dirty="0">
+                <a:solidFill>
+                  <a:srgbClr val="171FE2"/>
+                </a:solidFill>
+                <a:latin typeface="Consolas" panose="020B0609020204030204" pitchFamily="49" charset="0"/>
+              </a:rPr>
+              <a:t>=password-root=Skillfactory2026!</a:t>
+            </a:r>
+          </a:p>
+          <a:p>
+            <a:r>
+              <a:rPr lang="it-IT" dirty="0"/>
+              <a:t>Stiamo chiedendo a </a:t>
+            </a:r>
+            <a:r>
+              <a:rPr lang="it-IT" dirty="0" err="1"/>
+              <a:t>kubectl</a:t>
+            </a:r>
+            <a:r>
+              <a:rPr lang="it-IT" dirty="0"/>
+              <a:t> di </a:t>
+            </a:r>
+            <a:r>
+              <a:rPr lang="it-IT" i="1" dirty="0"/>
+              <a:t>creare</a:t>
+            </a:r>
+            <a:r>
+              <a:rPr lang="it-IT" dirty="0"/>
+              <a:t> un oggetto di tipo </a:t>
+            </a:r>
+            <a:r>
+              <a:rPr lang="it-IT" i="1" dirty="0"/>
+              <a:t>secret</a:t>
+            </a:r>
+            <a:r>
+              <a:rPr lang="it-IT" dirty="0"/>
+              <a:t> di categoria </a:t>
+            </a:r>
+            <a:r>
+              <a:rPr lang="it-IT" i="1" dirty="0" err="1"/>
+              <a:t>generic</a:t>
+            </a:r>
+            <a:r>
+              <a:rPr lang="it-IT" dirty="0"/>
+              <a:t> (la categoria standard per le password testuali). </a:t>
+            </a:r>
+          </a:p>
+          <a:p>
+            <a:r>
+              <a:rPr lang="it-IT" dirty="0"/>
+              <a:t>Abbiamo deciso di assegnare all’oggetto Secret il nome identificativo database-segreto. </a:t>
+            </a:r>
+          </a:p>
+          <a:p>
+            <a:r>
+              <a:rPr lang="it-IT" dirty="0">
+                <a:solidFill>
+                  <a:srgbClr val="171FE2"/>
+                </a:solidFill>
+              </a:rPr>
+              <a:t>Attraverso il parametro --from-</a:t>
+            </a:r>
+            <a:r>
+              <a:rPr lang="it-IT" dirty="0" err="1">
+                <a:solidFill>
+                  <a:srgbClr val="171FE2"/>
+                </a:solidFill>
+              </a:rPr>
+              <a:t>literal</a:t>
+            </a:r>
+            <a:r>
+              <a:rPr lang="it-IT" dirty="0">
+                <a:solidFill>
+                  <a:srgbClr val="171FE2"/>
+                </a:solidFill>
+              </a:rPr>
+              <a:t>, andiamo a definire la coppia chiave-valore: la chiave si chiama password-root e il valore reale della password sarà Skillfactory2026!.</a:t>
+            </a:r>
+          </a:p>
+          <a:p>
+            <a:r>
+              <a:rPr lang="it-IT" dirty="0"/>
+              <a:t>Per verificare che la cassaforte sia effettivamente presente nel registro del cluster (</a:t>
+            </a:r>
+            <a:r>
+              <a:rPr lang="it-IT" dirty="0" err="1"/>
+              <a:t>etcd</a:t>
+            </a:r>
+            <a:r>
+              <a:rPr lang="it-IT" dirty="0"/>
+              <a:t>), eseguiamo il comando di ispezione:</a:t>
+            </a:r>
+          </a:p>
+          <a:p>
+            <a:r>
+              <a:rPr lang="it-IT" dirty="0" err="1">
+                <a:solidFill>
+                  <a:srgbClr val="171FE2"/>
+                </a:solidFill>
+                <a:latin typeface="Consolas" panose="020B0609020204030204" pitchFamily="49" charset="0"/>
+              </a:rPr>
+              <a:t>kubectl</a:t>
+            </a:r>
+            <a:r>
+              <a:rPr lang="it-IT" dirty="0">
+                <a:solidFill>
+                  <a:srgbClr val="171FE2"/>
+                </a:solidFill>
+                <a:latin typeface="Consolas" panose="020B0609020204030204" pitchFamily="49" charset="0"/>
+              </a:rPr>
+              <a:t> </a:t>
+            </a:r>
+            <a:r>
+              <a:rPr lang="it-IT" dirty="0" err="1">
+                <a:solidFill>
+                  <a:srgbClr val="171FE2"/>
+                </a:solidFill>
+                <a:latin typeface="Consolas" panose="020B0609020204030204" pitchFamily="49" charset="0"/>
+              </a:rPr>
+              <a:t>get</a:t>
+            </a:r>
+            <a:r>
+              <a:rPr lang="it-IT" dirty="0">
+                <a:solidFill>
+                  <a:srgbClr val="171FE2"/>
+                </a:solidFill>
+                <a:latin typeface="Consolas" panose="020B0609020204030204" pitchFamily="49" charset="0"/>
+              </a:rPr>
+              <a:t> secrets</a:t>
+            </a:r>
+          </a:p>
+        </p:txBody>
+      </p:sp>
+    </p:spTree>
+    <p:extLst>
+      <p:ext uri="{BB962C8B-B14F-4D97-AF65-F5344CB8AC3E}">
+        <p14:creationId xmlns:p14="http://schemas.microsoft.com/office/powerpoint/2010/main" val="3478337387"/>
+      </p:ext>
+    </p:extLst>
+  </p:cSld>
+  <p:clrMapOvr>
+    <a:masterClrMapping/>
+  </p:clrMapOvr>
+</p:sld>
+</file>
+
+<file path=ppt/slides/slide42.xml><?xml version="1.0" encoding="utf-8"?>
+<p:sld xmlns:a="http://schemas.openxmlformats.org/drawingml/2006/main" xmlns:r="http://schemas.openxmlformats.org/officeDocument/2006/relationships" xmlns:p="http://schemas.openxmlformats.org/presentationml/2006/main">
+  <p:cSld>
+    <p:spTree>
+      <p:nvGrpSpPr>
+        <p:cNvPr id="1" name="">
+          <a:extLst>
+            <a:ext uri="{FF2B5EF4-FFF2-40B4-BE49-F238E27FC236}">
+              <a16:creationId xmlns:a16="http://schemas.microsoft.com/office/drawing/2014/main" id="{5058C535-C0FC-B8B2-D597-231AB77E7B3C}"/>
+            </a:ext>
+          </a:extLst>
+        </p:cNvPr>
+        <p:cNvGrpSpPr/>
+        <p:nvPr/>
+      </p:nvGrpSpPr>
+      <p:grpSpPr>
+        <a:xfrm>
+          <a:off x="0" y="0"/>
+          <a:ext cx="0" cy="0"/>
+          <a:chOff x="0" y="0"/>
+          <a:chExt cx="0" cy="0"/>
+        </a:xfrm>
+      </p:grpSpPr>
+      <p:sp>
+        <p:nvSpPr>
+          <p:cNvPr id="2" name="Titolo della lezione">
+            <a:extLst>
+              <a:ext uri="{FF2B5EF4-FFF2-40B4-BE49-F238E27FC236}">
+                <a16:creationId xmlns:a16="http://schemas.microsoft.com/office/drawing/2014/main" id="{9A633CC2-6C4D-99AD-2686-F912319F298F}"/>
+              </a:ext>
+            </a:extLst>
+          </p:cNvPr>
+          <p:cNvSpPr>
+            <a:spLocks noGrp="1"/>
+          </p:cNvSpPr>
+          <p:nvPr>
+            <p:ph type="title"/>
+          </p:nvPr>
+        </p:nvSpPr>
+        <p:spPr>
+          <a:xfrm>
+            <a:off x="838200" y="831206"/>
+            <a:ext cx="10515600" cy="314198"/>
+          </a:xfrm>
+        </p:spPr>
+        <p:txBody>
+          <a:bodyPr/>
+          <a:lstStyle/>
+          <a:p>
+            <a:r>
+              <a:rPr lang="it-IT" dirty="0"/>
+              <a:t>SLIDE 40: LAB PRACTICAL – CREARE LA CASSAFORTE DELLE PASSWORD CON KUBECTL</a:t>
+            </a:r>
+            <a:br>
+              <a:rPr lang="it-IT" dirty="0"/>
+            </a:br>
+            <a:br>
+              <a:rPr lang="it-IT" dirty="0"/>
+            </a:br>
+            <a:endParaRPr lang="it-IT" dirty="0"/>
+          </a:p>
+        </p:txBody>
+      </p:sp>
+      <p:sp>
+        <p:nvSpPr>
+          <p:cNvPr id="3" name="Contenuto della lezione">
+            <a:extLst>
+              <a:ext uri="{FF2B5EF4-FFF2-40B4-BE49-F238E27FC236}">
+                <a16:creationId xmlns:a16="http://schemas.microsoft.com/office/drawing/2014/main" id="{4529E48E-065D-4B22-5A37-3CE8D416875C}"/>
+              </a:ext>
+            </a:extLst>
+          </p:cNvPr>
+          <p:cNvSpPr>
+            <a:spLocks noGrp="1"/>
+          </p:cNvSpPr>
+          <p:nvPr>
+            <p:ph idx="1"/>
+          </p:nvPr>
+        </p:nvSpPr>
+        <p:spPr>
+          <a:xfrm>
+            <a:off x="838200" y="1589185"/>
+            <a:ext cx="10783824" cy="5460839"/>
+          </a:xfrm>
+        </p:spPr>
+        <p:txBody>
+          <a:bodyPr/>
+          <a:lstStyle/>
+          <a:p>
+            <a:r>
+              <a:rPr lang="it-IT" dirty="0"/>
+              <a:t>Vedremo apparire una tabella contenente il nostro database-segreto, la tipologia </a:t>
+            </a:r>
+            <a:r>
+              <a:rPr lang="it-IT" dirty="0" err="1"/>
+              <a:t>Opaque</a:t>
+            </a:r>
+            <a:r>
+              <a:rPr lang="it-IT" dirty="0"/>
+              <a:t> (che indica un segreto generico standard a protezione opaca) e il numero di elementi salvati all'interno (1 DATA). </a:t>
+            </a:r>
+          </a:p>
+          <a:p>
+            <a:endParaRPr lang="it-IT" dirty="0"/>
+          </a:p>
+          <a:p>
+            <a:endParaRPr lang="it-IT" dirty="0"/>
+          </a:p>
+          <a:p>
+            <a:r>
+              <a:rPr lang="it-IT" dirty="0"/>
+              <a:t>Se proviamo a lanciare un comando di ispezione profonda come:</a:t>
+            </a:r>
+          </a:p>
+          <a:p>
+            <a:r>
+              <a:rPr lang="it-IT" dirty="0" err="1">
+                <a:solidFill>
+                  <a:srgbClr val="171FE2"/>
+                </a:solidFill>
+                <a:latin typeface="Consolas" panose="020B0609020204030204" pitchFamily="49" charset="0"/>
+              </a:rPr>
+              <a:t>kubectl</a:t>
+            </a:r>
+            <a:r>
+              <a:rPr lang="it-IT" dirty="0">
+                <a:solidFill>
+                  <a:srgbClr val="171FE2"/>
+                </a:solidFill>
+                <a:latin typeface="Consolas" panose="020B0609020204030204" pitchFamily="49" charset="0"/>
+              </a:rPr>
+              <a:t> </a:t>
+            </a:r>
+            <a:r>
+              <a:rPr lang="it-IT" dirty="0" err="1">
+                <a:solidFill>
+                  <a:srgbClr val="171FE2"/>
+                </a:solidFill>
+                <a:latin typeface="Consolas" panose="020B0609020204030204" pitchFamily="49" charset="0"/>
+              </a:rPr>
+              <a:t>describe</a:t>
+            </a:r>
+            <a:r>
+              <a:rPr lang="it-IT" dirty="0">
+                <a:solidFill>
+                  <a:srgbClr val="171FE2"/>
+                </a:solidFill>
+                <a:latin typeface="Consolas" panose="020B0609020204030204" pitchFamily="49" charset="0"/>
+              </a:rPr>
+              <a:t> secret database-segreto</a:t>
+            </a:r>
+          </a:p>
+          <a:p>
+            <a:r>
+              <a:rPr lang="it-IT" dirty="0"/>
+              <a:t>noteremo che </a:t>
+            </a:r>
+            <a:r>
+              <a:rPr lang="it-IT" dirty="0" err="1"/>
+              <a:t>Kubernetes</a:t>
+            </a:r>
+            <a:r>
+              <a:rPr lang="it-IT" dirty="0"/>
+              <a:t>, per proteggere la nostra privacy, non mostrerà mai il testo della password in chiaro sul monitor, ma dirà soltanto la dimensione in byte del valore nascosto. </a:t>
+            </a:r>
+          </a:p>
+          <a:p>
+            <a:r>
+              <a:rPr lang="it-IT" dirty="0"/>
+              <a:t>La password è ora al sicuro nel cluster.</a:t>
+            </a:r>
+            <a:endParaRPr lang="it-IT" dirty="0">
+              <a:solidFill>
+                <a:srgbClr val="171FE2"/>
+              </a:solidFill>
+              <a:latin typeface="Consolas" panose="020B0609020204030204" pitchFamily="49" charset="0"/>
+            </a:endParaRPr>
+          </a:p>
+        </p:txBody>
+      </p:sp>
+      <p:pic>
+        <p:nvPicPr>
+          <p:cNvPr id="5" name="Immagine 4">
+            <a:extLst>
+              <a:ext uri="{FF2B5EF4-FFF2-40B4-BE49-F238E27FC236}">
+                <a16:creationId xmlns:a16="http://schemas.microsoft.com/office/drawing/2014/main" id="{674187DE-2C04-D56F-7878-7F56FF246C24}"/>
+              </a:ext>
+            </a:extLst>
+          </p:cNvPr>
+          <p:cNvPicPr>
+            <a:picLocks noChangeAspect="1"/>
+          </p:cNvPicPr>
+          <p:nvPr/>
+        </p:nvPicPr>
+        <p:blipFill>
+          <a:blip r:embed="rId2"/>
+          <a:stretch>
+            <a:fillRect/>
+          </a:stretch>
+        </p:blipFill>
+        <p:spPr>
+          <a:xfrm>
+            <a:off x="3162300" y="2327275"/>
+            <a:ext cx="5867400" cy="666750"/>
+          </a:xfrm>
+          <a:prstGeom prst="rect">
+            <a:avLst/>
+          </a:prstGeom>
+        </p:spPr>
+      </p:pic>
+      <p:pic>
+        <p:nvPicPr>
+          <p:cNvPr id="7" name="Immagine 6">
+            <a:extLst>
+              <a:ext uri="{FF2B5EF4-FFF2-40B4-BE49-F238E27FC236}">
+                <a16:creationId xmlns:a16="http://schemas.microsoft.com/office/drawing/2014/main" id="{302A6664-1D6F-321E-4158-3B81B98FBFF9}"/>
+              </a:ext>
+            </a:extLst>
+          </p:cNvPr>
+          <p:cNvPicPr>
+            <a:picLocks noChangeAspect="1"/>
+          </p:cNvPicPr>
+          <p:nvPr/>
+        </p:nvPicPr>
+        <p:blipFill>
+          <a:blip r:embed="rId3"/>
+          <a:stretch>
+            <a:fillRect/>
+          </a:stretch>
+        </p:blipFill>
+        <p:spPr>
+          <a:xfrm>
+            <a:off x="5300662" y="4619522"/>
+            <a:ext cx="6381245" cy="1990827"/>
+          </a:xfrm>
+          <a:prstGeom prst="rect">
+            <a:avLst/>
+          </a:prstGeom>
+        </p:spPr>
+      </p:pic>
+    </p:spTree>
+    <p:extLst>
+      <p:ext uri="{BB962C8B-B14F-4D97-AF65-F5344CB8AC3E}">
+        <p14:creationId xmlns:p14="http://schemas.microsoft.com/office/powerpoint/2010/main" val="2597129095"/>
+      </p:ext>
+    </p:extLst>
+  </p:cSld>
+  <p:clrMapOvr>
+    <a:masterClrMapping/>
+  </p:clrMapOvr>
+</p:sld>
+</file>
+
+<file path=ppt/slides/slide43.xml><?xml version="1.0" encoding="utf-8"?>
+<p:sld xmlns:a="http://schemas.openxmlformats.org/drawingml/2006/main" xmlns:r="http://schemas.openxmlformats.org/officeDocument/2006/relationships" xmlns:p="http://schemas.openxmlformats.org/presentationml/2006/main">
+  <p:cSld>
+    <p:spTree>
+      <p:nvGrpSpPr>
+        <p:cNvPr id="1" name="">
+          <a:extLst>
+            <a:ext uri="{FF2B5EF4-FFF2-40B4-BE49-F238E27FC236}">
+              <a16:creationId xmlns:a16="http://schemas.microsoft.com/office/drawing/2014/main" id="{ED005950-E267-300C-35EA-037049A5EA53}"/>
+            </a:ext>
+          </a:extLst>
+        </p:cNvPr>
+        <p:cNvGrpSpPr/>
+        <p:nvPr/>
+      </p:nvGrpSpPr>
+      <p:grpSpPr>
+        <a:xfrm>
+          <a:off x="0" y="0"/>
+          <a:ext cx="0" cy="0"/>
+          <a:chOff x="0" y="0"/>
+          <a:chExt cx="0" cy="0"/>
+        </a:xfrm>
+      </p:grpSpPr>
+      <p:sp>
+        <p:nvSpPr>
+          <p:cNvPr id="2" name="Titolo della lezione">
+            <a:extLst>
+              <a:ext uri="{FF2B5EF4-FFF2-40B4-BE49-F238E27FC236}">
+                <a16:creationId xmlns:a16="http://schemas.microsoft.com/office/drawing/2014/main" id="{330EEFDA-B833-B011-F1C8-C9511D180F97}"/>
+              </a:ext>
+            </a:extLst>
+          </p:cNvPr>
+          <p:cNvSpPr>
+            <a:spLocks noGrp="1"/>
+          </p:cNvSpPr>
+          <p:nvPr>
+            <p:ph type="title"/>
+          </p:nvPr>
+        </p:nvSpPr>
+        <p:spPr>
+          <a:xfrm>
+            <a:off x="838200" y="831206"/>
+            <a:ext cx="10515600" cy="314198"/>
+          </a:xfrm>
+        </p:spPr>
+        <p:txBody>
+          <a:bodyPr/>
+          <a:lstStyle/>
+          <a:p>
+            <a:r>
+              <a:rPr lang="it-IT" dirty="0"/>
+              <a:t>SLIDE 41: LAB PRACTICAL – CREARE LA CASSAFORTE DELLE PASSWORD CON KUBECTL</a:t>
+            </a:r>
+            <a:br>
+              <a:rPr lang="it-IT" dirty="0"/>
+            </a:br>
+            <a:br>
+              <a:rPr lang="it-IT" dirty="0"/>
+            </a:br>
+            <a:endParaRPr lang="it-IT" dirty="0"/>
+          </a:p>
+        </p:txBody>
+      </p:sp>
+      <p:sp>
+        <p:nvSpPr>
+          <p:cNvPr id="3" name="Contenuto della lezione">
+            <a:extLst>
+              <a:ext uri="{FF2B5EF4-FFF2-40B4-BE49-F238E27FC236}">
+                <a16:creationId xmlns:a16="http://schemas.microsoft.com/office/drawing/2014/main" id="{50AE4508-FA12-CBDC-D855-37F16EC8BBCC}"/>
+              </a:ext>
+            </a:extLst>
+          </p:cNvPr>
+          <p:cNvSpPr>
+            <a:spLocks noGrp="1"/>
+          </p:cNvSpPr>
+          <p:nvPr>
+            <p:ph idx="1"/>
+          </p:nvPr>
+        </p:nvSpPr>
+        <p:spPr>
+          <a:xfrm>
+            <a:off x="838200" y="1589185"/>
+            <a:ext cx="10783824" cy="5460839"/>
+          </a:xfrm>
+        </p:spPr>
+        <p:txBody>
+          <a:bodyPr/>
+          <a:lstStyle/>
+          <a:p>
+            <a:r>
+              <a:rPr lang="it-IT" dirty="0"/>
+              <a:t>Se abbiamo </a:t>
+            </a:r>
+            <a:r>
+              <a:rPr lang="it-IT" i="1" dirty="0"/>
+              <a:t>sbagliato a scrivere la password </a:t>
+            </a:r>
+            <a:r>
+              <a:rPr lang="it-IT" dirty="0"/>
+              <a:t>il modo più pulito ed elegante è distruggere il secret vecchio e rifarlo. </a:t>
+            </a:r>
+          </a:p>
+          <a:p>
+            <a:r>
+              <a:rPr lang="it-IT" dirty="0"/>
+              <a:t>Eseguiamo il comando: </a:t>
+            </a:r>
+          </a:p>
+          <a:p>
+            <a:r>
+              <a:rPr lang="it-IT" dirty="0" err="1">
+                <a:solidFill>
+                  <a:srgbClr val="171FE2"/>
+                </a:solidFill>
+                <a:latin typeface="Consolas" panose="020B0609020204030204" pitchFamily="49" charset="0"/>
+              </a:rPr>
+              <a:t>kubectl</a:t>
+            </a:r>
+            <a:r>
+              <a:rPr lang="it-IT" dirty="0">
+                <a:solidFill>
+                  <a:srgbClr val="171FE2"/>
+                </a:solidFill>
+                <a:latin typeface="Consolas" panose="020B0609020204030204" pitchFamily="49" charset="0"/>
+              </a:rPr>
+              <a:t> delete secret database-segreto </a:t>
+            </a:r>
+          </a:p>
+          <a:p>
+            <a:r>
+              <a:rPr lang="it-IT" dirty="0"/>
+              <a:t>per poi creare un secret nuovo. </a:t>
+            </a:r>
+          </a:p>
+          <a:p>
+            <a:r>
+              <a:rPr lang="it-IT" dirty="0"/>
+              <a:t>È la procedura standard consigliata per non lasciare tracce orfane.</a:t>
+            </a:r>
+            <a:endParaRPr lang="it-IT" dirty="0">
+              <a:solidFill>
+                <a:srgbClr val="171FE2"/>
+              </a:solidFill>
+              <a:latin typeface="Consolas" panose="020B0609020204030204" pitchFamily="49" charset="0"/>
+            </a:endParaRPr>
+          </a:p>
+        </p:txBody>
+      </p:sp>
+    </p:spTree>
+    <p:extLst>
+      <p:ext uri="{BB962C8B-B14F-4D97-AF65-F5344CB8AC3E}">
+        <p14:creationId xmlns:p14="http://schemas.microsoft.com/office/powerpoint/2010/main" val="3505084552"/>
+      </p:ext>
+    </p:extLst>
+  </p:cSld>
+  <p:clrMapOvr>
+    <a:masterClrMapping/>
+  </p:clrMapOvr>
+</p:sld>
+</file>
+
+<file path=ppt/slides/slide44.xml><?xml version="1.0" encoding="utf-8"?>
+<p:sld xmlns:a="http://schemas.openxmlformats.org/drawingml/2006/main" xmlns:r="http://schemas.openxmlformats.org/officeDocument/2006/relationships" xmlns:p="http://schemas.openxmlformats.org/presentationml/2006/main">
+  <p:cSld>
+    <p:spTree>
+      <p:nvGrpSpPr>
+        <p:cNvPr id="1" name="">
+          <a:extLst>
+            <a:ext uri="{FF2B5EF4-FFF2-40B4-BE49-F238E27FC236}">
+              <a16:creationId xmlns:a16="http://schemas.microsoft.com/office/drawing/2014/main" id="{9A714334-EFA8-3BB7-47E0-20B154C2F2D2}"/>
+            </a:ext>
+          </a:extLst>
+        </p:cNvPr>
+        <p:cNvGrpSpPr/>
+        <p:nvPr/>
+      </p:nvGrpSpPr>
+      <p:grpSpPr>
+        <a:xfrm>
+          <a:off x="0" y="0"/>
+          <a:ext cx="0" cy="0"/>
+          <a:chOff x="0" y="0"/>
+          <a:chExt cx="0" cy="0"/>
+        </a:xfrm>
+      </p:grpSpPr>
+      <p:sp>
+        <p:nvSpPr>
+          <p:cNvPr id="2" name="Titolo della lezione">
+            <a:extLst>
+              <a:ext uri="{FF2B5EF4-FFF2-40B4-BE49-F238E27FC236}">
+                <a16:creationId xmlns:a16="http://schemas.microsoft.com/office/drawing/2014/main" id="{1B887308-FF16-930C-DFBF-66977257DD46}"/>
+              </a:ext>
+            </a:extLst>
+          </p:cNvPr>
+          <p:cNvSpPr>
+            <a:spLocks noGrp="1"/>
+          </p:cNvSpPr>
+          <p:nvPr>
+            <p:ph type="title"/>
+          </p:nvPr>
+        </p:nvSpPr>
+        <p:spPr>
+          <a:xfrm>
+            <a:off x="838200" y="831206"/>
+            <a:ext cx="10515600" cy="314198"/>
+          </a:xfrm>
+        </p:spPr>
+        <p:txBody>
+          <a:bodyPr/>
+          <a:lstStyle/>
+          <a:p>
+            <a:r>
+              <a:rPr lang="it-IT" dirty="0"/>
+              <a:t>SLIDE 42: LAB PRACTICAL – </a:t>
+            </a:r>
+            <a:br>
+              <a:rPr lang="it-IT" dirty="0"/>
+            </a:br>
+            <a:r>
+              <a:rPr lang="it-IT" dirty="0"/>
+              <a:t>COMPILARE IL MANIFESTO </a:t>
+            </a:r>
+            <a:br>
+              <a:rPr lang="it-IT" dirty="0"/>
+            </a:br>
+            <a:r>
+              <a:rPr lang="it-IT" dirty="0"/>
+              <a:t>FINALE DEL DATABASE STATEFUL</a:t>
+            </a:r>
+            <a:br>
+              <a:rPr lang="it-IT" dirty="0"/>
+            </a:br>
+            <a:br>
+              <a:rPr lang="it-IT" dirty="0"/>
+            </a:br>
+            <a:endParaRPr lang="it-IT" dirty="0"/>
+          </a:p>
+        </p:txBody>
+      </p:sp>
+      <p:sp>
+        <p:nvSpPr>
+          <p:cNvPr id="3" name="Contenuto della lezione">
+            <a:extLst>
+              <a:ext uri="{FF2B5EF4-FFF2-40B4-BE49-F238E27FC236}">
+                <a16:creationId xmlns:a16="http://schemas.microsoft.com/office/drawing/2014/main" id="{40910EB2-B423-9CA0-BDB9-396034D41B28}"/>
+              </a:ext>
+            </a:extLst>
+          </p:cNvPr>
+          <p:cNvSpPr>
+            <a:spLocks noGrp="1"/>
+          </p:cNvSpPr>
+          <p:nvPr>
+            <p:ph idx="1"/>
+          </p:nvPr>
+        </p:nvSpPr>
+        <p:spPr>
+          <a:xfrm>
+            <a:off x="838200" y="1932085"/>
+            <a:ext cx="5391150" cy="5460839"/>
+          </a:xfrm>
+        </p:spPr>
+        <p:txBody>
+          <a:bodyPr/>
+          <a:lstStyle/>
+          <a:p>
+            <a:r>
+              <a:rPr lang="it-IT" dirty="0"/>
+              <a:t>Scriveremo il Manifesto YAML per il Deployment del database </a:t>
+            </a:r>
+            <a:r>
+              <a:rPr lang="it-IT" dirty="0" err="1"/>
+              <a:t>MariaDB</a:t>
+            </a:r>
+            <a:r>
+              <a:rPr lang="it-IT" dirty="0"/>
+              <a:t>.</a:t>
+            </a:r>
+          </a:p>
+          <a:p>
+            <a:r>
+              <a:rPr lang="it-IT" dirty="0">
+                <a:solidFill>
+                  <a:srgbClr val="171FE2"/>
+                </a:solidFill>
+              </a:rPr>
+              <a:t>Al suo interno collegheremo contemporaneamente lo stampo del container, il canale di prelievo della password dal Secret e l'aggancio del disco rigido esterno dal PVC.</a:t>
+            </a:r>
+          </a:p>
+          <a:p>
+            <a:r>
+              <a:rPr lang="it-IT" dirty="0"/>
+              <a:t>Creiamo </a:t>
+            </a:r>
+            <a:r>
+              <a:rPr lang="it-IT" b="1" dirty="0"/>
+              <a:t>deployment-</a:t>
+            </a:r>
+            <a:r>
+              <a:rPr lang="it-IT" b="1" dirty="0" err="1"/>
+              <a:t>database.yaml</a:t>
+            </a:r>
+            <a:r>
+              <a:rPr lang="it-IT" dirty="0"/>
+              <a:t>. </a:t>
+            </a:r>
+          </a:p>
+        </p:txBody>
+      </p:sp>
+      <p:sp>
+        <p:nvSpPr>
+          <p:cNvPr id="4" name="CasellaDiTesto 3">
+            <a:extLst>
+              <a:ext uri="{FF2B5EF4-FFF2-40B4-BE49-F238E27FC236}">
+                <a16:creationId xmlns:a16="http://schemas.microsoft.com/office/drawing/2014/main" id="{ADCABB44-1B67-CAE5-AB86-51C9AB35122C}"/>
+              </a:ext>
+            </a:extLst>
+          </p:cNvPr>
+          <p:cNvSpPr txBox="1"/>
+          <p:nvPr/>
+        </p:nvSpPr>
+        <p:spPr>
+          <a:xfrm>
+            <a:off x="6184900" y="311150"/>
+            <a:ext cx="4022255" cy="6494085"/>
+          </a:xfrm>
+          <a:prstGeom prst="rect">
+            <a:avLst/>
+          </a:prstGeom>
+          <a:noFill/>
+        </p:spPr>
+        <p:txBody>
+          <a:bodyPr wrap="none" rtlCol="0">
+            <a:spAutoFit/>
+          </a:bodyPr>
+          <a:lstStyle/>
+          <a:p>
+            <a:r>
+              <a:rPr lang="it-IT" sz="1300" dirty="0" err="1">
+                <a:solidFill>
+                  <a:srgbClr val="171FE2"/>
+                </a:solidFill>
+                <a:latin typeface="Consolas" panose="020B0609020204030204" pitchFamily="49" charset="0"/>
+              </a:rPr>
+              <a:t>apiVersion</a:t>
+            </a:r>
+            <a:r>
+              <a:rPr lang="it-IT" sz="1300" dirty="0">
+                <a:solidFill>
+                  <a:srgbClr val="171FE2"/>
+                </a:solidFill>
+                <a:latin typeface="Consolas" panose="020B0609020204030204" pitchFamily="49" charset="0"/>
+              </a:rPr>
+              <a:t>: apps/v1</a:t>
+            </a:r>
+          </a:p>
+          <a:p>
+            <a:r>
+              <a:rPr lang="it-IT" sz="1300" dirty="0" err="1">
+                <a:solidFill>
+                  <a:srgbClr val="171FE2"/>
+                </a:solidFill>
+                <a:latin typeface="Consolas" panose="020B0609020204030204" pitchFamily="49" charset="0"/>
+              </a:rPr>
+              <a:t>kind</a:t>
+            </a:r>
+            <a:r>
+              <a:rPr lang="it-IT" sz="1300" dirty="0">
+                <a:solidFill>
+                  <a:srgbClr val="171FE2"/>
+                </a:solidFill>
+                <a:latin typeface="Consolas" panose="020B0609020204030204" pitchFamily="49" charset="0"/>
+              </a:rPr>
+              <a:t>: Deployment</a:t>
+            </a:r>
+          </a:p>
+          <a:p>
+            <a:r>
+              <a:rPr lang="it-IT" sz="1300" dirty="0">
+                <a:solidFill>
+                  <a:srgbClr val="171FE2"/>
+                </a:solidFill>
+                <a:latin typeface="Consolas" panose="020B0609020204030204" pitchFamily="49" charset="0"/>
+              </a:rPr>
+              <a:t>metadata:</a:t>
+            </a:r>
+          </a:p>
+          <a:p>
+            <a:r>
+              <a:rPr lang="it-IT" sz="1300" dirty="0">
+                <a:solidFill>
+                  <a:srgbClr val="171FE2"/>
+                </a:solidFill>
+                <a:latin typeface="Consolas" panose="020B0609020204030204" pitchFamily="49" charset="0"/>
+              </a:rPr>
+              <a:t>  name: </a:t>
+            </a:r>
+            <a:r>
+              <a:rPr lang="it-IT" sz="1300" dirty="0" err="1">
+                <a:solidFill>
+                  <a:srgbClr val="171FE2"/>
+                </a:solidFill>
+                <a:latin typeface="Consolas" panose="020B0609020204030204" pitchFamily="49" charset="0"/>
+              </a:rPr>
+              <a:t>mariadb</a:t>
+            </a:r>
+            <a:r>
+              <a:rPr lang="it-IT" sz="1300" dirty="0">
+                <a:solidFill>
+                  <a:srgbClr val="171FE2"/>
+                </a:solidFill>
+                <a:latin typeface="Consolas" panose="020B0609020204030204" pitchFamily="49" charset="0"/>
+              </a:rPr>
+              <a:t>-deployment</a:t>
+            </a:r>
+          </a:p>
+          <a:p>
+            <a:r>
+              <a:rPr lang="it-IT" sz="1300" dirty="0" err="1">
+                <a:solidFill>
+                  <a:srgbClr val="171FE2"/>
+                </a:solidFill>
+                <a:latin typeface="Consolas" panose="020B0609020204030204" pitchFamily="49" charset="0"/>
+              </a:rPr>
+              <a:t>spec</a:t>
+            </a:r>
+            <a:r>
+              <a:rPr lang="it-IT" sz="1300" dirty="0">
+                <a:solidFill>
+                  <a:srgbClr val="171FE2"/>
+                </a:solidFill>
+                <a:latin typeface="Consolas" panose="020B0609020204030204" pitchFamily="49" charset="0"/>
+              </a:rPr>
+              <a:t>:</a:t>
+            </a:r>
+          </a:p>
+          <a:p>
+            <a:r>
+              <a:rPr lang="it-IT" sz="1300" dirty="0">
+                <a:solidFill>
+                  <a:srgbClr val="171FE2"/>
+                </a:solidFill>
+                <a:latin typeface="Consolas" panose="020B0609020204030204" pitchFamily="49" charset="0"/>
+              </a:rPr>
+              <a:t>  </a:t>
+            </a:r>
+            <a:r>
+              <a:rPr lang="it-IT" sz="1300" dirty="0" err="1">
+                <a:solidFill>
+                  <a:srgbClr val="171FE2"/>
+                </a:solidFill>
+                <a:latin typeface="Consolas" panose="020B0609020204030204" pitchFamily="49" charset="0"/>
+              </a:rPr>
+              <a:t>replicas</a:t>
+            </a:r>
+            <a:r>
+              <a:rPr lang="it-IT" sz="1300" dirty="0">
+                <a:solidFill>
+                  <a:srgbClr val="171FE2"/>
+                </a:solidFill>
+                <a:latin typeface="Consolas" panose="020B0609020204030204" pitchFamily="49" charset="0"/>
+              </a:rPr>
+              <a:t>: 1</a:t>
+            </a:r>
+          </a:p>
+          <a:p>
+            <a:r>
+              <a:rPr lang="it-IT" sz="1300" dirty="0">
+                <a:solidFill>
+                  <a:srgbClr val="171FE2"/>
+                </a:solidFill>
+                <a:latin typeface="Consolas" panose="020B0609020204030204" pitchFamily="49" charset="0"/>
+              </a:rPr>
+              <a:t>  selector:</a:t>
+            </a:r>
+          </a:p>
+          <a:p>
+            <a:r>
+              <a:rPr lang="it-IT" sz="1300" dirty="0">
+                <a:solidFill>
+                  <a:srgbClr val="171FE2"/>
+                </a:solidFill>
+                <a:latin typeface="Consolas" panose="020B0609020204030204" pitchFamily="49" charset="0"/>
+              </a:rPr>
+              <a:t>    </a:t>
+            </a:r>
+            <a:r>
+              <a:rPr lang="it-IT" sz="1300" dirty="0" err="1">
+                <a:solidFill>
+                  <a:srgbClr val="171FE2"/>
+                </a:solidFill>
+                <a:latin typeface="Consolas" panose="020B0609020204030204" pitchFamily="49" charset="0"/>
+              </a:rPr>
+              <a:t>matchLabels</a:t>
+            </a:r>
+            <a:r>
+              <a:rPr lang="it-IT" sz="1300" dirty="0">
+                <a:solidFill>
+                  <a:srgbClr val="171FE2"/>
+                </a:solidFill>
+                <a:latin typeface="Consolas" panose="020B0609020204030204" pitchFamily="49" charset="0"/>
+              </a:rPr>
+              <a:t>:</a:t>
+            </a:r>
+          </a:p>
+          <a:p>
+            <a:r>
+              <a:rPr lang="it-IT" sz="1300" dirty="0">
+                <a:solidFill>
+                  <a:srgbClr val="171FE2"/>
+                </a:solidFill>
+                <a:latin typeface="Consolas" panose="020B0609020204030204" pitchFamily="49" charset="0"/>
+              </a:rPr>
+              <a:t>      app: database-</a:t>
+            </a:r>
+            <a:r>
+              <a:rPr lang="it-IT" sz="1300" dirty="0" err="1">
+                <a:solidFill>
+                  <a:srgbClr val="171FE2"/>
+                </a:solidFill>
+                <a:latin typeface="Consolas" panose="020B0609020204030204" pitchFamily="49" charset="0"/>
+              </a:rPr>
+              <a:t>enterprise</a:t>
+            </a:r>
+            <a:endParaRPr lang="it-IT" sz="1300" dirty="0">
+              <a:solidFill>
+                <a:srgbClr val="171FE2"/>
+              </a:solidFill>
+              <a:latin typeface="Consolas" panose="020B0609020204030204" pitchFamily="49" charset="0"/>
+            </a:endParaRPr>
+          </a:p>
+          <a:p>
+            <a:r>
+              <a:rPr lang="it-IT" sz="1300" dirty="0">
+                <a:solidFill>
+                  <a:srgbClr val="171FE2"/>
+                </a:solidFill>
+                <a:latin typeface="Consolas" panose="020B0609020204030204" pitchFamily="49" charset="0"/>
+              </a:rPr>
+              <a:t>  template:</a:t>
+            </a:r>
+          </a:p>
+          <a:p>
+            <a:r>
+              <a:rPr lang="it-IT" sz="1300" dirty="0">
+                <a:solidFill>
+                  <a:srgbClr val="171FE2"/>
+                </a:solidFill>
+                <a:latin typeface="Consolas" panose="020B0609020204030204" pitchFamily="49" charset="0"/>
+              </a:rPr>
+              <a:t>    metadata:</a:t>
+            </a:r>
+          </a:p>
+          <a:p>
+            <a:r>
+              <a:rPr lang="it-IT" sz="1300" dirty="0">
+                <a:solidFill>
+                  <a:srgbClr val="171FE2"/>
+                </a:solidFill>
+                <a:latin typeface="Consolas" panose="020B0609020204030204" pitchFamily="49" charset="0"/>
+              </a:rPr>
+              <a:t>      labels:</a:t>
+            </a:r>
+          </a:p>
+          <a:p>
+            <a:r>
+              <a:rPr lang="it-IT" sz="1300" dirty="0">
+                <a:solidFill>
+                  <a:srgbClr val="171FE2"/>
+                </a:solidFill>
+                <a:latin typeface="Consolas" panose="020B0609020204030204" pitchFamily="49" charset="0"/>
+              </a:rPr>
+              <a:t>        app: database-</a:t>
+            </a:r>
+            <a:r>
+              <a:rPr lang="it-IT" sz="1300" dirty="0" err="1">
+                <a:solidFill>
+                  <a:srgbClr val="171FE2"/>
+                </a:solidFill>
+                <a:latin typeface="Consolas" panose="020B0609020204030204" pitchFamily="49" charset="0"/>
+              </a:rPr>
+              <a:t>enterprise</a:t>
+            </a:r>
+            <a:endParaRPr lang="it-IT" sz="1300" dirty="0">
+              <a:solidFill>
+                <a:srgbClr val="171FE2"/>
+              </a:solidFill>
+              <a:latin typeface="Consolas" panose="020B0609020204030204" pitchFamily="49" charset="0"/>
+            </a:endParaRPr>
+          </a:p>
+          <a:p>
+            <a:r>
+              <a:rPr lang="it-IT" sz="1300" dirty="0">
+                <a:solidFill>
+                  <a:srgbClr val="171FE2"/>
+                </a:solidFill>
+                <a:latin typeface="Consolas" panose="020B0609020204030204" pitchFamily="49" charset="0"/>
+              </a:rPr>
+              <a:t>    </a:t>
+            </a:r>
+            <a:r>
+              <a:rPr lang="it-IT" sz="1300" dirty="0" err="1">
+                <a:solidFill>
+                  <a:srgbClr val="171FE2"/>
+                </a:solidFill>
+                <a:latin typeface="Consolas" panose="020B0609020204030204" pitchFamily="49" charset="0"/>
+              </a:rPr>
+              <a:t>spec</a:t>
+            </a:r>
+            <a:r>
+              <a:rPr lang="it-IT" sz="1300" dirty="0">
+                <a:solidFill>
+                  <a:srgbClr val="171FE2"/>
+                </a:solidFill>
+                <a:latin typeface="Consolas" panose="020B0609020204030204" pitchFamily="49" charset="0"/>
+              </a:rPr>
+              <a:t>:</a:t>
+            </a:r>
+          </a:p>
+          <a:p>
+            <a:r>
+              <a:rPr lang="it-IT" sz="1300" dirty="0">
+                <a:solidFill>
+                  <a:srgbClr val="171FE2"/>
+                </a:solidFill>
+                <a:latin typeface="Consolas" panose="020B0609020204030204" pitchFamily="49" charset="0"/>
+              </a:rPr>
+              <a:t>      containers:</a:t>
+            </a:r>
+          </a:p>
+          <a:p>
+            <a:r>
+              <a:rPr lang="it-IT" sz="1300" dirty="0">
+                <a:solidFill>
+                  <a:srgbClr val="171FE2"/>
+                </a:solidFill>
+                <a:latin typeface="Consolas" panose="020B0609020204030204" pitchFamily="49" charset="0"/>
+              </a:rPr>
+              <a:t>      - name: </a:t>
+            </a:r>
+            <a:r>
+              <a:rPr lang="it-IT" sz="1300" dirty="0" err="1">
+                <a:solidFill>
+                  <a:srgbClr val="171FE2"/>
+                </a:solidFill>
+                <a:latin typeface="Consolas" panose="020B0609020204030204" pitchFamily="49" charset="0"/>
+              </a:rPr>
+              <a:t>mariadb</a:t>
+            </a:r>
+            <a:r>
+              <a:rPr lang="it-IT" sz="1300" dirty="0">
+                <a:solidFill>
+                  <a:srgbClr val="171FE2"/>
+                </a:solidFill>
+                <a:latin typeface="Consolas" panose="020B0609020204030204" pitchFamily="49" charset="0"/>
+              </a:rPr>
+              <a:t>-container</a:t>
+            </a:r>
+          </a:p>
+          <a:p>
+            <a:r>
+              <a:rPr lang="it-IT" sz="1300" dirty="0">
+                <a:solidFill>
+                  <a:srgbClr val="171FE2"/>
+                </a:solidFill>
+                <a:latin typeface="Consolas" panose="020B0609020204030204" pitchFamily="49" charset="0"/>
+              </a:rPr>
+              <a:t>        image: mariadb:10.6</a:t>
+            </a:r>
+          </a:p>
+          <a:p>
+            <a:r>
+              <a:rPr lang="it-IT" sz="1300" dirty="0">
+                <a:solidFill>
+                  <a:srgbClr val="171FE2"/>
+                </a:solidFill>
+                <a:latin typeface="Consolas" panose="020B0609020204030204" pitchFamily="49" charset="0"/>
+              </a:rPr>
+              <a:t>        ports:</a:t>
+            </a:r>
+          </a:p>
+          <a:p>
+            <a:r>
+              <a:rPr lang="it-IT" sz="1300" dirty="0">
+                <a:solidFill>
+                  <a:srgbClr val="171FE2"/>
+                </a:solidFill>
+                <a:latin typeface="Consolas" panose="020B0609020204030204" pitchFamily="49" charset="0"/>
+              </a:rPr>
+              <a:t>        - </a:t>
+            </a:r>
+            <a:r>
+              <a:rPr lang="it-IT" sz="1300" dirty="0" err="1">
+                <a:solidFill>
+                  <a:srgbClr val="171FE2"/>
+                </a:solidFill>
+                <a:latin typeface="Consolas" panose="020B0609020204030204" pitchFamily="49" charset="0"/>
+              </a:rPr>
+              <a:t>containerPort</a:t>
+            </a:r>
+            <a:r>
+              <a:rPr lang="it-IT" sz="1300" dirty="0">
+                <a:solidFill>
+                  <a:srgbClr val="171FE2"/>
+                </a:solidFill>
+                <a:latin typeface="Consolas" panose="020B0609020204030204" pitchFamily="49" charset="0"/>
+              </a:rPr>
+              <a:t>: 3306</a:t>
+            </a:r>
+          </a:p>
+          <a:p>
+            <a:r>
+              <a:rPr lang="it-IT" sz="1300" dirty="0">
+                <a:solidFill>
+                  <a:srgbClr val="171FE2"/>
+                </a:solidFill>
+                <a:latin typeface="Consolas" panose="020B0609020204030204" pitchFamily="49" charset="0"/>
+              </a:rPr>
+              <a:t>        </a:t>
+            </a:r>
+            <a:r>
+              <a:rPr lang="it-IT" sz="1300" dirty="0" err="1">
+                <a:solidFill>
+                  <a:srgbClr val="171FE2"/>
+                </a:solidFill>
+                <a:latin typeface="Consolas" panose="020B0609020204030204" pitchFamily="49" charset="0"/>
+              </a:rPr>
+              <a:t>env</a:t>
+            </a:r>
+            <a:r>
+              <a:rPr lang="it-IT" sz="1300" dirty="0">
+                <a:solidFill>
+                  <a:srgbClr val="171FE2"/>
+                </a:solidFill>
+                <a:latin typeface="Consolas" panose="020B0609020204030204" pitchFamily="49" charset="0"/>
+              </a:rPr>
+              <a:t>:</a:t>
+            </a:r>
+          </a:p>
+          <a:p>
+            <a:r>
+              <a:rPr lang="it-IT" sz="1300" dirty="0">
+                <a:solidFill>
+                  <a:srgbClr val="171FE2"/>
+                </a:solidFill>
+                <a:latin typeface="Consolas" panose="020B0609020204030204" pitchFamily="49" charset="0"/>
+              </a:rPr>
+              <a:t>        - name: MARIADB_ROOT_PASSWORD</a:t>
+            </a:r>
+          </a:p>
+          <a:p>
+            <a:r>
+              <a:rPr lang="it-IT" sz="1300" dirty="0">
+                <a:solidFill>
+                  <a:srgbClr val="171FE2"/>
+                </a:solidFill>
+                <a:latin typeface="Consolas" panose="020B0609020204030204" pitchFamily="49" charset="0"/>
+              </a:rPr>
+              <a:t>          </a:t>
+            </a:r>
+            <a:r>
+              <a:rPr lang="it-IT" sz="1300" dirty="0" err="1">
+                <a:solidFill>
+                  <a:srgbClr val="171FE2"/>
+                </a:solidFill>
+                <a:latin typeface="Consolas" panose="020B0609020204030204" pitchFamily="49" charset="0"/>
+              </a:rPr>
+              <a:t>valueFrom</a:t>
+            </a:r>
+            <a:r>
+              <a:rPr lang="it-IT" sz="1300" dirty="0">
+                <a:solidFill>
+                  <a:srgbClr val="171FE2"/>
+                </a:solidFill>
+                <a:latin typeface="Consolas" panose="020B0609020204030204" pitchFamily="49" charset="0"/>
+              </a:rPr>
+              <a:t>:</a:t>
+            </a:r>
+          </a:p>
+          <a:p>
+            <a:r>
+              <a:rPr lang="it-IT" sz="1300" dirty="0">
+                <a:solidFill>
+                  <a:srgbClr val="171FE2"/>
+                </a:solidFill>
+                <a:latin typeface="Consolas" panose="020B0609020204030204" pitchFamily="49" charset="0"/>
+              </a:rPr>
+              <a:t>            </a:t>
+            </a:r>
+            <a:r>
+              <a:rPr lang="it-IT" sz="1300" dirty="0" err="1">
+                <a:solidFill>
+                  <a:srgbClr val="171FE2"/>
+                </a:solidFill>
+                <a:latin typeface="Consolas" panose="020B0609020204030204" pitchFamily="49" charset="0"/>
+              </a:rPr>
+              <a:t>secretKeyRef</a:t>
+            </a:r>
+            <a:r>
+              <a:rPr lang="it-IT" sz="1300" dirty="0">
+                <a:solidFill>
+                  <a:srgbClr val="171FE2"/>
+                </a:solidFill>
+                <a:latin typeface="Consolas" panose="020B0609020204030204" pitchFamily="49" charset="0"/>
+              </a:rPr>
+              <a:t>:</a:t>
+            </a:r>
+          </a:p>
+          <a:p>
+            <a:r>
+              <a:rPr lang="it-IT" sz="1300" dirty="0">
+                <a:solidFill>
+                  <a:srgbClr val="171FE2"/>
+                </a:solidFill>
+                <a:latin typeface="Consolas" panose="020B0609020204030204" pitchFamily="49" charset="0"/>
+              </a:rPr>
+              <a:t>              name: database-segreto</a:t>
+            </a:r>
+          </a:p>
+          <a:p>
+            <a:r>
+              <a:rPr lang="it-IT" sz="1300" dirty="0">
+                <a:solidFill>
+                  <a:srgbClr val="171FE2"/>
+                </a:solidFill>
+                <a:latin typeface="Consolas" panose="020B0609020204030204" pitchFamily="49" charset="0"/>
+              </a:rPr>
+              <a:t>              key: password-root</a:t>
+            </a:r>
+          </a:p>
+          <a:p>
+            <a:r>
+              <a:rPr lang="it-IT" sz="1300" dirty="0">
+                <a:solidFill>
+                  <a:srgbClr val="171FE2"/>
+                </a:solidFill>
+                <a:latin typeface="Consolas" panose="020B0609020204030204" pitchFamily="49" charset="0"/>
+              </a:rPr>
+              <a:t>        </a:t>
+            </a:r>
+            <a:r>
+              <a:rPr lang="it-IT" sz="1300" dirty="0" err="1">
+                <a:solidFill>
+                  <a:srgbClr val="171FE2"/>
+                </a:solidFill>
+                <a:latin typeface="Consolas" panose="020B0609020204030204" pitchFamily="49" charset="0"/>
+              </a:rPr>
+              <a:t>volumeMounts</a:t>
+            </a:r>
+            <a:r>
+              <a:rPr lang="it-IT" sz="1300" dirty="0">
+                <a:solidFill>
+                  <a:srgbClr val="171FE2"/>
+                </a:solidFill>
+                <a:latin typeface="Consolas" panose="020B0609020204030204" pitchFamily="49" charset="0"/>
+              </a:rPr>
+              <a:t>:</a:t>
+            </a:r>
+          </a:p>
+          <a:p>
+            <a:r>
+              <a:rPr lang="it-IT" sz="1300" dirty="0">
+                <a:solidFill>
+                  <a:srgbClr val="171FE2"/>
+                </a:solidFill>
+                <a:latin typeface="Consolas" panose="020B0609020204030204" pitchFamily="49" charset="0"/>
+              </a:rPr>
+              <a:t>        - name: </a:t>
+            </a:r>
+            <a:r>
+              <a:rPr lang="it-IT" sz="1300" dirty="0" err="1">
+                <a:solidFill>
+                  <a:srgbClr val="171FE2"/>
+                </a:solidFill>
+                <a:latin typeface="Consolas" panose="020B0609020204030204" pitchFamily="49" charset="0"/>
+              </a:rPr>
+              <a:t>mariadb</a:t>
+            </a:r>
+            <a:r>
+              <a:rPr lang="it-IT" sz="1300" dirty="0">
+                <a:solidFill>
+                  <a:srgbClr val="171FE2"/>
+                </a:solidFill>
+                <a:latin typeface="Consolas" panose="020B0609020204030204" pitchFamily="49" charset="0"/>
+              </a:rPr>
+              <a:t>-storage</a:t>
+            </a:r>
+          </a:p>
+          <a:p>
+            <a:r>
+              <a:rPr lang="it-IT" sz="1300" dirty="0">
+                <a:solidFill>
+                  <a:srgbClr val="171FE2"/>
+                </a:solidFill>
+                <a:latin typeface="Consolas" panose="020B0609020204030204" pitchFamily="49" charset="0"/>
+              </a:rPr>
+              <a:t>          </a:t>
+            </a:r>
+            <a:r>
+              <a:rPr lang="it-IT" sz="1300" dirty="0" err="1">
+                <a:solidFill>
+                  <a:srgbClr val="171FE2"/>
+                </a:solidFill>
+                <a:latin typeface="Consolas" panose="020B0609020204030204" pitchFamily="49" charset="0"/>
+              </a:rPr>
+              <a:t>mountPath</a:t>
+            </a:r>
+            <a:r>
+              <a:rPr lang="it-IT" sz="1300" dirty="0">
+                <a:solidFill>
+                  <a:srgbClr val="171FE2"/>
+                </a:solidFill>
+                <a:latin typeface="Consolas" panose="020B0609020204030204" pitchFamily="49" charset="0"/>
+              </a:rPr>
+              <a:t>: /var/</a:t>
+            </a:r>
+            <a:r>
+              <a:rPr lang="it-IT" sz="1300" dirty="0" err="1">
+                <a:solidFill>
+                  <a:srgbClr val="171FE2"/>
+                </a:solidFill>
+                <a:latin typeface="Consolas" panose="020B0609020204030204" pitchFamily="49" charset="0"/>
+              </a:rPr>
+              <a:t>lib</a:t>
+            </a:r>
+            <a:r>
+              <a:rPr lang="it-IT" sz="1300" dirty="0">
+                <a:solidFill>
+                  <a:srgbClr val="171FE2"/>
+                </a:solidFill>
+                <a:latin typeface="Consolas" panose="020B0609020204030204" pitchFamily="49" charset="0"/>
+              </a:rPr>
+              <a:t>/</a:t>
+            </a:r>
+            <a:r>
+              <a:rPr lang="it-IT" sz="1300" dirty="0" err="1">
+                <a:solidFill>
+                  <a:srgbClr val="171FE2"/>
+                </a:solidFill>
+                <a:latin typeface="Consolas" panose="020B0609020204030204" pitchFamily="49" charset="0"/>
+              </a:rPr>
+              <a:t>mysql</a:t>
+            </a:r>
+            <a:endParaRPr lang="it-IT" sz="1300" dirty="0">
+              <a:solidFill>
+                <a:srgbClr val="171FE2"/>
+              </a:solidFill>
+              <a:latin typeface="Consolas" panose="020B0609020204030204" pitchFamily="49" charset="0"/>
+            </a:endParaRPr>
+          </a:p>
+          <a:p>
+            <a:r>
+              <a:rPr lang="it-IT" sz="1300" dirty="0">
+                <a:solidFill>
+                  <a:srgbClr val="171FE2"/>
+                </a:solidFill>
+                <a:latin typeface="Consolas" panose="020B0609020204030204" pitchFamily="49" charset="0"/>
+              </a:rPr>
+              <a:t>      </a:t>
+            </a:r>
+            <a:r>
+              <a:rPr lang="it-IT" sz="1300" dirty="0" err="1">
+                <a:solidFill>
+                  <a:srgbClr val="171FE2"/>
+                </a:solidFill>
+                <a:latin typeface="Consolas" panose="020B0609020204030204" pitchFamily="49" charset="0"/>
+              </a:rPr>
+              <a:t>volumes</a:t>
+            </a:r>
+            <a:r>
+              <a:rPr lang="it-IT" sz="1300" dirty="0">
+                <a:solidFill>
+                  <a:srgbClr val="171FE2"/>
+                </a:solidFill>
+                <a:latin typeface="Consolas" panose="020B0609020204030204" pitchFamily="49" charset="0"/>
+              </a:rPr>
+              <a:t>:</a:t>
+            </a:r>
+          </a:p>
+          <a:p>
+            <a:r>
+              <a:rPr lang="it-IT" sz="1300" dirty="0">
+                <a:solidFill>
+                  <a:srgbClr val="171FE2"/>
+                </a:solidFill>
+                <a:latin typeface="Consolas" panose="020B0609020204030204" pitchFamily="49" charset="0"/>
+              </a:rPr>
+              <a:t>      - name: </a:t>
+            </a:r>
+            <a:r>
+              <a:rPr lang="it-IT" sz="1300" dirty="0" err="1">
+                <a:solidFill>
+                  <a:srgbClr val="171FE2"/>
+                </a:solidFill>
+                <a:latin typeface="Consolas" panose="020B0609020204030204" pitchFamily="49" charset="0"/>
+              </a:rPr>
+              <a:t>mariadb</a:t>
+            </a:r>
+            <a:r>
+              <a:rPr lang="it-IT" sz="1300" dirty="0">
+                <a:solidFill>
+                  <a:srgbClr val="171FE2"/>
+                </a:solidFill>
+                <a:latin typeface="Consolas" panose="020B0609020204030204" pitchFamily="49" charset="0"/>
+              </a:rPr>
+              <a:t>-storage</a:t>
+            </a:r>
+          </a:p>
+          <a:p>
+            <a:r>
+              <a:rPr lang="it-IT" sz="1300" dirty="0">
+                <a:solidFill>
+                  <a:srgbClr val="171FE2"/>
+                </a:solidFill>
+                <a:latin typeface="Consolas" panose="020B0609020204030204" pitchFamily="49" charset="0"/>
+              </a:rPr>
+              <a:t>        </a:t>
+            </a:r>
+            <a:r>
+              <a:rPr lang="it-IT" sz="1300" dirty="0" err="1">
+                <a:solidFill>
+                  <a:srgbClr val="171FE2"/>
+                </a:solidFill>
+                <a:latin typeface="Consolas" panose="020B0609020204030204" pitchFamily="49" charset="0"/>
+              </a:rPr>
+              <a:t>persistentVolumeClaim</a:t>
+            </a:r>
+            <a:r>
+              <a:rPr lang="it-IT" sz="1300" dirty="0">
+                <a:solidFill>
+                  <a:srgbClr val="171FE2"/>
+                </a:solidFill>
+                <a:latin typeface="Consolas" panose="020B0609020204030204" pitchFamily="49" charset="0"/>
+              </a:rPr>
+              <a:t>:</a:t>
+            </a:r>
+          </a:p>
+          <a:p>
+            <a:r>
+              <a:rPr lang="it-IT" sz="1300" dirty="0">
+                <a:solidFill>
+                  <a:srgbClr val="171FE2"/>
+                </a:solidFill>
+                <a:latin typeface="Consolas" panose="020B0609020204030204" pitchFamily="49" charset="0"/>
+              </a:rPr>
+              <a:t>          </a:t>
+            </a:r>
+            <a:r>
+              <a:rPr lang="it-IT" sz="1300" dirty="0" err="1">
+                <a:solidFill>
+                  <a:srgbClr val="171FE2"/>
+                </a:solidFill>
+                <a:latin typeface="Consolas" panose="020B0609020204030204" pitchFamily="49" charset="0"/>
+              </a:rPr>
+              <a:t>claimName</a:t>
+            </a:r>
+            <a:r>
+              <a:rPr lang="it-IT" sz="1300" dirty="0">
+                <a:solidFill>
+                  <a:srgbClr val="171FE2"/>
+                </a:solidFill>
+                <a:latin typeface="Consolas" panose="020B0609020204030204" pitchFamily="49" charset="0"/>
+              </a:rPr>
+              <a:t>: </a:t>
+            </a:r>
+            <a:r>
+              <a:rPr lang="it-IT" sz="1300" dirty="0" err="1">
+                <a:solidFill>
+                  <a:srgbClr val="171FE2"/>
+                </a:solidFill>
+                <a:latin typeface="Consolas" panose="020B0609020204030204" pitchFamily="49" charset="0"/>
+              </a:rPr>
+              <a:t>mariadb</a:t>
+            </a:r>
+            <a:r>
+              <a:rPr lang="it-IT" sz="1300" dirty="0">
+                <a:solidFill>
+                  <a:srgbClr val="171FE2"/>
+                </a:solidFill>
+                <a:latin typeface="Consolas" panose="020B0609020204030204" pitchFamily="49" charset="0"/>
+              </a:rPr>
+              <a:t>-storage-</a:t>
+            </a:r>
+            <a:r>
+              <a:rPr lang="it-IT" sz="1300" dirty="0" err="1">
+                <a:solidFill>
+                  <a:srgbClr val="171FE2"/>
+                </a:solidFill>
+                <a:latin typeface="Consolas" panose="020B0609020204030204" pitchFamily="49" charset="0"/>
+              </a:rPr>
+              <a:t>claim</a:t>
+            </a:r>
+            <a:endParaRPr lang="it-IT" sz="1300" dirty="0">
+              <a:solidFill>
+                <a:srgbClr val="171FE2"/>
+              </a:solidFill>
+              <a:latin typeface="Consolas" panose="020B0609020204030204" pitchFamily="49" charset="0"/>
+            </a:endParaRPr>
+          </a:p>
+        </p:txBody>
+      </p:sp>
+      <p:sp>
+        <p:nvSpPr>
+          <p:cNvPr id="5" name="CasellaDiTesto 4">
+            <a:extLst>
+              <a:ext uri="{FF2B5EF4-FFF2-40B4-BE49-F238E27FC236}">
+                <a16:creationId xmlns:a16="http://schemas.microsoft.com/office/drawing/2014/main" id="{6C93733D-0FBF-D7A4-F36A-2605C6C3C8E5}"/>
+              </a:ext>
+            </a:extLst>
+          </p:cNvPr>
+          <p:cNvSpPr txBox="1"/>
+          <p:nvPr/>
+        </p:nvSpPr>
+        <p:spPr>
+          <a:xfrm>
+            <a:off x="838200" y="4129028"/>
+            <a:ext cx="5518149" cy="2585323"/>
+          </a:xfrm>
+          <a:prstGeom prst="rect">
+            <a:avLst/>
+          </a:prstGeom>
+          <a:noFill/>
+        </p:spPr>
+        <p:txBody>
+          <a:bodyPr wrap="square" rtlCol="0">
+            <a:spAutoFit/>
+          </a:bodyPr>
+          <a:lstStyle/>
+          <a:p>
+            <a:r>
+              <a:rPr lang="it-IT" dirty="0"/>
+              <a:t>Abbiamo impostato </a:t>
+            </a:r>
+            <a:r>
+              <a:rPr lang="it-IT" dirty="0" err="1"/>
+              <a:t>replicas</a:t>
+            </a:r>
+            <a:r>
+              <a:rPr lang="it-IT" dirty="0"/>
+              <a:t>: 1 per il database, mentre per il </a:t>
+            </a:r>
+            <a:r>
+              <a:rPr lang="it-IT" dirty="0" err="1"/>
+              <a:t>backend</a:t>
+            </a:r>
+            <a:r>
+              <a:rPr lang="it-IT" dirty="0"/>
+              <a:t> avevamo messo 3 repliche. </a:t>
+            </a:r>
+            <a:endParaRPr lang="it-IT" i="1" dirty="0"/>
+          </a:p>
+          <a:p>
+            <a:r>
+              <a:rPr lang="it-IT" i="1" dirty="0">
+                <a:solidFill>
+                  <a:srgbClr val="171FE2"/>
+                </a:solidFill>
+              </a:rPr>
+              <a:t>I database relazionali tradizionali come </a:t>
+            </a:r>
+            <a:r>
+              <a:rPr lang="it-IT" i="1" dirty="0" err="1">
+                <a:solidFill>
+                  <a:srgbClr val="171FE2"/>
+                </a:solidFill>
+              </a:rPr>
+              <a:t>MariaDB</a:t>
+            </a:r>
+            <a:r>
+              <a:rPr lang="it-IT" i="1" dirty="0">
+                <a:solidFill>
+                  <a:srgbClr val="171FE2"/>
+                </a:solidFill>
+              </a:rPr>
+              <a:t> o MySQL non possono essere duplicati a cuor leggero, perché creerebbero conflitti di scrittura sui file del disco. </a:t>
+            </a:r>
+          </a:p>
+          <a:p>
+            <a:r>
+              <a:rPr lang="it-IT" i="1" dirty="0"/>
+              <a:t>In un'architettura standard </a:t>
+            </a:r>
+            <a:r>
+              <a:rPr lang="it-IT" i="1" dirty="0" err="1"/>
+              <a:t>enterprise</a:t>
+            </a:r>
+            <a:r>
+              <a:rPr lang="it-IT" i="1" dirty="0"/>
+              <a:t>, il database gira in copia singola altamente protetta dal Self-</a:t>
+            </a:r>
+            <a:r>
+              <a:rPr lang="it-IT" i="1" dirty="0" err="1"/>
+              <a:t>Healing</a:t>
+            </a:r>
+            <a:r>
+              <a:rPr lang="it-IT" i="1" dirty="0"/>
+              <a:t>, mentre a scalare all'infinito sono i </a:t>
+            </a:r>
+            <a:r>
+              <a:rPr lang="it-IT" i="1" dirty="0" err="1"/>
+              <a:t>Pod</a:t>
+            </a:r>
+            <a:r>
+              <a:rPr lang="it-IT" i="1" dirty="0"/>
+              <a:t> del </a:t>
+            </a:r>
+            <a:r>
+              <a:rPr lang="it-IT" i="1" dirty="0" err="1"/>
+              <a:t>backend</a:t>
+            </a:r>
+            <a:r>
+              <a:rPr lang="it-IT" i="1" dirty="0"/>
+              <a:t> e del </a:t>
+            </a:r>
+            <a:r>
+              <a:rPr lang="it-IT" i="1" dirty="0" err="1"/>
+              <a:t>frontend</a:t>
+            </a:r>
+            <a:r>
+              <a:rPr lang="it-IT" i="1" dirty="0"/>
+              <a:t> che sono </a:t>
+            </a:r>
+            <a:r>
+              <a:rPr lang="it-IT" i="1" dirty="0" err="1"/>
+              <a:t>stateless</a:t>
+            </a:r>
+            <a:r>
+              <a:rPr lang="it-IT" i="1" dirty="0"/>
+              <a:t>"</a:t>
+            </a:r>
+            <a:r>
+              <a:rPr lang="it-IT" dirty="0"/>
+              <a:t>.</a:t>
+            </a:r>
+          </a:p>
+        </p:txBody>
+      </p:sp>
+    </p:spTree>
+    <p:extLst>
+      <p:ext uri="{BB962C8B-B14F-4D97-AF65-F5344CB8AC3E}">
+        <p14:creationId xmlns:p14="http://schemas.microsoft.com/office/powerpoint/2010/main" val="885728157"/>
+      </p:ext>
+    </p:extLst>
+  </p:cSld>
+  <p:clrMapOvr>
+    <a:masterClrMapping/>
+  </p:clrMapOvr>
+</p:sld>
+</file>
+
+<file path=ppt/slides/slide45.xml><?xml version="1.0" encoding="utf-8"?>
+<p:sld xmlns:a="http://schemas.openxmlformats.org/drawingml/2006/main" xmlns:r="http://schemas.openxmlformats.org/officeDocument/2006/relationships" xmlns:p="http://schemas.openxmlformats.org/presentationml/2006/main">
+  <p:cSld>
+    <p:spTree>
+      <p:nvGrpSpPr>
+        <p:cNvPr id="1" name="">
+          <a:extLst>
+            <a:ext uri="{FF2B5EF4-FFF2-40B4-BE49-F238E27FC236}">
+              <a16:creationId xmlns:a16="http://schemas.microsoft.com/office/drawing/2014/main" id="{772C5D50-B860-77E8-CB89-AC48FFCA6862}"/>
+            </a:ext>
+          </a:extLst>
+        </p:cNvPr>
+        <p:cNvGrpSpPr/>
+        <p:nvPr/>
+      </p:nvGrpSpPr>
+      <p:grpSpPr>
+        <a:xfrm>
+          <a:off x="0" y="0"/>
+          <a:ext cx="0" cy="0"/>
+          <a:chOff x="0" y="0"/>
+          <a:chExt cx="0" cy="0"/>
+        </a:xfrm>
+      </p:grpSpPr>
+      <p:sp>
+        <p:nvSpPr>
+          <p:cNvPr id="2" name="Titolo della lezione">
+            <a:extLst>
+              <a:ext uri="{FF2B5EF4-FFF2-40B4-BE49-F238E27FC236}">
+                <a16:creationId xmlns:a16="http://schemas.microsoft.com/office/drawing/2014/main" id="{EAFA05CE-00A2-33F6-A740-1EE38CAE22D2}"/>
+              </a:ext>
+            </a:extLst>
+          </p:cNvPr>
+          <p:cNvSpPr>
+            <a:spLocks noGrp="1"/>
+          </p:cNvSpPr>
+          <p:nvPr>
+            <p:ph type="title"/>
+          </p:nvPr>
+        </p:nvSpPr>
+        <p:spPr>
+          <a:xfrm>
+            <a:off x="838200" y="831206"/>
+            <a:ext cx="10515600" cy="314198"/>
+          </a:xfrm>
+        </p:spPr>
+        <p:txBody>
+          <a:bodyPr/>
+          <a:lstStyle/>
+          <a:p>
+            <a:r>
+              <a:rPr lang="it-IT" dirty="0"/>
+              <a:t>SLIDE 43: LAB PRACTICAL – </a:t>
+            </a:r>
+            <a:br>
+              <a:rPr lang="it-IT" dirty="0"/>
+            </a:br>
+            <a:r>
+              <a:rPr lang="it-IT" dirty="0"/>
+              <a:t>COMPILARE IL MANIFESTO </a:t>
+            </a:r>
+            <a:br>
+              <a:rPr lang="it-IT" dirty="0"/>
+            </a:br>
+            <a:r>
+              <a:rPr lang="it-IT" dirty="0"/>
+              <a:t>FINALE DEL DATABASE STATEFUL</a:t>
+            </a:r>
+            <a:br>
+              <a:rPr lang="it-IT" dirty="0"/>
+            </a:br>
+            <a:br>
+              <a:rPr lang="it-IT" dirty="0"/>
+            </a:br>
+            <a:endParaRPr lang="it-IT" dirty="0"/>
+          </a:p>
+        </p:txBody>
+      </p:sp>
+      <p:sp>
+        <p:nvSpPr>
+          <p:cNvPr id="3" name="Contenuto della lezione">
+            <a:extLst>
+              <a:ext uri="{FF2B5EF4-FFF2-40B4-BE49-F238E27FC236}">
+                <a16:creationId xmlns:a16="http://schemas.microsoft.com/office/drawing/2014/main" id="{406D737F-AD7C-CD39-955C-8E5ADF723BFB}"/>
+              </a:ext>
+            </a:extLst>
+          </p:cNvPr>
+          <p:cNvSpPr>
+            <a:spLocks noGrp="1"/>
+          </p:cNvSpPr>
+          <p:nvPr>
+            <p:ph idx="1"/>
+          </p:nvPr>
+        </p:nvSpPr>
+        <p:spPr>
+          <a:xfrm>
+            <a:off x="838200" y="1932085"/>
+            <a:ext cx="5391150" cy="5460839"/>
+          </a:xfrm>
+        </p:spPr>
+        <p:txBody>
+          <a:bodyPr/>
+          <a:lstStyle/>
+          <a:p>
+            <a:r>
+              <a:rPr lang="it-IT" dirty="0"/>
+              <a:t>Analizziamo i punti chiave: </a:t>
+            </a:r>
+          </a:p>
+          <a:p>
+            <a:r>
+              <a:rPr lang="it-IT" dirty="0"/>
+              <a:t>nella sezione </a:t>
+            </a:r>
+            <a:r>
+              <a:rPr lang="it-IT" b="1" dirty="0" err="1"/>
+              <a:t>env</a:t>
+            </a:r>
+            <a:r>
+              <a:rPr lang="it-IT" dirty="0"/>
+              <a:t> diciamo a </a:t>
+            </a:r>
+            <a:r>
+              <a:rPr lang="it-IT" dirty="0" err="1"/>
+              <a:t>MariaDB</a:t>
+            </a:r>
+            <a:r>
+              <a:rPr lang="it-IT" dirty="0"/>
+              <a:t> che la sua variabile d'obbligo MARIADB_ROOT_PASSWORD deve pescare il valore (</a:t>
+            </a:r>
+            <a:r>
+              <a:rPr lang="it-IT" dirty="0" err="1"/>
+              <a:t>valueFrom</a:t>
+            </a:r>
+            <a:r>
+              <a:rPr lang="it-IT" dirty="0"/>
+              <a:t>) dentro la cassaforte database-segreto alla chiave password-root.</a:t>
+            </a:r>
+          </a:p>
+          <a:p>
+            <a:r>
+              <a:rPr lang="it-IT" dirty="0"/>
+              <a:t>Con </a:t>
+            </a:r>
+            <a:r>
+              <a:rPr lang="it-IT" b="1" dirty="0" err="1"/>
+              <a:t>volumes</a:t>
+            </a:r>
+            <a:r>
+              <a:rPr lang="it-IT" dirty="0"/>
+              <a:t> andiamo a bussare al cluster per dire di prendere la prenotazione </a:t>
+            </a:r>
+            <a:r>
+              <a:rPr lang="it-IT" dirty="0" err="1"/>
+              <a:t>mariadb</a:t>
+            </a:r>
+            <a:r>
+              <a:rPr lang="it-IT" dirty="0"/>
+              <a:t>-storage-</a:t>
+            </a:r>
+            <a:r>
+              <a:rPr lang="it-IT" dirty="0" err="1"/>
+              <a:t>claim</a:t>
+            </a:r>
+            <a:r>
+              <a:rPr lang="it-IT" dirty="0"/>
+              <a:t> e di assegnarle lo spazio con i GB richiesti. </a:t>
+            </a:r>
+          </a:p>
+          <a:p>
+            <a:r>
+              <a:rPr lang="it-IT" dirty="0"/>
+              <a:t>Infine, tramite </a:t>
+            </a:r>
+            <a:r>
+              <a:rPr lang="it-IT" b="1" dirty="0" err="1"/>
+              <a:t>volumeMounts</a:t>
+            </a:r>
+            <a:r>
+              <a:rPr lang="it-IT" dirty="0"/>
+              <a:t>, prendiamo quel volume e lo "innestiamo" nella cartella interna del container /var/</a:t>
+            </a:r>
+            <a:r>
+              <a:rPr lang="it-IT" dirty="0" err="1"/>
+              <a:t>lib</a:t>
+            </a:r>
+            <a:r>
+              <a:rPr lang="it-IT" dirty="0"/>
+              <a:t>/</a:t>
+            </a:r>
+            <a:r>
+              <a:rPr lang="it-IT" dirty="0" err="1"/>
+              <a:t>mysql</a:t>
+            </a:r>
+            <a:r>
+              <a:rPr lang="it-IT" dirty="0"/>
+              <a:t>, che è il percorso ufficiale in cui </a:t>
+            </a:r>
+            <a:r>
+              <a:rPr lang="it-IT" dirty="0" err="1"/>
+              <a:t>MariaDB</a:t>
+            </a:r>
+            <a:r>
+              <a:rPr lang="it-IT" dirty="0"/>
+              <a:t> scrive i suoi file fisici. </a:t>
+            </a:r>
+          </a:p>
+          <a:p>
+            <a:r>
+              <a:rPr lang="it-IT" dirty="0"/>
+              <a:t>Eseguiamo:</a:t>
+            </a:r>
+          </a:p>
+          <a:p>
+            <a:r>
+              <a:rPr lang="en-US" sz="1300" dirty="0" err="1">
+                <a:solidFill>
+                  <a:srgbClr val="171FE2"/>
+                </a:solidFill>
+                <a:latin typeface="Consolas" panose="020B0609020204030204" pitchFamily="49" charset="0"/>
+              </a:rPr>
+              <a:t>kubectl</a:t>
+            </a:r>
+            <a:r>
+              <a:rPr lang="en-US" sz="1300" dirty="0">
+                <a:solidFill>
+                  <a:srgbClr val="171FE2"/>
+                </a:solidFill>
+                <a:latin typeface="Consolas" panose="020B0609020204030204" pitchFamily="49" charset="0"/>
+              </a:rPr>
+              <a:t> apply -f deployment-</a:t>
+            </a:r>
+            <a:r>
+              <a:rPr lang="en-US" sz="1300" dirty="0" err="1">
+                <a:solidFill>
+                  <a:srgbClr val="171FE2"/>
+                </a:solidFill>
+                <a:latin typeface="Consolas" panose="020B0609020204030204" pitchFamily="49" charset="0"/>
+              </a:rPr>
+              <a:t>database.yaml</a:t>
+            </a:r>
+            <a:endParaRPr lang="it-IT" sz="1300" dirty="0">
+              <a:solidFill>
+                <a:srgbClr val="171FE2"/>
+              </a:solidFill>
+              <a:latin typeface="Consolas" panose="020B0609020204030204" pitchFamily="49" charset="0"/>
+            </a:endParaRPr>
+          </a:p>
+        </p:txBody>
+      </p:sp>
+      <p:sp>
+        <p:nvSpPr>
+          <p:cNvPr id="4" name="CasellaDiTesto 3">
+            <a:extLst>
+              <a:ext uri="{FF2B5EF4-FFF2-40B4-BE49-F238E27FC236}">
+                <a16:creationId xmlns:a16="http://schemas.microsoft.com/office/drawing/2014/main" id="{E78746CB-4529-877B-8DBC-7E8DAE3CBBEC}"/>
+              </a:ext>
+            </a:extLst>
+          </p:cNvPr>
+          <p:cNvSpPr txBox="1"/>
+          <p:nvPr/>
+        </p:nvSpPr>
+        <p:spPr>
+          <a:xfrm>
+            <a:off x="6184900" y="311150"/>
+            <a:ext cx="4022255" cy="6494085"/>
+          </a:xfrm>
+          <a:prstGeom prst="rect">
+            <a:avLst/>
+          </a:prstGeom>
+          <a:noFill/>
+        </p:spPr>
+        <p:txBody>
+          <a:bodyPr wrap="none" rtlCol="0">
+            <a:spAutoFit/>
+          </a:bodyPr>
+          <a:lstStyle/>
+          <a:p>
+            <a:r>
+              <a:rPr lang="it-IT" sz="1300" dirty="0" err="1">
+                <a:solidFill>
+                  <a:srgbClr val="171FE2"/>
+                </a:solidFill>
+                <a:latin typeface="Consolas" panose="020B0609020204030204" pitchFamily="49" charset="0"/>
+              </a:rPr>
+              <a:t>apiVersion</a:t>
+            </a:r>
+            <a:r>
+              <a:rPr lang="it-IT" sz="1300" dirty="0">
+                <a:solidFill>
+                  <a:srgbClr val="171FE2"/>
+                </a:solidFill>
+                <a:latin typeface="Consolas" panose="020B0609020204030204" pitchFamily="49" charset="0"/>
+              </a:rPr>
+              <a:t>: apps/v1</a:t>
+            </a:r>
+          </a:p>
+          <a:p>
+            <a:r>
+              <a:rPr lang="it-IT" sz="1300" dirty="0" err="1">
+                <a:solidFill>
+                  <a:srgbClr val="171FE2"/>
+                </a:solidFill>
+                <a:latin typeface="Consolas" panose="020B0609020204030204" pitchFamily="49" charset="0"/>
+              </a:rPr>
+              <a:t>kind</a:t>
+            </a:r>
+            <a:r>
+              <a:rPr lang="it-IT" sz="1300" dirty="0">
+                <a:solidFill>
+                  <a:srgbClr val="171FE2"/>
+                </a:solidFill>
+                <a:latin typeface="Consolas" panose="020B0609020204030204" pitchFamily="49" charset="0"/>
+              </a:rPr>
+              <a:t>: Deployment</a:t>
+            </a:r>
+          </a:p>
+          <a:p>
+            <a:r>
+              <a:rPr lang="it-IT" sz="1300" dirty="0">
+                <a:solidFill>
+                  <a:srgbClr val="171FE2"/>
+                </a:solidFill>
+                <a:latin typeface="Consolas" panose="020B0609020204030204" pitchFamily="49" charset="0"/>
+              </a:rPr>
+              <a:t>metadata:</a:t>
+            </a:r>
+          </a:p>
+          <a:p>
+            <a:r>
+              <a:rPr lang="it-IT" sz="1300" dirty="0">
+                <a:solidFill>
+                  <a:srgbClr val="171FE2"/>
+                </a:solidFill>
+                <a:latin typeface="Consolas" panose="020B0609020204030204" pitchFamily="49" charset="0"/>
+              </a:rPr>
+              <a:t>  name: </a:t>
+            </a:r>
+            <a:r>
+              <a:rPr lang="it-IT" sz="1300" dirty="0" err="1">
+                <a:solidFill>
+                  <a:srgbClr val="171FE2"/>
+                </a:solidFill>
+                <a:latin typeface="Consolas" panose="020B0609020204030204" pitchFamily="49" charset="0"/>
+              </a:rPr>
+              <a:t>mariadb</a:t>
+            </a:r>
+            <a:r>
+              <a:rPr lang="it-IT" sz="1300" dirty="0">
+                <a:solidFill>
+                  <a:srgbClr val="171FE2"/>
+                </a:solidFill>
+                <a:latin typeface="Consolas" panose="020B0609020204030204" pitchFamily="49" charset="0"/>
+              </a:rPr>
+              <a:t>-deployment</a:t>
+            </a:r>
+          </a:p>
+          <a:p>
+            <a:r>
+              <a:rPr lang="it-IT" sz="1300" dirty="0" err="1">
+                <a:solidFill>
+                  <a:srgbClr val="171FE2"/>
+                </a:solidFill>
+                <a:latin typeface="Consolas" panose="020B0609020204030204" pitchFamily="49" charset="0"/>
+              </a:rPr>
+              <a:t>spec</a:t>
+            </a:r>
+            <a:r>
+              <a:rPr lang="it-IT" sz="1300" dirty="0">
+                <a:solidFill>
+                  <a:srgbClr val="171FE2"/>
+                </a:solidFill>
+                <a:latin typeface="Consolas" panose="020B0609020204030204" pitchFamily="49" charset="0"/>
+              </a:rPr>
+              <a:t>:</a:t>
+            </a:r>
+          </a:p>
+          <a:p>
+            <a:r>
+              <a:rPr lang="it-IT" sz="1300" dirty="0">
+                <a:solidFill>
+                  <a:srgbClr val="171FE2"/>
+                </a:solidFill>
+                <a:latin typeface="Consolas" panose="020B0609020204030204" pitchFamily="49" charset="0"/>
+              </a:rPr>
+              <a:t>  </a:t>
+            </a:r>
+            <a:r>
+              <a:rPr lang="it-IT" sz="1300" dirty="0" err="1">
+                <a:solidFill>
+                  <a:srgbClr val="171FE2"/>
+                </a:solidFill>
+                <a:latin typeface="Consolas" panose="020B0609020204030204" pitchFamily="49" charset="0"/>
+              </a:rPr>
+              <a:t>replicas</a:t>
+            </a:r>
+            <a:r>
+              <a:rPr lang="it-IT" sz="1300" dirty="0">
+                <a:solidFill>
+                  <a:srgbClr val="171FE2"/>
+                </a:solidFill>
+                <a:latin typeface="Consolas" panose="020B0609020204030204" pitchFamily="49" charset="0"/>
+              </a:rPr>
+              <a:t>: 1</a:t>
+            </a:r>
+          </a:p>
+          <a:p>
+            <a:r>
+              <a:rPr lang="it-IT" sz="1300" dirty="0">
+                <a:solidFill>
+                  <a:srgbClr val="171FE2"/>
+                </a:solidFill>
+                <a:latin typeface="Consolas" panose="020B0609020204030204" pitchFamily="49" charset="0"/>
+              </a:rPr>
+              <a:t>  selector:</a:t>
+            </a:r>
+          </a:p>
+          <a:p>
+            <a:r>
+              <a:rPr lang="it-IT" sz="1300" dirty="0">
+                <a:solidFill>
+                  <a:srgbClr val="171FE2"/>
+                </a:solidFill>
+                <a:latin typeface="Consolas" panose="020B0609020204030204" pitchFamily="49" charset="0"/>
+              </a:rPr>
+              <a:t>    </a:t>
+            </a:r>
+            <a:r>
+              <a:rPr lang="it-IT" sz="1300" dirty="0" err="1">
+                <a:solidFill>
+                  <a:srgbClr val="171FE2"/>
+                </a:solidFill>
+                <a:latin typeface="Consolas" panose="020B0609020204030204" pitchFamily="49" charset="0"/>
+              </a:rPr>
+              <a:t>matchLabels</a:t>
+            </a:r>
+            <a:r>
+              <a:rPr lang="it-IT" sz="1300" dirty="0">
+                <a:solidFill>
+                  <a:srgbClr val="171FE2"/>
+                </a:solidFill>
+                <a:latin typeface="Consolas" panose="020B0609020204030204" pitchFamily="49" charset="0"/>
+              </a:rPr>
+              <a:t>:</a:t>
+            </a:r>
+          </a:p>
+          <a:p>
+            <a:r>
+              <a:rPr lang="it-IT" sz="1300" dirty="0">
+                <a:solidFill>
+                  <a:srgbClr val="171FE2"/>
+                </a:solidFill>
+                <a:latin typeface="Consolas" panose="020B0609020204030204" pitchFamily="49" charset="0"/>
+              </a:rPr>
+              <a:t>      app: database-</a:t>
+            </a:r>
+            <a:r>
+              <a:rPr lang="it-IT" sz="1300" dirty="0" err="1">
+                <a:solidFill>
+                  <a:srgbClr val="171FE2"/>
+                </a:solidFill>
+                <a:latin typeface="Consolas" panose="020B0609020204030204" pitchFamily="49" charset="0"/>
+              </a:rPr>
+              <a:t>enterprise</a:t>
+            </a:r>
+            <a:endParaRPr lang="it-IT" sz="1300" dirty="0">
+              <a:solidFill>
+                <a:srgbClr val="171FE2"/>
+              </a:solidFill>
+              <a:latin typeface="Consolas" panose="020B0609020204030204" pitchFamily="49" charset="0"/>
+            </a:endParaRPr>
+          </a:p>
+          <a:p>
+            <a:r>
+              <a:rPr lang="it-IT" sz="1300" dirty="0">
+                <a:solidFill>
+                  <a:srgbClr val="171FE2"/>
+                </a:solidFill>
+                <a:latin typeface="Consolas" panose="020B0609020204030204" pitchFamily="49" charset="0"/>
+              </a:rPr>
+              <a:t>  template:</a:t>
+            </a:r>
+          </a:p>
+          <a:p>
+            <a:r>
+              <a:rPr lang="it-IT" sz="1300" dirty="0">
+                <a:solidFill>
+                  <a:srgbClr val="171FE2"/>
+                </a:solidFill>
+                <a:latin typeface="Consolas" panose="020B0609020204030204" pitchFamily="49" charset="0"/>
+              </a:rPr>
+              <a:t>    metadata:</a:t>
+            </a:r>
+          </a:p>
+          <a:p>
+            <a:r>
+              <a:rPr lang="it-IT" sz="1300" dirty="0">
+                <a:solidFill>
+                  <a:srgbClr val="171FE2"/>
+                </a:solidFill>
+                <a:latin typeface="Consolas" panose="020B0609020204030204" pitchFamily="49" charset="0"/>
+              </a:rPr>
+              <a:t>      labels:</a:t>
+            </a:r>
+          </a:p>
+          <a:p>
+            <a:r>
+              <a:rPr lang="it-IT" sz="1300" dirty="0">
+                <a:solidFill>
+                  <a:srgbClr val="171FE2"/>
+                </a:solidFill>
+                <a:latin typeface="Consolas" panose="020B0609020204030204" pitchFamily="49" charset="0"/>
+              </a:rPr>
+              <a:t>        app: database-</a:t>
+            </a:r>
+            <a:r>
+              <a:rPr lang="it-IT" sz="1300" dirty="0" err="1">
+                <a:solidFill>
+                  <a:srgbClr val="171FE2"/>
+                </a:solidFill>
+                <a:latin typeface="Consolas" panose="020B0609020204030204" pitchFamily="49" charset="0"/>
+              </a:rPr>
+              <a:t>enterprise</a:t>
+            </a:r>
+            <a:endParaRPr lang="it-IT" sz="1300" dirty="0">
+              <a:solidFill>
+                <a:srgbClr val="171FE2"/>
+              </a:solidFill>
+              <a:latin typeface="Consolas" panose="020B0609020204030204" pitchFamily="49" charset="0"/>
+            </a:endParaRPr>
+          </a:p>
+          <a:p>
+            <a:r>
+              <a:rPr lang="it-IT" sz="1300" dirty="0">
+                <a:solidFill>
+                  <a:srgbClr val="171FE2"/>
+                </a:solidFill>
+                <a:latin typeface="Consolas" panose="020B0609020204030204" pitchFamily="49" charset="0"/>
+              </a:rPr>
+              <a:t>    </a:t>
+            </a:r>
+            <a:r>
+              <a:rPr lang="it-IT" sz="1300" dirty="0" err="1">
+                <a:solidFill>
+                  <a:srgbClr val="171FE2"/>
+                </a:solidFill>
+                <a:latin typeface="Consolas" panose="020B0609020204030204" pitchFamily="49" charset="0"/>
+              </a:rPr>
+              <a:t>spec</a:t>
+            </a:r>
+            <a:r>
+              <a:rPr lang="it-IT" sz="1300" dirty="0">
+                <a:solidFill>
+                  <a:srgbClr val="171FE2"/>
+                </a:solidFill>
+                <a:latin typeface="Consolas" panose="020B0609020204030204" pitchFamily="49" charset="0"/>
+              </a:rPr>
+              <a:t>:</a:t>
+            </a:r>
+          </a:p>
+          <a:p>
+            <a:r>
+              <a:rPr lang="it-IT" sz="1300" dirty="0">
+                <a:solidFill>
+                  <a:srgbClr val="171FE2"/>
+                </a:solidFill>
+                <a:latin typeface="Consolas" panose="020B0609020204030204" pitchFamily="49" charset="0"/>
+              </a:rPr>
+              <a:t>      containers:</a:t>
+            </a:r>
+          </a:p>
+          <a:p>
+            <a:r>
+              <a:rPr lang="it-IT" sz="1300" dirty="0">
+                <a:solidFill>
+                  <a:srgbClr val="171FE2"/>
+                </a:solidFill>
+                <a:latin typeface="Consolas" panose="020B0609020204030204" pitchFamily="49" charset="0"/>
+              </a:rPr>
+              <a:t>      - name: </a:t>
+            </a:r>
+            <a:r>
+              <a:rPr lang="it-IT" sz="1300" dirty="0" err="1">
+                <a:solidFill>
+                  <a:srgbClr val="171FE2"/>
+                </a:solidFill>
+                <a:latin typeface="Consolas" panose="020B0609020204030204" pitchFamily="49" charset="0"/>
+              </a:rPr>
+              <a:t>mariadb</a:t>
+            </a:r>
+            <a:r>
+              <a:rPr lang="it-IT" sz="1300" dirty="0">
+                <a:solidFill>
+                  <a:srgbClr val="171FE2"/>
+                </a:solidFill>
+                <a:latin typeface="Consolas" panose="020B0609020204030204" pitchFamily="49" charset="0"/>
+              </a:rPr>
+              <a:t>-container</a:t>
+            </a:r>
+          </a:p>
+          <a:p>
+            <a:r>
+              <a:rPr lang="it-IT" sz="1300" dirty="0">
+                <a:solidFill>
+                  <a:srgbClr val="171FE2"/>
+                </a:solidFill>
+                <a:latin typeface="Consolas" panose="020B0609020204030204" pitchFamily="49" charset="0"/>
+              </a:rPr>
+              <a:t>        image: mariadb:10.6</a:t>
+            </a:r>
+          </a:p>
+          <a:p>
+            <a:r>
+              <a:rPr lang="it-IT" sz="1300" dirty="0">
+                <a:solidFill>
+                  <a:srgbClr val="171FE2"/>
+                </a:solidFill>
+                <a:latin typeface="Consolas" panose="020B0609020204030204" pitchFamily="49" charset="0"/>
+              </a:rPr>
+              <a:t>        ports:</a:t>
+            </a:r>
+          </a:p>
+          <a:p>
+            <a:r>
+              <a:rPr lang="it-IT" sz="1300" dirty="0">
+                <a:solidFill>
+                  <a:srgbClr val="171FE2"/>
+                </a:solidFill>
+                <a:latin typeface="Consolas" panose="020B0609020204030204" pitchFamily="49" charset="0"/>
+              </a:rPr>
+              <a:t>        - </a:t>
+            </a:r>
+            <a:r>
+              <a:rPr lang="it-IT" sz="1300" dirty="0" err="1">
+                <a:solidFill>
+                  <a:srgbClr val="171FE2"/>
+                </a:solidFill>
+                <a:latin typeface="Consolas" panose="020B0609020204030204" pitchFamily="49" charset="0"/>
+              </a:rPr>
+              <a:t>containerPort</a:t>
+            </a:r>
+            <a:r>
+              <a:rPr lang="it-IT" sz="1300" dirty="0">
+                <a:solidFill>
+                  <a:srgbClr val="171FE2"/>
+                </a:solidFill>
+                <a:latin typeface="Consolas" panose="020B0609020204030204" pitchFamily="49" charset="0"/>
+              </a:rPr>
+              <a:t>: 3306</a:t>
+            </a:r>
+          </a:p>
+          <a:p>
+            <a:r>
+              <a:rPr lang="it-IT" sz="1300" dirty="0">
+                <a:solidFill>
+                  <a:srgbClr val="171FE2"/>
+                </a:solidFill>
+                <a:latin typeface="Consolas" panose="020B0609020204030204" pitchFamily="49" charset="0"/>
+              </a:rPr>
+              <a:t>        </a:t>
+            </a:r>
+            <a:r>
+              <a:rPr lang="it-IT" sz="1300" dirty="0" err="1">
+                <a:solidFill>
+                  <a:srgbClr val="171FE2"/>
+                </a:solidFill>
+                <a:latin typeface="Consolas" panose="020B0609020204030204" pitchFamily="49" charset="0"/>
+              </a:rPr>
+              <a:t>env</a:t>
+            </a:r>
+            <a:r>
+              <a:rPr lang="it-IT" sz="1300" dirty="0">
+                <a:solidFill>
+                  <a:srgbClr val="171FE2"/>
+                </a:solidFill>
+                <a:latin typeface="Consolas" panose="020B0609020204030204" pitchFamily="49" charset="0"/>
+              </a:rPr>
+              <a:t>:</a:t>
+            </a:r>
+          </a:p>
+          <a:p>
+            <a:r>
+              <a:rPr lang="it-IT" sz="1300" dirty="0">
+                <a:solidFill>
+                  <a:srgbClr val="171FE2"/>
+                </a:solidFill>
+                <a:latin typeface="Consolas" panose="020B0609020204030204" pitchFamily="49" charset="0"/>
+              </a:rPr>
+              <a:t>        - name: MARIADB_ROOT_PASSWORD</a:t>
+            </a:r>
+          </a:p>
+          <a:p>
+            <a:r>
+              <a:rPr lang="it-IT" sz="1300" dirty="0">
+                <a:solidFill>
+                  <a:srgbClr val="171FE2"/>
+                </a:solidFill>
+                <a:latin typeface="Consolas" panose="020B0609020204030204" pitchFamily="49" charset="0"/>
+              </a:rPr>
+              <a:t>          </a:t>
+            </a:r>
+            <a:r>
+              <a:rPr lang="it-IT" sz="1300" dirty="0" err="1">
+                <a:solidFill>
+                  <a:srgbClr val="171FE2"/>
+                </a:solidFill>
+                <a:latin typeface="Consolas" panose="020B0609020204030204" pitchFamily="49" charset="0"/>
+              </a:rPr>
+              <a:t>valueFrom</a:t>
+            </a:r>
+            <a:r>
+              <a:rPr lang="it-IT" sz="1300" dirty="0">
+                <a:solidFill>
+                  <a:srgbClr val="171FE2"/>
+                </a:solidFill>
+                <a:latin typeface="Consolas" panose="020B0609020204030204" pitchFamily="49" charset="0"/>
+              </a:rPr>
+              <a:t>:</a:t>
+            </a:r>
+          </a:p>
+          <a:p>
+            <a:r>
+              <a:rPr lang="it-IT" sz="1300" dirty="0">
+                <a:solidFill>
+                  <a:srgbClr val="171FE2"/>
+                </a:solidFill>
+                <a:latin typeface="Consolas" panose="020B0609020204030204" pitchFamily="49" charset="0"/>
+              </a:rPr>
+              <a:t>            </a:t>
+            </a:r>
+            <a:r>
+              <a:rPr lang="it-IT" sz="1300" dirty="0" err="1">
+                <a:solidFill>
+                  <a:srgbClr val="171FE2"/>
+                </a:solidFill>
+                <a:latin typeface="Consolas" panose="020B0609020204030204" pitchFamily="49" charset="0"/>
+              </a:rPr>
+              <a:t>secretKeyRef</a:t>
+            </a:r>
+            <a:r>
+              <a:rPr lang="it-IT" sz="1300" dirty="0">
+                <a:solidFill>
+                  <a:srgbClr val="171FE2"/>
+                </a:solidFill>
+                <a:latin typeface="Consolas" panose="020B0609020204030204" pitchFamily="49" charset="0"/>
+              </a:rPr>
+              <a:t>:</a:t>
+            </a:r>
+          </a:p>
+          <a:p>
+            <a:r>
+              <a:rPr lang="it-IT" sz="1300" dirty="0">
+                <a:solidFill>
+                  <a:srgbClr val="171FE2"/>
+                </a:solidFill>
+                <a:latin typeface="Consolas" panose="020B0609020204030204" pitchFamily="49" charset="0"/>
+              </a:rPr>
+              <a:t>              name: database-segreto</a:t>
+            </a:r>
+          </a:p>
+          <a:p>
+            <a:r>
+              <a:rPr lang="it-IT" sz="1300" dirty="0">
+                <a:solidFill>
+                  <a:srgbClr val="171FE2"/>
+                </a:solidFill>
+                <a:latin typeface="Consolas" panose="020B0609020204030204" pitchFamily="49" charset="0"/>
+              </a:rPr>
+              <a:t>              key: password-root</a:t>
+            </a:r>
+          </a:p>
+          <a:p>
+            <a:r>
+              <a:rPr lang="it-IT" sz="1300" dirty="0">
+                <a:solidFill>
+                  <a:srgbClr val="171FE2"/>
+                </a:solidFill>
+                <a:latin typeface="Consolas" panose="020B0609020204030204" pitchFamily="49" charset="0"/>
+              </a:rPr>
+              <a:t>        </a:t>
+            </a:r>
+            <a:r>
+              <a:rPr lang="it-IT" sz="1300" dirty="0" err="1">
+                <a:solidFill>
+                  <a:srgbClr val="171FE2"/>
+                </a:solidFill>
+                <a:latin typeface="Consolas" panose="020B0609020204030204" pitchFamily="49" charset="0"/>
+              </a:rPr>
+              <a:t>volumeMounts</a:t>
+            </a:r>
+            <a:r>
+              <a:rPr lang="it-IT" sz="1300" dirty="0">
+                <a:solidFill>
+                  <a:srgbClr val="171FE2"/>
+                </a:solidFill>
+                <a:latin typeface="Consolas" panose="020B0609020204030204" pitchFamily="49" charset="0"/>
+              </a:rPr>
+              <a:t>:</a:t>
+            </a:r>
+          </a:p>
+          <a:p>
+            <a:r>
+              <a:rPr lang="it-IT" sz="1300" dirty="0">
+                <a:solidFill>
+                  <a:srgbClr val="171FE2"/>
+                </a:solidFill>
+                <a:latin typeface="Consolas" panose="020B0609020204030204" pitchFamily="49" charset="0"/>
+              </a:rPr>
+              <a:t>        - name: </a:t>
+            </a:r>
+            <a:r>
+              <a:rPr lang="it-IT" sz="1300" dirty="0" err="1">
+                <a:solidFill>
+                  <a:srgbClr val="171FE2"/>
+                </a:solidFill>
+                <a:latin typeface="Consolas" panose="020B0609020204030204" pitchFamily="49" charset="0"/>
+              </a:rPr>
+              <a:t>mariadb</a:t>
+            </a:r>
+            <a:r>
+              <a:rPr lang="it-IT" sz="1300" dirty="0">
+                <a:solidFill>
+                  <a:srgbClr val="171FE2"/>
+                </a:solidFill>
+                <a:latin typeface="Consolas" panose="020B0609020204030204" pitchFamily="49" charset="0"/>
+              </a:rPr>
+              <a:t>-storage</a:t>
+            </a:r>
+          </a:p>
+          <a:p>
+            <a:r>
+              <a:rPr lang="it-IT" sz="1300" dirty="0">
+                <a:solidFill>
+                  <a:srgbClr val="171FE2"/>
+                </a:solidFill>
+                <a:latin typeface="Consolas" panose="020B0609020204030204" pitchFamily="49" charset="0"/>
+              </a:rPr>
+              <a:t>          </a:t>
+            </a:r>
+            <a:r>
+              <a:rPr lang="it-IT" sz="1300" dirty="0" err="1">
+                <a:solidFill>
+                  <a:srgbClr val="171FE2"/>
+                </a:solidFill>
+                <a:latin typeface="Consolas" panose="020B0609020204030204" pitchFamily="49" charset="0"/>
+              </a:rPr>
+              <a:t>mountPath</a:t>
+            </a:r>
+            <a:r>
+              <a:rPr lang="it-IT" sz="1300" dirty="0">
+                <a:solidFill>
+                  <a:srgbClr val="171FE2"/>
+                </a:solidFill>
+                <a:latin typeface="Consolas" panose="020B0609020204030204" pitchFamily="49" charset="0"/>
+              </a:rPr>
+              <a:t>: /var/</a:t>
+            </a:r>
+            <a:r>
+              <a:rPr lang="it-IT" sz="1300" dirty="0" err="1">
+                <a:solidFill>
+                  <a:srgbClr val="171FE2"/>
+                </a:solidFill>
+                <a:latin typeface="Consolas" panose="020B0609020204030204" pitchFamily="49" charset="0"/>
+              </a:rPr>
+              <a:t>lib</a:t>
+            </a:r>
+            <a:r>
+              <a:rPr lang="it-IT" sz="1300" dirty="0">
+                <a:solidFill>
+                  <a:srgbClr val="171FE2"/>
+                </a:solidFill>
+                <a:latin typeface="Consolas" panose="020B0609020204030204" pitchFamily="49" charset="0"/>
+              </a:rPr>
+              <a:t>/</a:t>
+            </a:r>
+            <a:r>
+              <a:rPr lang="it-IT" sz="1300" dirty="0" err="1">
+                <a:solidFill>
+                  <a:srgbClr val="171FE2"/>
+                </a:solidFill>
+                <a:latin typeface="Consolas" panose="020B0609020204030204" pitchFamily="49" charset="0"/>
+              </a:rPr>
+              <a:t>mysql</a:t>
+            </a:r>
+            <a:endParaRPr lang="it-IT" sz="1300" dirty="0">
+              <a:solidFill>
+                <a:srgbClr val="171FE2"/>
+              </a:solidFill>
+              <a:latin typeface="Consolas" panose="020B0609020204030204" pitchFamily="49" charset="0"/>
+            </a:endParaRPr>
+          </a:p>
+          <a:p>
+            <a:r>
+              <a:rPr lang="it-IT" sz="1300" dirty="0">
+                <a:solidFill>
+                  <a:srgbClr val="171FE2"/>
+                </a:solidFill>
+                <a:latin typeface="Consolas" panose="020B0609020204030204" pitchFamily="49" charset="0"/>
+              </a:rPr>
+              <a:t>      </a:t>
+            </a:r>
+            <a:r>
+              <a:rPr lang="it-IT" sz="1300" dirty="0" err="1">
+                <a:solidFill>
+                  <a:srgbClr val="171FE2"/>
+                </a:solidFill>
+                <a:latin typeface="Consolas" panose="020B0609020204030204" pitchFamily="49" charset="0"/>
+              </a:rPr>
+              <a:t>volumes</a:t>
+            </a:r>
+            <a:r>
+              <a:rPr lang="it-IT" sz="1300" dirty="0">
+                <a:solidFill>
+                  <a:srgbClr val="171FE2"/>
+                </a:solidFill>
+                <a:latin typeface="Consolas" panose="020B0609020204030204" pitchFamily="49" charset="0"/>
+              </a:rPr>
+              <a:t>:</a:t>
+            </a:r>
+          </a:p>
+          <a:p>
+            <a:r>
+              <a:rPr lang="it-IT" sz="1300" dirty="0">
+                <a:solidFill>
+                  <a:srgbClr val="171FE2"/>
+                </a:solidFill>
+                <a:latin typeface="Consolas" panose="020B0609020204030204" pitchFamily="49" charset="0"/>
+              </a:rPr>
+              <a:t>      - name: </a:t>
+            </a:r>
+            <a:r>
+              <a:rPr lang="it-IT" sz="1300" dirty="0" err="1">
+                <a:solidFill>
+                  <a:srgbClr val="171FE2"/>
+                </a:solidFill>
+                <a:latin typeface="Consolas" panose="020B0609020204030204" pitchFamily="49" charset="0"/>
+              </a:rPr>
+              <a:t>mariadb</a:t>
+            </a:r>
+            <a:r>
+              <a:rPr lang="it-IT" sz="1300" dirty="0">
+                <a:solidFill>
+                  <a:srgbClr val="171FE2"/>
+                </a:solidFill>
+                <a:latin typeface="Consolas" panose="020B0609020204030204" pitchFamily="49" charset="0"/>
+              </a:rPr>
+              <a:t>-storage</a:t>
+            </a:r>
+          </a:p>
+          <a:p>
+            <a:r>
+              <a:rPr lang="it-IT" sz="1300" dirty="0">
+                <a:solidFill>
+                  <a:srgbClr val="171FE2"/>
+                </a:solidFill>
+                <a:latin typeface="Consolas" panose="020B0609020204030204" pitchFamily="49" charset="0"/>
+              </a:rPr>
+              <a:t>        </a:t>
+            </a:r>
+            <a:r>
+              <a:rPr lang="it-IT" sz="1300" dirty="0" err="1">
+                <a:solidFill>
+                  <a:srgbClr val="171FE2"/>
+                </a:solidFill>
+                <a:latin typeface="Consolas" panose="020B0609020204030204" pitchFamily="49" charset="0"/>
+              </a:rPr>
+              <a:t>persistentVolumeClaim</a:t>
+            </a:r>
+            <a:r>
+              <a:rPr lang="it-IT" sz="1300" dirty="0">
+                <a:solidFill>
+                  <a:srgbClr val="171FE2"/>
+                </a:solidFill>
+                <a:latin typeface="Consolas" panose="020B0609020204030204" pitchFamily="49" charset="0"/>
+              </a:rPr>
+              <a:t>:</a:t>
+            </a:r>
+          </a:p>
+          <a:p>
+            <a:r>
+              <a:rPr lang="it-IT" sz="1300" dirty="0">
+                <a:solidFill>
+                  <a:srgbClr val="171FE2"/>
+                </a:solidFill>
+                <a:latin typeface="Consolas" panose="020B0609020204030204" pitchFamily="49" charset="0"/>
+              </a:rPr>
+              <a:t>          </a:t>
+            </a:r>
+            <a:r>
+              <a:rPr lang="it-IT" sz="1300" dirty="0" err="1">
+                <a:solidFill>
+                  <a:srgbClr val="171FE2"/>
+                </a:solidFill>
+                <a:latin typeface="Consolas" panose="020B0609020204030204" pitchFamily="49" charset="0"/>
+              </a:rPr>
+              <a:t>claimName</a:t>
+            </a:r>
+            <a:r>
+              <a:rPr lang="it-IT" sz="1300" dirty="0">
+                <a:solidFill>
+                  <a:srgbClr val="171FE2"/>
+                </a:solidFill>
+                <a:latin typeface="Consolas" panose="020B0609020204030204" pitchFamily="49" charset="0"/>
+              </a:rPr>
+              <a:t>: </a:t>
+            </a:r>
+            <a:r>
+              <a:rPr lang="it-IT" sz="1300" dirty="0" err="1">
+                <a:solidFill>
+                  <a:srgbClr val="171FE2"/>
+                </a:solidFill>
+                <a:latin typeface="Consolas" panose="020B0609020204030204" pitchFamily="49" charset="0"/>
+              </a:rPr>
+              <a:t>mariadb</a:t>
+            </a:r>
+            <a:r>
+              <a:rPr lang="it-IT" sz="1300" dirty="0">
+                <a:solidFill>
+                  <a:srgbClr val="171FE2"/>
+                </a:solidFill>
+                <a:latin typeface="Consolas" panose="020B0609020204030204" pitchFamily="49" charset="0"/>
+              </a:rPr>
+              <a:t>-storage-</a:t>
+            </a:r>
+            <a:r>
+              <a:rPr lang="it-IT" sz="1300" dirty="0" err="1">
+                <a:solidFill>
+                  <a:srgbClr val="171FE2"/>
+                </a:solidFill>
+                <a:latin typeface="Consolas" panose="020B0609020204030204" pitchFamily="49" charset="0"/>
+              </a:rPr>
+              <a:t>claim</a:t>
+            </a:r>
+            <a:endParaRPr lang="it-IT" sz="1300" dirty="0">
+              <a:solidFill>
+                <a:srgbClr val="171FE2"/>
+              </a:solidFill>
+              <a:latin typeface="Consolas" panose="020B0609020204030204" pitchFamily="49" charset="0"/>
+            </a:endParaRPr>
+          </a:p>
+        </p:txBody>
+      </p:sp>
+    </p:spTree>
+    <p:extLst>
+      <p:ext uri="{BB962C8B-B14F-4D97-AF65-F5344CB8AC3E}">
+        <p14:creationId xmlns:p14="http://schemas.microsoft.com/office/powerpoint/2010/main" val="670326009"/>
+      </p:ext>
+    </p:extLst>
+  </p:cSld>
+  <p:clrMapOvr>
+    <a:masterClrMapping/>
+  </p:clrMapOvr>
+</p:sld>
+</file>
+
+<file path=ppt/slides/slide46.xml><?xml version="1.0" encoding="utf-8"?>
+<p:sld xmlns:a="http://schemas.openxmlformats.org/drawingml/2006/main" xmlns:r="http://schemas.openxmlformats.org/officeDocument/2006/relationships" xmlns:p="http://schemas.openxmlformats.org/presentationml/2006/main">
+  <p:cSld>
+    <p:spTree>
+      <p:nvGrpSpPr>
+        <p:cNvPr id="1" name="">
+          <a:extLst>
+            <a:ext uri="{FF2B5EF4-FFF2-40B4-BE49-F238E27FC236}">
+              <a16:creationId xmlns:a16="http://schemas.microsoft.com/office/drawing/2014/main" id="{0331EF5E-5F3D-FFC9-4C20-E8416499AEBE}"/>
+            </a:ext>
+          </a:extLst>
+        </p:cNvPr>
+        <p:cNvGrpSpPr/>
+        <p:nvPr/>
+      </p:nvGrpSpPr>
+      <p:grpSpPr>
+        <a:xfrm>
+          <a:off x="0" y="0"/>
+          <a:ext cx="0" cy="0"/>
+          <a:chOff x="0" y="0"/>
+          <a:chExt cx="0" cy="0"/>
+        </a:xfrm>
+      </p:grpSpPr>
+      <p:sp>
+        <p:nvSpPr>
+          <p:cNvPr id="2" name="Titolo della lezione">
+            <a:extLst>
+              <a:ext uri="{FF2B5EF4-FFF2-40B4-BE49-F238E27FC236}">
+                <a16:creationId xmlns:a16="http://schemas.microsoft.com/office/drawing/2014/main" id="{94FDD731-B3B0-3C6A-22F0-F0CACE1DC3E9}"/>
+              </a:ext>
+            </a:extLst>
+          </p:cNvPr>
+          <p:cNvSpPr>
+            <a:spLocks noGrp="1"/>
+          </p:cNvSpPr>
+          <p:nvPr>
+            <p:ph type="title"/>
+          </p:nvPr>
+        </p:nvSpPr>
+        <p:spPr>
+          <a:xfrm>
+            <a:off x="838200" y="831206"/>
+            <a:ext cx="10515600" cy="314198"/>
+          </a:xfrm>
+        </p:spPr>
+        <p:txBody>
+          <a:bodyPr/>
+          <a:lstStyle/>
+          <a:p>
+            <a:r>
+              <a:rPr lang="it-IT" dirty="0"/>
+              <a:t>SLIDE 44: LA VISIONE D'INSIEME – L'ARCHITETTURA FINALE COMPLETA CLOUD-READY</a:t>
+            </a:r>
+            <a:br>
+              <a:rPr lang="it-IT" dirty="0"/>
+            </a:br>
+            <a:endParaRPr lang="it-IT" dirty="0"/>
+          </a:p>
+        </p:txBody>
+      </p:sp>
+      <p:sp>
+        <p:nvSpPr>
+          <p:cNvPr id="3" name="Contenuto della lezione">
+            <a:extLst>
+              <a:ext uri="{FF2B5EF4-FFF2-40B4-BE49-F238E27FC236}">
+                <a16:creationId xmlns:a16="http://schemas.microsoft.com/office/drawing/2014/main" id="{5BE5D7C1-3658-B978-8725-5EDE6031DC66}"/>
+              </a:ext>
+            </a:extLst>
+          </p:cNvPr>
+          <p:cNvSpPr>
+            <a:spLocks noGrp="1"/>
+          </p:cNvSpPr>
+          <p:nvPr>
+            <p:ph idx="1"/>
+          </p:nvPr>
+        </p:nvSpPr>
+        <p:spPr>
+          <a:xfrm>
+            <a:off x="838200" y="1589185"/>
+            <a:ext cx="10783824" cy="5460839"/>
+          </a:xfrm>
+        </p:spPr>
+        <p:txBody>
+          <a:bodyPr/>
+          <a:lstStyle/>
+          <a:p>
+            <a:r>
+              <a:rPr lang="it-IT"/>
+              <a:t>Se</a:t>
+            </a:r>
+            <a:endParaRPr lang="it-IT" dirty="0">
+              <a:solidFill>
+                <a:srgbClr val="171FE2"/>
+              </a:solidFill>
+              <a:latin typeface="Consolas" panose="020B0609020204030204" pitchFamily="49" charset="0"/>
+            </a:endParaRPr>
+          </a:p>
+        </p:txBody>
+      </p:sp>
+    </p:spTree>
+    <p:extLst>
+      <p:ext uri="{BB962C8B-B14F-4D97-AF65-F5344CB8AC3E}">
+        <p14:creationId xmlns:p14="http://schemas.microsoft.com/office/powerpoint/2010/main" val="3499895759"/>
+      </p:ext>
+    </p:extLst>
+  </p:cSld>
+  <p:clrMapOvr>
+    <a:masterClrMapping/>
+  </p:clrMapOvr>
+</p:sld>
+</file>
+
+<file path=ppt/slides/slide47.xml><?xml version="1.0" encoding="utf-8"?>
+<p:sld xmlns:a="http://schemas.openxmlformats.org/drawingml/2006/main" xmlns:r="http://schemas.openxmlformats.org/officeDocument/2006/relationships" xmlns:p="http://schemas.openxmlformats.org/presentationml/2006/main">
+  <p:cSld>
+    <p:spTree>
+      <p:nvGrpSpPr>
+        <p:cNvPr id="1" name=""/>
+        <p:cNvGrpSpPr/>
+        <p:nvPr/>
+      </p:nvGrpSpPr>
+      <p:grpSpPr>
+        <a:xfrm>
+          <a:off x="0" y="0"/>
+          <a:ext cx="0" cy="0"/>
+          <a:chOff x="0" y="0"/>
+          <a:chExt cx="0" cy="0"/>
+        </a:xfrm>
+      </p:grpSpPr>
+      <p:sp>
+        <p:nvSpPr>
+          <p:cNvPr id="2" name="Titolo 1">
+            <a:extLst>
+              <a:ext uri="{FF2B5EF4-FFF2-40B4-BE49-F238E27FC236}">
+                <a16:creationId xmlns:a16="http://schemas.microsoft.com/office/drawing/2014/main" id="{B5E02355-4941-9C10-CA1D-649F04DB5143}"/>
+              </a:ext>
+            </a:extLst>
+          </p:cNvPr>
+          <p:cNvSpPr>
+            <a:spLocks noGrp="1"/>
+          </p:cNvSpPr>
+          <p:nvPr>
+            <p:ph type="title"/>
+          </p:nvPr>
+        </p:nvSpPr>
+        <p:spPr/>
+        <p:txBody>
+          <a:bodyPr/>
+          <a:lstStyle/>
+          <a:p>
+            <a:r>
+              <a:rPr lang="it-IT" spc="0" dirty="0">
+                <a:latin typeface="Neue Haas Grotesk Text Pro" panose="020B0504020202020204" pitchFamily="34" charset="0"/>
+              </a:rPr>
+              <a:t>GRAZIE PER L’ATTENZIONE</a:t>
+            </a:r>
+          </a:p>
+        </p:txBody>
+      </p:sp>
+    </p:spTree>
+    <p:extLst>
+      <p:ext uri="{BB962C8B-B14F-4D97-AF65-F5344CB8AC3E}">
+        <p14:creationId xmlns:p14="http://schemas.microsoft.com/office/powerpoint/2010/main" val="3003246572"/>
       </p:ext>
     </p:extLst>
   </p:cSld>
@@ -12031,7 +18240,19 @@
             </a:r>
             <a:r>
               <a:rPr lang="it-IT" dirty="0"/>
-              <a:t>. Se un utente digita l'IP di un qualsiasi server del cluster seguito da quella porta (es. http://IP_DEL_SERVER:32000), la richiesta buca il server e viene catapultata dentro il Service, che la gira al </a:t>
+              <a:t>. Se un utente digita l'IP di un qualsiasi server del cluster seguito da quella porta (es. http://IP_DEL_SERVER:32000), </a:t>
+            </a:r>
+            <a:r>
+              <a:rPr lang="it-IT" b="1" dirty="0">
+                <a:solidFill>
+                  <a:srgbClr val="171FE2"/>
+                </a:solidFill>
+              </a:rPr>
+              <a:t>la richiesta buca il server e viene catapultata dentro il Service</a:t>
+            </a:r>
+            <a:r>
+              <a:rPr lang="it-IT" dirty="0"/>
+              <a:t>, che la gira al </a:t>
             </a:r>
             <a:r>
               <a:rPr lang="it-IT" dirty="0" err="1"/>
@@ -12973,6 +19194,15 @@
 </file>
 
 <file path=customXml/item1.xml><?xml version="1.0" encoding="utf-8"?>
+<?mso-contentType ?>
+<FormTemplates xmlns="http://schemas.microsoft.com/sharepoint/v3/contenttype/forms">
+  <Display>DocumentLibraryForm</Display>
+  <Edit>DocumentLibraryForm</Edit>
+  <New>DocumentLibraryForm</New>
+</FormTemplates>
+</file>
+
+<file path=customXml/item2.xml><?xml version="1.0" encoding="utf-8"?>
 <ct:contentTypeSchema xmlns:ct="http://schemas.microsoft.com/office/2006/metadata/contentType" xmlns:ma="http://schemas.microsoft.com/office/2006/metadata/properties/metaAttributes" ct:_="" ma:_="" ma:contentTypeName="Document" ma:contentTypeID="0x010100D3455C6CD0B9BF4DB2CA3009677D9668" ma:contentTypeVersion="17" ma:contentTypeDescription="Create a new document." ma:contentTypeScope="" ma:versionID="6361f2605a906a42d9630ca59d277a8b">
   <xsd:schema xmlns:xsd="http://www.w3.org/2001/XMLSchema" xmlns:xs="http://www.w3.org/2001/XMLSchema" xmlns:p="http://schemas.microsoft.com/office/2006/metadata/properties" xmlns:ns2="8b3acf13-3a58-43b2-a29e-f23503de136d" xmlns:ns3="21b72fd8-e7d0-49ac-9795-d1b0bc6b7e1c" targetNamespace="http://schemas.microsoft.com/office/2006/metadata/properties" ma:root="true" ma:fieldsID="ae4eb9e2c998b5efed80ec6126f835fa" ns2:_="" ns3:_="">
     <xsd:import namespace="8b3acf13-3a58-43b2-a29e-f23503de136d"/>
@@ -13223,15 +19453,6 @@
 </ct:contentTypeSchema>
 </file>
 
-<file path=customXml/item2.xml><?xml version="1.0" encoding="utf-8"?>
-<?mso-contentType ?>
-<FormTemplates xmlns="http://schemas.microsoft.com/sharepoint/v3/contenttype/forms">
-  <Display>DocumentLibraryForm</Display>
-  <Edit>DocumentLibraryForm</Edit>
-  <New>DocumentLibraryForm</New>
-</FormTemplates>
-</file>
-
 <file path=customXml/item3.xml><?xml version="1.0" encoding="utf-8"?>
 <p:properties xmlns:p="http://schemas.microsoft.com/office/2006/metadata/properties" xmlns:xsi="http://www.w3.org/2001/XMLSchema-instance" xmlns:pc="http://schemas.microsoft.com/office/infopath/2007/PartnerControls">
   <documentManagement>
@@ -13245,6 +19466,14 @@
 </file>
 
 <file path=customXml/itemProps1.xml><?xml version="1.0" encoding="utf-8"?>
+<ds:datastoreItem xmlns:ds="http://schemas.openxmlformats.org/officeDocument/2006/customXml" ds:itemID="{67C65656-B2D8-4C19-A873-091B25A5212E}">
+  <ds:schemaRefs>
+    <ds:schemaRef ds:uri="http://schemas.microsoft.com/sharepoint/v3/contenttype/forms"/>
+  </ds:schemaRefs>
+</ds:datastoreItem>
+</file>
+
+<file path=customXml/itemProps2.xml><?xml version="1.0" encoding="utf-8"?>
 <ds:datastoreItem xmlns:ds="http://schemas.openxmlformats.org/officeDocument/2006/customXml" ds:itemID="{70468F63-B318-4D5F-A1DF-86BE98AC2293}">
   <ds:schemaRefs>
     <ds:schemaRef ds:uri="http://schemas.microsoft.com/office/2006/metadata/contentType"/>
@@ -13263,14 +19492,6 @@
 </ds:datastoreItem>
 </file>
 
-<file path=customXml/itemProps2.xml><?xml version="1.0" encoding="utf-8"?>
-<ds:datastoreItem xmlns:ds="http://schemas.openxmlformats.org/officeDocument/2006/customXml" ds:itemID="{67C65656-B2D8-4C19-A873-091B25A5212E}">
-  <ds:schemaRefs>
-    <ds:schemaRef ds:uri="http://schemas.microsoft.com/sharepoint/v3/contenttype/forms"/>
-  </ds:schemaRefs>
-</ds:datastoreItem>
-</file>
-
 <file path=customXml/itemProps3.xml><?xml version="1.0" encoding="utf-8"?>
 <ds:datastoreItem xmlns:ds="http://schemas.openxmlformats.org/officeDocument/2006/customXml" ds:itemID="{6766878A-54ED-4867-B478-72A29DC19B89}">
   <ds:schemaRefs>

--- a/5 - IL NETWORKING DI KUBERNETES E I SERVICE (L'ANIMA DELLA RETE).pptx
+++ b/5 - IL NETWORKING DI KUBERNETES E I SERVICE (L'ANIMA DELLA RETE).pptx
@@ -5,10 +5,10 @@
     <p:sldMasterId id="2147483672" r:id="rId4"/>
   </p:sldMasterIdLst>
   <p:notesMasterIdLst>
-    <p:notesMasterId r:id="rId52"/>
+    <p:notesMasterId r:id="rId55"/>
   </p:notesMasterIdLst>
   <p:handoutMasterIdLst>
-    <p:handoutMasterId r:id="rId53"/>
+    <p:handoutMasterId r:id="rId56"/>
   </p:handoutMasterIdLst>
   <p:sldIdLst>
     <p:sldId id="262" r:id="rId5"/>
@@ -57,7 +57,10 @@
     <p:sldId id="303" r:id="rId48"/>
     <p:sldId id="304" r:id="rId49"/>
     <p:sldId id="305" r:id="rId50"/>
-    <p:sldId id="261" r:id="rId51"/>
+    <p:sldId id="306" r:id="rId51"/>
+    <p:sldId id="307" r:id="rId52"/>
+    <p:sldId id="308" r:id="rId53"/>
+    <p:sldId id="261" r:id="rId54"/>
   </p:sldIdLst>
   <p:sldSz cx="12192000" cy="6858000"/>
   <p:notesSz cx="6858000" cy="9144000"/>
@@ -17174,8 +17177,180 @@
           <a:lstStyle/>
           <a:p>
             <a:r>
-              <a:rPr lang="it-IT"/>
-              <a:t>Se</a:t>
+              <a:rPr lang="it-IT" dirty="0"/>
+              <a:t>In cima alla piramide c'è l'</a:t>
+            </a:r>
+            <a:r>
+              <a:rPr lang="it-IT" b="1" dirty="0"/>
+              <a:t>Utente Finale</a:t>
+            </a:r>
+            <a:r>
+              <a:rPr lang="it-IT" dirty="0"/>
+              <a:t>, che digita l'indirizzo internet sul proprio browser. </a:t>
+            </a:r>
+          </a:p>
+          <a:p>
+            <a:r>
+              <a:rPr lang="it-IT" dirty="0"/>
+              <a:t>La richiesta colpisce il </a:t>
+            </a:r>
+            <a:r>
+              <a:rPr lang="it-IT" b="1" dirty="0"/>
+              <a:t>Service Esterno (</a:t>
+            </a:r>
+            <a:r>
+              <a:rPr lang="it-IT" b="1" dirty="0" err="1"/>
+              <a:t>NodePort</a:t>
+            </a:r>
+            <a:r>
+              <a:rPr lang="it-IT" b="1" dirty="0"/>
+              <a:t>)</a:t>
+            </a:r>
+            <a:r>
+              <a:rPr lang="it-IT" dirty="0"/>
+              <a:t> sulla porta 32000 che abbiamo configurato su Windows. </a:t>
+            </a:r>
+          </a:p>
+          <a:p>
+            <a:r>
+              <a:rPr lang="it-IT" dirty="0"/>
+              <a:t>Questo Service si comporta come un vigile urbano: prende il traffico e lo scarica in modo bilanciato dentro uno dei </a:t>
+            </a:r>
+            <a:r>
+              <a:rPr lang="it-IT" dirty="0" err="1"/>
+              <a:t>Pod</a:t>
+            </a:r>
+            <a:r>
+              <a:rPr lang="it-IT" dirty="0"/>
+              <a:t> del </a:t>
+            </a:r>
+            <a:r>
+              <a:rPr lang="it-IT" b="1" dirty="0" err="1"/>
+              <a:t>Frontend</a:t>
+            </a:r>
+            <a:r>
+              <a:rPr lang="it-IT" b="1" dirty="0"/>
+              <a:t> React</a:t>
+            </a:r>
+            <a:r>
+              <a:rPr lang="it-IT" dirty="0"/>
+              <a:t>. Il codice del </a:t>
+            </a:r>
+            <a:r>
+              <a:rPr lang="it-IT" dirty="0" err="1"/>
+              <a:t>frontend</a:t>
+            </a:r>
+            <a:r>
+              <a:rPr lang="it-IT" dirty="0"/>
+              <a:t>, girando sul browser dell'utente, ha bisogno di leggere i dati e lancia una chiamata HTTP verso il nome DNS interno del secondo Service, il </a:t>
+            </a:r>
+            <a:r>
+              <a:rPr lang="it-IT" b="1" dirty="0" err="1"/>
+              <a:t>backend</a:t>
+            </a:r>
+            <a:r>
+              <a:rPr lang="it-IT" b="1" dirty="0"/>
+              <a:t>-service</a:t>
+            </a:r>
+            <a:r>
+              <a:rPr lang="it-IT" dirty="0"/>
+              <a:t>. </a:t>
+            </a:r>
+          </a:p>
+          <a:p>
+            <a:r>
+              <a:rPr lang="it-IT" dirty="0" err="1"/>
+              <a:t>Kubernetes</a:t>
+            </a:r>
+            <a:r>
+              <a:rPr lang="it-IT" dirty="0"/>
+              <a:t> traduce istantaneamente questo nome testuale in un IP privato e scarica la richiesta dentro uno dei tre </a:t>
+            </a:r>
+            <a:r>
+              <a:rPr lang="it-IT" dirty="0" err="1"/>
+              <a:t>Pod</a:t>
+            </a:r>
+            <a:r>
+              <a:rPr lang="it-IT" dirty="0"/>
+              <a:t> del </a:t>
+            </a:r>
+            <a:r>
+              <a:rPr lang="it-IT" b="1" dirty="0" err="1"/>
+              <a:t>Backend</a:t>
+            </a:r>
+            <a:r>
+              <a:rPr lang="it-IT" b="1" dirty="0"/>
+              <a:t> Spring Boot</a:t>
+            </a:r>
+            <a:r>
+              <a:rPr lang="it-IT" dirty="0"/>
+              <a:t> gestiti dal Deployment. </a:t>
+            </a:r>
+          </a:p>
+          <a:p>
+            <a:r>
+              <a:rPr lang="it-IT" dirty="0"/>
+              <a:t>Il </a:t>
+            </a:r>
+            <a:r>
+              <a:rPr lang="it-IT" dirty="0" err="1"/>
+              <a:t>backend</a:t>
+            </a:r>
+            <a:r>
+              <a:rPr lang="it-IT" dirty="0"/>
+              <a:t> Java si sveglia, elabora la logica di business e, per salvare le informazioni, apre una connessione interna verso il database </a:t>
+            </a:r>
+            <a:r>
+              <a:rPr lang="it-IT" dirty="0" err="1"/>
+              <a:t>MariaDB</a:t>
+            </a:r>
+            <a:r>
+              <a:rPr lang="it-IT" dirty="0"/>
+              <a:t>. </a:t>
+            </a:r>
+          </a:p>
+          <a:p>
+            <a:r>
+              <a:rPr lang="it-IT" dirty="0"/>
+              <a:t>La connessione avviene in totale sicurezza all'interno del cluster, e i dati finali vengono scritti nel container di </a:t>
+            </a:r>
+            <a:r>
+              <a:rPr lang="it-IT" dirty="0" err="1"/>
+              <a:t>MariaDB</a:t>
+            </a:r>
+            <a:r>
+              <a:rPr lang="it-IT" dirty="0"/>
+              <a:t>, il quale li spinge fuori dal proprio perimetro salvandoli dentro il </a:t>
+            </a:r>
+            <a:r>
+              <a:rPr lang="it-IT" b="1" dirty="0" err="1"/>
+              <a:t>PersistentVolume</a:t>
+            </a:r>
+            <a:r>
+              <a:rPr lang="it-IT" dirty="0"/>
+              <a:t> blindato. </a:t>
+            </a:r>
+          </a:p>
+          <a:p>
+            <a:r>
+              <a:rPr lang="it-IT" dirty="0"/>
+              <a:t>Se un server fisico prende fuoco in questo momento, </a:t>
+            </a:r>
+            <a:r>
+              <a:rPr lang="it-IT" dirty="0" err="1"/>
+              <a:t>Kubernetes</a:t>
+            </a:r>
+            <a:r>
+              <a:rPr lang="it-IT" dirty="0"/>
+              <a:t> sposta i </a:t>
+            </a:r>
+            <a:r>
+              <a:rPr lang="it-IT" dirty="0" err="1"/>
+              <a:t>Pod</a:t>
+            </a:r>
+            <a:r>
+              <a:rPr lang="it-IT" dirty="0"/>
+              <a:t>, riaggancia il disco e l'utente non sperimenta nemmeno un secondo di interruzione del servizio. </a:t>
             </a:r>
             <a:endParaRPr lang="it-IT" dirty="0">
               <a:solidFill>
@@ -17204,7 +17379,13 @@
   <p:cSld>
     <p:spTree>
       <p:nvGrpSpPr>
-        <p:cNvPr id="1" name=""/>
+        <p:cNvPr id="1" name="">
+          <a:extLst>
+            <a:ext uri="{FF2B5EF4-FFF2-40B4-BE49-F238E27FC236}">
+              <a16:creationId xmlns:a16="http://schemas.microsoft.com/office/drawing/2014/main" id="{8CCF8383-185D-280A-20EF-0C08060E10ED}"/>
+            </a:ext>
+          </a:extLst>
+        </p:cNvPr>
         <p:cNvGrpSpPr/>
         <p:nvPr/>
       </p:nvGrpSpPr>
@@ -17218,10 +17399,10 @@
       </p:grpSpPr>
       <p:sp>
         <p:nvSpPr>
-          <p:cNvPr id="2" name="Titolo 1">
+          <p:cNvPr id="2" name="Titolo della lezione">
             <a:extLst>
               <a:ext uri="{FF2B5EF4-FFF2-40B4-BE49-F238E27FC236}">
-                <a16:creationId xmlns:a16="http://schemas.microsoft.com/office/drawing/2014/main" id="{B5E02355-4941-9C10-CA1D-649F04DB5143}"/>
+                <a16:creationId xmlns:a16="http://schemas.microsoft.com/office/drawing/2014/main" id="{44D1CE2D-1533-C67D-A3A2-F43E6855096B}"/>
               </a:ext>
             </a:extLst>
           </p:cNvPr>
@@ -17232,24 +17413,713 @@
             <p:ph type="title"/>
           </p:nvPr>
         </p:nvSpPr>
-        <p:spPr/>
+        <p:spPr>
+          <a:xfrm>
+            <a:off x="838200" y="831206"/>
+            <a:ext cx="10515600" cy="314198"/>
+          </a:xfrm>
+        </p:spPr>
         <p:txBody>
           <a:bodyPr/>
           <a:lstStyle/>
           <a:p>
             <a:r>
-              <a:rPr lang="it-IT" spc="0" dirty="0">
-                <a:latin typeface="Neue Haas Grotesk Text Pro" panose="020B0504020202020204" pitchFamily="34" charset="0"/>
-              </a:rPr>
-              <a:t>GRAZIE PER L’ATTENZIONE</a:t>
-            </a:r>
+              <a:rPr lang="it-IT" dirty="0"/>
+              <a:t>SLIDE 45: LAB PRACTICAL – STRUMENTI DI TROUBLESHOOTING PER IL DOCENTE (QUANDO QUALCOSA NON VA)</a:t>
+            </a:r>
+            <a:br>
+              <a:rPr lang="it-IT" dirty="0"/>
+            </a:br>
+            <a:endParaRPr lang="it-IT" dirty="0"/>
+          </a:p>
+        </p:txBody>
+      </p:sp>
+      <p:sp>
+        <p:nvSpPr>
+          <p:cNvPr id="3" name="Contenuto della lezione">
+            <a:extLst>
+              <a:ext uri="{FF2B5EF4-FFF2-40B4-BE49-F238E27FC236}">
+                <a16:creationId xmlns:a16="http://schemas.microsoft.com/office/drawing/2014/main" id="{7C118BD5-4FEF-FB7E-D878-5873AD4FEF73}"/>
+              </a:ext>
+            </a:extLst>
+          </p:cNvPr>
+          <p:cNvSpPr>
+            <a:spLocks noGrp="1"/>
+          </p:cNvSpPr>
+          <p:nvPr>
+            <p:ph idx="1"/>
+          </p:nvPr>
+        </p:nvSpPr>
+        <p:spPr>
+          <a:xfrm>
+            <a:off x="838200" y="1589185"/>
+            <a:ext cx="10783824" cy="5460839"/>
+          </a:xfrm>
+        </p:spPr>
+        <p:txBody>
+          <a:bodyPr/>
+          <a:lstStyle/>
+          <a:p>
+            <a:r>
+              <a:rPr lang="it-IT" dirty="0"/>
+              <a:t>Nel mondo reale dei sistemi IT aziendali (e soprattutto all'interno di un'aula di formazione durante le esercitazioni pratiche), le cose possono non funzionare al primo colpo. </a:t>
+            </a:r>
+          </a:p>
+          <a:p>
+            <a:r>
+              <a:rPr lang="it-IT" dirty="0"/>
+              <a:t>Un errore di battitura nello YAML, una porta occupata o un nome di una variabile d'ambiente errato possono bloccare l'avvio della nostra infrastruttura. </a:t>
+            </a:r>
+          </a:p>
+          <a:p>
+            <a:r>
+              <a:rPr lang="it-IT" dirty="0"/>
+              <a:t>Il professionista </a:t>
+            </a:r>
+            <a:r>
+              <a:rPr lang="it-IT" dirty="0" err="1"/>
+              <a:t>DevOps</a:t>
+            </a:r>
+            <a:r>
+              <a:rPr lang="it-IT" dirty="0"/>
+              <a:t> non è colui che non commette mai errori, ma colui che sa utilizzare con maestria gli strumenti di diagnostica (</a:t>
+            </a:r>
+            <a:r>
+              <a:rPr lang="it-IT" dirty="0" err="1"/>
+              <a:t>Troubleshooting</a:t>
+            </a:r>
+            <a:r>
+              <a:rPr lang="it-IT" dirty="0"/>
+              <a:t>) per scovare l'inghippo e risolverlo in pochi secondi. </a:t>
+            </a:r>
+          </a:p>
+          <a:p>
+            <a:r>
+              <a:rPr lang="it-IT" dirty="0">
+                <a:solidFill>
+                  <a:srgbClr val="171FE2"/>
+                </a:solidFill>
+              </a:rPr>
+              <a:t>Esploriamo la triade dei comandi salvavita di </a:t>
+            </a:r>
+            <a:r>
+              <a:rPr lang="it-IT" dirty="0" err="1">
+                <a:solidFill>
+                  <a:srgbClr val="171FE2"/>
+                </a:solidFill>
+              </a:rPr>
+              <a:t>Kubernetes</a:t>
+            </a:r>
+            <a:r>
+              <a:rPr lang="it-IT" dirty="0">
+                <a:solidFill>
+                  <a:srgbClr val="171FE2"/>
+                </a:solidFill>
+              </a:rPr>
+              <a:t> che dovete stampare nella vostra memoria.</a:t>
+            </a:r>
+            <a:endParaRPr lang="it-IT" dirty="0">
+              <a:solidFill>
+                <a:srgbClr val="171FE2"/>
+              </a:solidFill>
+              <a:latin typeface="Consolas" panose="020B0609020204030204" pitchFamily="49" charset="0"/>
+            </a:endParaRPr>
           </a:p>
         </p:txBody>
       </p:sp>
     </p:spTree>
     <p:extLst>
       <p:ext uri="{BB962C8B-B14F-4D97-AF65-F5344CB8AC3E}">
-        <p14:creationId xmlns:p14="http://schemas.microsoft.com/office/powerpoint/2010/main" val="3003246572"/>
+        <p14:creationId xmlns:p14="http://schemas.microsoft.com/office/powerpoint/2010/main" val="3191026587"/>
+      </p:ext>
+    </p:extLst>
+  </p:cSld>
+  <p:clrMapOvr>
+    <a:masterClrMapping/>
+  </p:clrMapOvr>
+</p:sld>
+</file>
+
+<file path=ppt/slides/slide48.xml><?xml version="1.0" encoding="utf-8"?>
+<p:sld xmlns:a="http://schemas.openxmlformats.org/drawingml/2006/main" xmlns:r="http://schemas.openxmlformats.org/officeDocument/2006/relationships" xmlns:p="http://schemas.openxmlformats.org/presentationml/2006/main">
+  <p:cSld>
+    <p:spTree>
+      <p:nvGrpSpPr>
+        <p:cNvPr id="1" name="">
+          <a:extLst>
+            <a:ext uri="{FF2B5EF4-FFF2-40B4-BE49-F238E27FC236}">
+              <a16:creationId xmlns:a16="http://schemas.microsoft.com/office/drawing/2014/main" id="{B071CA14-3292-2892-D0F7-AEF552CEC21E}"/>
+            </a:ext>
+          </a:extLst>
+        </p:cNvPr>
+        <p:cNvGrpSpPr/>
+        <p:nvPr/>
+      </p:nvGrpSpPr>
+      <p:grpSpPr>
+        <a:xfrm>
+          <a:off x="0" y="0"/>
+          <a:ext cx="0" cy="0"/>
+          <a:chOff x="0" y="0"/>
+          <a:chExt cx="0" cy="0"/>
+        </a:xfrm>
+      </p:grpSpPr>
+      <p:sp>
+        <p:nvSpPr>
+          <p:cNvPr id="2" name="Titolo della lezione">
+            <a:extLst>
+              <a:ext uri="{FF2B5EF4-FFF2-40B4-BE49-F238E27FC236}">
+                <a16:creationId xmlns:a16="http://schemas.microsoft.com/office/drawing/2014/main" id="{699BF9D7-7930-B2A0-4CB8-2D5243B37817}"/>
+              </a:ext>
+            </a:extLst>
+          </p:cNvPr>
+          <p:cNvSpPr>
+            <a:spLocks noGrp="1"/>
+          </p:cNvSpPr>
+          <p:nvPr>
+            <p:ph type="title"/>
+          </p:nvPr>
+        </p:nvSpPr>
+        <p:spPr>
+          <a:xfrm>
+            <a:off x="838200" y="831206"/>
+            <a:ext cx="10515600" cy="314198"/>
+          </a:xfrm>
+        </p:spPr>
+        <p:txBody>
+          <a:bodyPr/>
+          <a:lstStyle/>
+          <a:p>
+            <a:r>
+              <a:rPr lang="it-IT" dirty="0"/>
+              <a:t>SLIDE 46: LAB PRACTICAL – STRUMENTI DI TROUBLESHOOTING PER IL DOCENTE (QUANDO QUALCOSA NON VA)</a:t>
+            </a:r>
+            <a:br>
+              <a:rPr lang="it-IT" dirty="0"/>
+            </a:br>
+            <a:endParaRPr lang="it-IT" dirty="0"/>
+          </a:p>
+        </p:txBody>
+      </p:sp>
+      <p:sp>
+        <p:nvSpPr>
+          <p:cNvPr id="3" name="Contenuto della lezione">
+            <a:extLst>
+              <a:ext uri="{FF2B5EF4-FFF2-40B4-BE49-F238E27FC236}">
+                <a16:creationId xmlns:a16="http://schemas.microsoft.com/office/drawing/2014/main" id="{9EB6D33C-AB42-26DD-6F10-C82C8FBEF04C}"/>
+              </a:ext>
+            </a:extLst>
+          </p:cNvPr>
+          <p:cNvSpPr>
+            <a:spLocks noGrp="1"/>
+          </p:cNvSpPr>
+          <p:nvPr>
+            <p:ph idx="1"/>
+          </p:nvPr>
+        </p:nvSpPr>
+        <p:spPr>
+          <a:xfrm>
+            <a:off x="838200" y="1589185"/>
+            <a:ext cx="10783824" cy="5460839"/>
+          </a:xfrm>
+        </p:spPr>
+        <p:txBody>
+          <a:bodyPr/>
+          <a:lstStyle/>
+          <a:p>
+            <a:r>
+              <a:rPr lang="it-IT" dirty="0"/>
+              <a:t>Immaginiamo che uno dei nostri </a:t>
+            </a:r>
+            <a:r>
+              <a:rPr lang="it-IT" dirty="0" err="1"/>
+              <a:t>Pod</a:t>
+            </a:r>
+            <a:r>
+              <a:rPr lang="it-IT" dirty="0"/>
+              <a:t> sia bloccato o non risponda:</a:t>
+            </a:r>
+          </a:p>
+          <a:p>
+            <a:r>
+              <a:rPr lang="it-IT" dirty="0"/>
+              <a:t>Il primo comando da lanciare, che abbiamo già usato, è il censimento dello stato: </a:t>
+            </a:r>
+          </a:p>
+          <a:p>
+            <a:r>
+              <a:rPr lang="it-IT" dirty="0" err="1">
+                <a:solidFill>
+                  <a:srgbClr val="171FE2"/>
+                </a:solidFill>
+                <a:latin typeface="Consolas" panose="020B0609020204030204" pitchFamily="49" charset="0"/>
+              </a:rPr>
+              <a:t>kubectl</a:t>
+            </a:r>
+            <a:r>
+              <a:rPr lang="it-IT" dirty="0">
+                <a:solidFill>
+                  <a:srgbClr val="171FE2"/>
+                </a:solidFill>
+                <a:latin typeface="Consolas" panose="020B0609020204030204" pitchFamily="49" charset="0"/>
+              </a:rPr>
+              <a:t> </a:t>
+            </a:r>
+            <a:r>
+              <a:rPr lang="it-IT" dirty="0" err="1">
+                <a:solidFill>
+                  <a:srgbClr val="171FE2"/>
+                </a:solidFill>
+                <a:latin typeface="Consolas" panose="020B0609020204030204" pitchFamily="49" charset="0"/>
+              </a:rPr>
+              <a:t>get</a:t>
+            </a:r>
+            <a:r>
+              <a:rPr lang="it-IT" dirty="0">
+                <a:solidFill>
+                  <a:srgbClr val="171FE2"/>
+                </a:solidFill>
+                <a:latin typeface="Consolas" panose="020B0609020204030204" pitchFamily="49" charset="0"/>
+              </a:rPr>
+              <a:t> </a:t>
+            </a:r>
+            <a:r>
+              <a:rPr lang="it-IT" dirty="0" err="1">
+                <a:solidFill>
+                  <a:srgbClr val="171FE2"/>
+                </a:solidFill>
+                <a:latin typeface="Consolas" panose="020B0609020204030204" pitchFamily="49" charset="0"/>
+              </a:rPr>
+              <a:t>pods</a:t>
+            </a:r>
+            <a:endParaRPr lang="it-IT" dirty="0">
+              <a:solidFill>
+                <a:srgbClr val="171FE2"/>
+              </a:solidFill>
+              <a:latin typeface="Consolas" panose="020B0609020204030204" pitchFamily="49" charset="0"/>
+            </a:endParaRPr>
+          </a:p>
+          <a:p>
+            <a:r>
+              <a:rPr lang="it-IT" dirty="0"/>
+              <a:t>Se nella colonna STATUS notiamo diciture sospette come </a:t>
+            </a:r>
+            <a:r>
+              <a:rPr lang="it-IT" i="1" dirty="0" err="1"/>
+              <a:t>CrashLoopBackOff</a:t>
+            </a:r>
+            <a:r>
+              <a:rPr lang="it-IT" dirty="0"/>
+              <a:t> o </a:t>
+            </a:r>
+            <a:r>
+              <a:rPr lang="it-IT" i="1" dirty="0" err="1"/>
+              <a:t>Pending</a:t>
+            </a:r>
+            <a:r>
+              <a:rPr lang="it-IT" dirty="0"/>
+              <a:t>, dobbiamo attivare la fase investigativa. </a:t>
+            </a:r>
+          </a:p>
+          <a:p>
+            <a:r>
+              <a:rPr lang="it-IT" dirty="0"/>
+              <a:t>Il secondo comando, il più potente in assoluto per capire gli errori di configurazione di </a:t>
+            </a:r>
+            <a:r>
+              <a:rPr lang="it-IT" dirty="0" err="1"/>
+              <a:t>Kubernetes</a:t>
+            </a:r>
+            <a:r>
+              <a:rPr lang="it-IT" dirty="0"/>
+              <a:t>, è:</a:t>
+            </a:r>
+          </a:p>
+          <a:p>
+            <a:r>
+              <a:rPr lang="it-IT" dirty="0" err="1">
+                <a:solidFill>
+                  <a:srgbClr val="171FE2"/>
+                </a:solidFill>
+                <a:latin typeface="Consolas" panose="020B0609020204030204" pitchFamily="49" charset="0"/>
+              </a:rPr>
+              <a:t>kubectl</a:t>
+            </a:r>
+            <a:r>
+              <a:rPr lang="it-IT" dirty="0">
+                <a:solidFill>
+                  <a:srgbClr val="171FE2"/>
+                </a:solidFill>
+                <a:latin typeface="Consolas" panose="020B0609020204030204" pitchFamily="49" charset="0"/>
+              </a:rPr>
+              <a:t> </a:t>
+            </a:r>
+            <a:r>
+              <a:rPr lang="it-IT" dirty="0" err="1">
+                <a:solidFill>
+                  <a:srgbClr val="171FE2"/>
+                </a:solidFill>
+                <a:latin typeface="Consolas" panose="020B0609020204030204" pitchFamily="49" charset="0"/>
+              </a:rPr>
+              <a:t>describe</a:t>
+            </a:r>
+            <a:r>
+              <a:rPr lang="it-IT" dirty="0">
+                <a:solidFill>
+                  <a:srgbClr val="171FE2"/>
+                </a:solidFill>
+                <a:latin typeface="Consolas" panose="020B0609020204030204" pitchFamily="49" charset="0"/>
+              </a:rPr>
+              <a:t> </a:t>
+            </a:r>
+            <a:r>
+              <a:rPr lang="it-IT" dirty="0" err="1">
+                <a:solidFill>
+                  <a:srgbClr val="171FE2"/>
+                </a:solidFill>
+                <a:latin typeface="Consolas" panose="020B0609020204030204" pitchFamily="49" charset="0"/>
+              </a:rPr>
+              <a:t>pod</a:t>
+            </a:r>
+            <a:r>
+              <a:rPr lang="it-IT" dirty="0">
+                <a:solidFill>
+                  <a:srgbClr val="171FE2"/>
+                </a:solidFill>
+                <a:latin typeface="Consolas" panose="020B0609020204030204" pitchFamily="49" charset="0"/>
+              </a:rPr>
+              <a:t> </a:t>
+            </a:r>
+            <a:r>
+              <a:rPr lang="it-IT" dirty="0" err="1">
+                <a:solidFill>
+                  <a:srgbClr val="171FE2"/>
+                </a:solidFill>
+                <a:latin typeface="Consolas" panose="020B0609020204030204" pitchFamily="49" charset="0"/>
+              </a:rPr>
+              <a:t>mariadb</a:t>
+            </a:r>
+            <a:r>
+              <a:rPr lang="it-IT" dirty="0">
+                <a:solidFill>
+                  <a:srgbClr val="171FE2"/>
+                </a:solidFill>
+                <a:latin typeface="Consolas" panose="020B0609020204030204" pitchFamily="49" charset="0"/>
+              </a:rPr>
+              <a:t>-deployment-</a:t>
+            </a:r>
+            <a:r>
+              <a:rPr lang="it-IT" dirty="0" err="1">
+                <a:solidFill>
+                  <a:srgbClr val="171FE2"/>
+                </a:solidFill>
+                <a:latin typeface="Consolas" panose="020B0609020204030204" pitchFamily="49" charset="0"/>
+              </a:rPr>
+              <a:t>xyz</a:t>
+            </a:r>
+            <a:endParaRPr lang="it-IT" dirty="0">
+              <a:solidFill>
+                <a:srgbClr val="171FE2"/>
+              </a:solidFill>
+              <a:latin typeface="Consolas" panose="020B0609020204030204" pitchFamily="49" charset="0"/>
+            </a:endParaRPr>
+          </a:p>
+          <a:p>
+            <a:r>
+              <a:rPr lang="it-IT" dirty="0"/>
+              <a:t>Scorriamo la schermata fino in fondo e leggete la sezione Events (Eventi). </a:t>
+            </a:r>
+          </a:p>
+          <a:p>
+            <a:r>
+              <a:rPr lang="it-IT" dirty="0"/>
+              <a:t>Qui </a:t>
+            </a:r>
+            <a:r>
+              <a:rPr lang="it-IT" dirty="0" err="1"/>
+              <a:t>Kubernetes</a:t>
+            </a:r>
+            <a:r>
+              <a:rPr lang="it-IT" dirty="0"/>
+              <a:t> parlerà in chiaro, dicendo ad esempio: "Non posso avviare il </a:t>
+            </a:r>
+            <a:r>
+              <a:rPr lang="it-IT" dirty="0" err="1"/>
+              <a:t>pod</a:t>
+            </a:r>
+            <a:r>
+              <a:rPr lang="it-IT" dirty="0"/>
+              <a:t> perché il </a:t>
+            </a:r>
+            <a:r>
+              <a:rPr lang="it-IT" dirty="0" err="1"/>
+              <a:t>PersistentVolumeClaim</a:t>
+            </a:r>
+            <a:r>
+              <a:rPr lang="it-IT" dirty="0"/>
+              <a:t> chiamato </a:t>
+            </a:r>
+            <a:r>
+              <a:rPr lang="it-IT" dirty="0" err="1"/>
+              <a:t>mariadb</a:t>
+            </a:r>
+            <a:r>
+              <a:rPr lang="it-IT" dirty="0"/>
+              <a:t>-storage-</a:t>
+            </a:r>
+            <a:r>
+              <a:rPr lang="it-IT" dirty="0" err="1"/>
+              <a:t>claim</a:t>
+            </a:r>
+            <a:r>
+              <a:rPr lang="it-IT" dirty="0"/>
+              <a:t> non esiste" oppure "L'immagine digitata non è stata trovata su Docker Hub". </a:t>
+            </a:r>
+          </a:p>
+        </p:txBody>
+      </p:sp>
+    </p:spTree>
+    <p:extLst>
+      <p:ext uri="{BB962C8B-B14F-4D97-AF65-F5344CB8AC3E}">
+        <p14:creationId xmlns:p14="http://schemas.microsoft.com/office/powerpoint/2010/main" val="161283495"/>
+      </p:ext>
+    </p:extLst>
+  </p:cSld>
+  <p:clrMapOvr>
+    <a:masterClrMapping/>
+  </p:clrMapOvr>
+</p:sld>
+</file>
+
+<file path=ppt/slides/slide49.xml><?xml version="1.0" encoding="utf-8"?>
+<p:sld xmlns:a="http://schemas.openxmlformats.org/drawingml/2006/main" xmlns:r="http://schemas.openxmlformats.org/officeDocument/2006/relationships" xmlns:p="http://schemas.openxmlformats.org/presentationml/2006/main">
+  <p:cSld>
+    <p:spTree>
+      <p:nvGrpSpPr>
+        <p:cNvPr id="1" name="">
+          <a:extLst>
+            <a:ext uri="{FF2B5EF4-FFF2-40B4-BE49-F238E27FC236}">
+              <a16:creationId xmlns:a16="http://schemas.microsoft.com/office/drawing/2014/main" id="{7449DBBB-F0C5-3E36-F161-6A5189D0F611}"/>
+            </a:ext>
+          </a:extLst>
+        </p:cNvPr>
+        <p:cNvGrpSpPr/>
+        <p:nvPr/>
+      </p:nvGrpSpPr>
+      <p:grpSpPr>
+        <a:xfrm>
+          <a:off x="0" y="0"/>
+          <a:ext cx="0" cy="0"/>
+          <a:chOff x="0" y="0"/>
+          <a:chExt cx="0" cy="0"/>
+        </a:xfrm>
+      </p:grpSpPr>
+      <p:sp>
+        <p:nvSpPr>
+          <p:cNvPr id="2" name="Titolo della lezione">
+            <a:extLst>
+              <a:ext uri="{FF2B5EF4-FFF2-40B4-BE49-F238E27FC236}">
+                <a16:creationId xmlns:a16="http://schemas.microsoft.com/office/drawing/2014/main" id="{89FA1FB1-82A8-64A3-2128-B7F9F36870E9}"/>
+              </a:ext>
+            </a:extLst>
+          </p:cNvPr>
+          <p:cNvSpPr>
+            <a:spLocks noGrp="1"/>
+          </p:cNvSpPr>
+          <p:nvPr>
+            <p:ph type="title"/>
+          </p:nvPr>
+        </p:nvSpPr>
+        <p:spPr>
+          <a:xfrm>
+            <a:off x="838200" y="831206"/>
+            <a:ext cx="10515600" cy="314198"/>
+          </a:xfrm>
+        </p:spPr>
+        <p:txBody>
+          <a:bodyPr/>
+          <a:lstStyle/>
+          <a:p>
+            <a:r>
+              <a:rPr lang="it-IT" dirty="0"/>
+              <a:t>SLIDE 47: LAB PRACTICAL – STRUMENTI DI TROUBLESHOOTING PER IL DOCENTE (QUANDO QUALCOSA NON VA)</a:t>
+            </a:r>
+            <a:br>
+              <a:rPr lang="it-IT" dirty="0"/>
+            </a:br>
+            <a:endParaRPr lang="it-IT" dirty="0"/>
+          </a:p>
+        </p:txBody>
+      </p:sp>
+      <p:sp>
+        <p:nvSpPr>
+          <p:cNvPr id="3" name="Contenuto della lezione">
+            <a:extLst>
+              <a:ext uri="{FF2B5EF4-FFF2-40B4-BE49-F238E27FC236}">
+                <a16:creationId xmlns:a16="http://schemas.microsoft.com/office/drawing/2014/main" id="{AD6F1D5E-F602-A7EC-EE20-300364F41CCD}"/>
+              </a:ext>
+            </a:extLst>
+          </p:cNvPr>
+          <p:cNvSpPr>
+            <a:spLocks noGrp="1"/>
+          </p:cNvSpPr>
+          <p:nvPr>
+            <p:ph idx="1"/>
+          </p:nvPr>
+        </p:nvSpPr>
+        <p:spPr>
+          <a:xfrm>
+            <a:off x="838200" y="1589185"/>
+            <a:ext cx="10783824" cy="5460839"/>
+          </a:xfrm>
+        </p:spPr>
+        <p:txBody>
+          <a:bodyPr/>
+          <a:lstStyle/>
+          <a:p>
+            <a:r>
+              <a:rPr lang="it-IT" dirty="0"/>
+              <a:t>Se gli eventi dicono che la configurazione di </a:t>
+            </a:r>
+            <a:r>
+              <a:rPr lang="it-IT" dirty="0" err="1"/>
+              <a:t>Kubernetes</a:t>
+            </a:r>
+            <a:r>
+              <a:rPr lang="it-IT" dirty="0"/>
+              <a:t> è corretta ma l'applicazione continua a fallire, l'errore risiede dentro il codice dell'applicazione stessa (un errore Java o un fallimento di </a:t>
+            </a:r>
+            <a:r>
+              <a:rPr lang="it-IT" dirty="0" err="1"/>
+              <a:t>MariaDB</a:t>
+            </a:r>
+            <a:r>
+              <a:rPr lang="it-IT" dirty="0"/>
+              <a:t>). </a:t>
+            </a:r>
+          </a:p>
+          <a:p>
+            <a:r>
+              <a:rPr lang="it-IT" dirty="0"/>
+              <a:t>In questo caso eseguiamo il comando che va a leggere lo standard output del container:</a:t>
+            </a:r>
+          </a:p>
+          <a:p>
+            <a:r>
+              <a:rPr lang="it-IT" dirty="0" err="1">
+                <a:solidFill>
+                  <a:srgbClr val="171FE2"/>
+                </a:solidFill>
+                <a:latin typeface="Consolas" panose="020B0609020204030204" pitchFamily="49" charset="0"/>
+              </a:rPr>
+              <a:t>kubectl</a:t>
+            </a:r>
+            <a:r>
+              <a:rPr lang="it-IT" dirty="0">
+                <a:solidFill>
+                  <a:srgbClr val="171FE2"/>
+                </a:solidFill>
+                <a:latin typeface="Consolas" panose="020B0609020204030204" pitchFamily="49" charset="0"/>
+              </a:rPr>
+              <a:t> logs </a:t>
+            </a:r>
+            <a:r>
+              <a:rPr lang="it-IT" dirty="0" err="1">
+                <a:solidFill>
+                  <a:srgbClr val="171FE2"/>
+                </a:solidFill>
+                <a:latin typeface="Consolas" panose="020B0609020204030204" pitchFamily="49" charset="0"/>
+              </a:rPr>
+              <a:t>mariadb</a:t>
+            </a:r>
+            <a:r>
+              <a:rPr lang="it-IT" dirty="0">
+                <a:solidFill>
+                  <a:srgbClr val="171FE2"/>
+                </a:solidFill>
+                <a:latin typeface="Consolas" panose="020B0609020204030204" pitchFamily="49" charset="0"/>
+              </a:rPr>
+              <a:t>-deployment-</a:t>
+            </a:r>
+            <a:r>
+              <a:rPr lang="it-IT" dirty="0" err="1">
+                <a:solidFill>
+                  <a:srgbClr val="171FE2"/>
+                </a:solidFill>
+                <a:latin typeface="Consolas" panose="020B0609020204030204" pitchFamily="49" charset="0"/>
+              </a:rPr>
+              <a:t>xyz</a:t>
+            </a:r>
+            <a:endParaRPr lang="it-IT" dirty="0">
+              <a:solidFill>
+                <a:srgbClr val="171FE2"/>
+              </a:solidFill>
+              <a:latin typeface="Consolas" panose="020B0609020204030204" pitchFamily="49" charset="0"/>
+            </a:endParaRPr>
+          </a:p>
+          <a:p>
+            <a:r>
+              <a:rPr lang="it-IT" dirty="0"/>
+              <a:t>Questo comando mostrerà le righe di log native di </a:t>
+            </a:r>
+            <a:r>
+              <a:rPr lang="it-IT" dirty="0" err="1"/>
+              <a:t>MariaDB</a:t>
+            </a:r>
+            <a:r>
+              <a:rPr lang="it-IT" dirty="0"/>
+              <a:t> o di Spring Boot, mostrando l'errore esatto (ad esempio un errore di sintassi SQL o una password errata). </a:t>
+            </a:r>
+          </a:p>
+          <a:p>
+            <a:r>
+              <a:rPr lang="it-IT" dirty="0"/>
+              <a:t>Con questa triade di comandi — </a:t>
+            </a:r>
+            <a:r>
+              <a:rPr lang="it-IT" b="1" dirty="0" err="1"/>
+              <a:t>get</a:t>
+            </a:r>
+            <a:r>
+              <a:rPr lang="it-IT" b="1" dirty="0"/>
+              <a:t> </a:t>
+            </a:r>
+            <a:r>
+              <a:rPr lang="it-IT" dirty="0"/>
+              <a:t>per vedere il sintomo, </a:t>
+            </a:r>
+            <a:r>
+              <a:rPr lang="it-IT" b="1" dirty="0" err="1"/>
+              <a:t>describe</a:t>
+            </a:r>
+            <a:r>
+              <a:rPr lang="it-IT" dirty="0"/>
+              <a:t> per vedere l'errore del cluster, e </a:t>
+            </a:r>
+            <a:r>
+              <a:rPr lang="it-IT" b="1" dirty="0"/>
+              <a:t>logs</a:t>
+            </a:r>
+            <a:r>
+              <a:rPr lang="it-IT" dirty="0"/>
+              <a:t> per vedere l'errore del codice saremo in grado di riparare </a:t>
+            </a:r>
+            <a:r>
+              <a:rPr lang="it-IT"/>
+              <a:t>qualsiasi cluster.</a:t>
+            </a:r>
+            <a:endParaRPr lang="it-IT" dirty="0">
+              <a:solidFill>
+                <a:srgbClr val="171FE2"/>
+              </a:solidFill>
+              <a:latin typeface="Consolas" panose="020B0609020204030204" pitchFamily="49" charset="0"/>
+            </a:endParaRPr>
+          </a:p>
+        </p:txBody>
+      </p:sp>
+    </p:spTree>
+    <p:extLst>
+      <p:ext uri="{BB962C8B-B14F-4D97-AF65-F5344CB8AC3E}">
+        <p14:creationId xmlns:p14="http://schemas.microsoft.com/office/powerpoint/2010/main" val="2160576681"/>
       </p:ext>
     </p:extLst>
   </p:cSld>
@@ -17453,6 +18323,66 @@
     <p:extLst>
       <p:ext uri="{BB962C8B-B14F-4D97-AF65-F5344CB8AC3E}">
         <p14:creationId xmlns:p14="http://schemas.microsoft.com/office/powerpoint/2010/main" val="1654471086"/>
+      </p:ext>
+    </p:extLst>
+  </p:cSld>
+  <p:clrMapOvr>
+    <a:masterClrMapping/>
+  </p:clrMapOvr>
+</p:sld>
+</file>
+
+<file path=ppt/slides/slide50.xml><?xml version="1.0" encoding="utf-8"?>
+<p:sld xmlns:a="http://schemas.openxmlformats.org/drawingml/2006/main" xmlns:r="http://schemas.openxmlformats.org/officeDocument/2006/relationships" xmlns:p="http://schemas.openxmlformats.org/presentationml/2006/main">
+  <p:cSld>
+    <p:spTree>
+      <p:nvGrpSpPr>
+        <p:cNvPr id="1" name=""/>
+        <p:cNvGrpSpPr/>
+        <p:nvPr/>
+      </p:nvGrpSpPr>
+      <p:grpSpPr>
+        <a:xfrm>
+          <a:off x="0" y="0"/>
+          <a:ext cx="0" cy="0"/>
+          <a:chOff x="0" y="0"/>
+          <a:chExt cx="0" cy="0"/>
+        </a:xfrm>
+      </p:grpSpPr>
+      <p:sp>
+        <p:nvSpPr>
+          <p:cNvPr id="2" name="Titolo 1">
+            <a:extLst>
+              <a:ext uri="{FF2B5EF4-FFF2-40B4-BE49-F238E27FC236}">
+                <a16:creationId xmlns:a16="http://schemas.microsoft.com/office/drawing/2014/main" id="{B5E02355-4941-9C10-CA1D-649F04DB5143}"/>
+              </a:ext>
+            </a:extLst>
+          </p:cNvPr>
+          <p:cNvSpPr>
+            <a:spLocks noGrp="1"/>
+          </p:cNvSpPr>
+          <p:nvPr>
+            <p:ph type="title"/>
+          </p:nvPr>
+        </p:nvSpPr>
+        <p:spPr/>
+        <p:txBody>
+          <a:bodyPr/>
+          <a:lstStyle/>
+          <a:p>
+            <a:r>
+              <a:rPr lang="it-IT" spc="0" dirty="0">
+                <a:latin typeface="Neue Haas Grotesk Text Pro" panose="020B0504020202020204" pitchFamily="34" charset="0"/>
+              </a:rPr>
+              <a:t>GRAZIE PER L’ATTENZIONE</a:t>
+            </a:r>
+          </a:p>
+        </p:txBody>
+      </p:sp>
+    </p:spTree>
+    <p:extLst>
+      <p:ext uri="{BB962C8B-B14F-4D97-AF65-F5344CB8AC3E}">
+        <p14:creationId xmlns:p14="http://schemas.microsoft.com/office/powerpoint/2010/main" val="3003246572"/>
       </p:ext>
     </p:extLst>
   </p:cSld>
@@ -19194,15 +20124,6 @@
 </file>
 
 <file path=customXml/item1.xml><?xml version="1.0" encoding="utf-8"?>
-<?mso-contentType ?>
-<FormTemplates xmlns="http://schemas.microsoft.com/sharepoint/v3/contenttype/forms">
-  <Display>DocumentLibraryForm</Display>
-  <Edit>DocumentLibraryForm</Edit>
-  <New>DocumentLibraryForm</New>
-</FormTemplates>
-</file>
-
-<file path=customXml/item2.xml><?xml version="1.0" encoding="utf-8"?>
 <ct:contentTypeSchema xmlns:ct="http://schemas.microsoft.com/office/2006/metadata/contentType" xmlns:ma="http://schemas.microsoft.com/office/2006/metadata/properties/metaAttributes" ct:_="" ma:_="" ma:contentTypeName="Document" ma:contentTypeID="0x010100D3455C6CD0B9BF4DB2CA3009677D9668" ma:contentTypeVersion="17" ma:contentTypeDescription="Create a new document." ma:contentTypeScope="" ma:versionID="6361f2605a906a42d9630ca59d277a8b">
   <xsd:schema xmlns:xsd="http://www.w3.org/2001/XMLSchema" xmlns:xs="http://www.w3.org/2001/XMLSchema" xmlns:p="http://schemas.microsoft.com/office/2006/metadata/properties" xmlns:ns2="8b3acf13-3a58-43b2-a29e-f23503de136d" xmlns:ns3="21b72fd8-e7d0-49ac-9795-d1b0bc6b7e1c" targetNamespace="http://schemas.microsoft.com/office/2006/metadata/properties" ma:root="true" ma:fieldsID="ae4eb9e2c998b5efed80ec6126f835fa" ns2:_="" ns3:_="">
     <xsd:import namespace="8b3acf13-3a58-43b2-a29e-f23503de136d"/>
@@ -19453,6 +20374,15 @@
 </ct:contentTypeSchema>
 </file>
 
+<file path=customXml/item2.xml><?xml version="1.0" encoding="utf-8"?>
+<?mso-contentType ?>
+<FormTemplates xmlns="http://schemas.microsoft.com/sharepoint/v3/contenttype/forms">
+  <Display>DocumentLibraryForm</Display>
+  <Edit>DocumentLibraryForm</Edit>
+  <New>DocumentLibraryForm</New>
+</FormTemplates>
+</file>
+
 <file path=customXml/item3.xml><?xml version="1.0" encoding="utf-8"?>
 <p:properties xmlns:p="http://schemas.microsoft.com/office/2006/metadata/properties" xmlns:xsi="http://www.w3.org/2001/XMLSchema-instance" xmlns:pc="http://schemas.microsoft.com/office/infopath/2007/PartnerControls">
   <documentManagement>
@@ -19466,14 +20396,6 @@
 </file>
 
 <file path=customXml/itemProps1.xml><?xml version="1.0" encoding="utf-8"?>
-<ds:datastoreItem xmlns:ds="http://schemas.openxmlformats.org/officeDocument/2006/customXml" ds:itemID="{67C65656-B2D8-4C19-A873-091B25A5212E}">
-  <ds:schemaRefs>
-    <ds:schemaRef ds:uri="http://schemas.microsoft.com/sharepoint/v3/contenttype/forms"/>
-  </ds:schemaRefs>
-</ds:datastoreItem>
-</file>
-
-<file path=customXml/itemProps2.xml><?xml version="1.0" encoding="utf-8"?>
 <ds:datastoreItem xmlns:ds="http://schemas.openxmlformats.org/officeDocument/2006/customXml" ds:itemID="{70468F63-B318-4D5F-A1DF-86BE98AC2293}">
   <ds:schemaRefs>
     <ds:schemaRef ds:uri="http://schemas.microsoft.com/office/2006/metadata/contentType"/>
@@ -19492,6 +20414,14 @@
 </ds:datastoreItem>
 </file>
 
+<file path=customXml/itemProps2.xml><?xml version="1.0" encoding="utf-8"?>
+<ds:datastoreItem xmlns:ds="http://schemas.openxmlformats.org/officeDocument/2006/customXml" ds:itemID="{67C65656-B2D8-4C19-A873-091B25A5212E}">
+  <ds:schemaRefs>
+    <ds:schemaRef ds:uri="http://schemas.microsoft.com/sharepoint/v3/contenttype/forms"/>
+  </ds:schemaRefs>
+</ds:datastoreItem>
+</file>
+
 <file path=customXml/itemProps3.xml><?xml version="1.0" encoding="utf-8"?>
 <ds:datastoreItem xmlns:ds="http://schemas.openxmlformats.org/officeDocument/2006/customXml" ds:itemID="{6766878A-54ED-4867-B478-72A29DC19B89}">
   <ds:schemaRefs>
